--- a/claudedocs/PII_게이트웨이_인사팀_설명.pptx
+++ b/claudedocs/PII_게이트웨이_인사팀_설명.pptx
@@ -3111,7 +3111,7 @@
             <a:avLst/>
           </a:prstGeom>
           <a:solidFill>
-            <a:srgbClr val="0B145A"/>
+            <a:srgbClr val="FFFFFF"/>
           </a:solidFill>
           <a:ln>
             <a:noFill/>
@@ -3149,13 +3149,13 @@
         <p:spPr>
           <a:xfrm>
             <a:off x="0" y="0"/>
-            <a:ext cx="256032" cy="6858000"/>
+            <a:ext cx="12191695" cy="1371600"/>
           </a:xfrm>
           <a:prstGeom prst="rect">
             <a:avLst/>
           </a:prstGeom>
           <a:solidFill>
-            <a:srgbClr val="3E5CD0"/>
+            <a:srgbClr val="111111"/>
           </a:solidFill>
           <a:ln>
             <a:noFill/>
@@ -3186,14 +3186,58 @@
       </p:sp>
       <p:sp>
         <p:nvSpPr>
-          <p:cNvPr id="4" name="TextBox 3"/>
+          <p:cNvPr id="4" name="Rectangle 3"/>
+          <p:cNvSpPr/>
+          <p:nvPr/>
+        </p:nvSpPr>
+        <p:spPr>
+          <a:xfrm>
+            <a:off x="0" y="1371600"/>
+            <a:ext cx="12191695" cy="54864"/>
+          </a:xfrm>
+          <a:prstGeom prst="rect">
+            <a:avLst/>
+          </a:prstGeom>
+          <a:solidFill>
+            <a:srgbClr val="1428A0"/>
+          </a:solidFill>
+          <a:ln>
+            <a:noFill/>
+          </a:ln>
+          <a:effectLst/>
+        </p:spPr>
+        <p:style>
+          <a:lnRef idx="1">
+            <a:schemeClr val="accent1"/>
+          </a:lnRef>
+          <a:fillRef idx="3">
+            <a:schemeClr val="accent1"/>
+          </a:fillRef>
+          <a:effectRef idx="2">
+            <a:schemeClr val="accent1"/>
+          </a:effectRef>
+          <a:fontRef idx="minor">
+            <a:schemeClr val="lt1"/>
+          </a:fontRef>
+        </p:style>
+        <p:txBody>
+          <a:bodyPr rtlCol="0" anchor="ctr"/>
+          <a:lstStyle/>
+          <a:p>
+            <a:pPr algn="ctr"/>
+          </a:p>
+        </p:txBody>
+      </p:sp>
+      <p:sp>
+        <p:nvSpPr>
+          <p:cNvPr id="5" name="TextBox 4"/>
           <p:cNvSpPr txBox="1"/>
           <p:nvPr/>
         </p:nvSpPr>
         <p:spPr>
           <a:xfrm>
-            <a:off x="822960" y="640080"/>
-            <a:ext cx="5486400" cy="365760"/>
+            <a:off x="822960" y="475488"/>
+            <a:ext cx="10058400" cy="457200"/>
           </a:xfrm>
           <a:prstGeom prst="rect">
             <a:avLst/>
@@ -3201,7 +3245,7 @@
           <a:noFill/>
         </p:spPr>
         <p:txBody>
-          <a:bodyPr wrap="square" anchor="t" lIns="25400" rIns="25400" tIns="25400" bIns="25400">
+          <a:bodyPr wrap="square" anchor="ctr" lIns="25400" rIns="25400" tIns="25400" bIns="25400">
             <a:spAutoFit/>
           </a:bodyPr>
           <a:lstStyle/>
@@ -3212,7 +3256,7 @@
               </a:lnSpc>
             </a:pPr>
             <a:r>
-              <a:rPr sz="1600" b="1">
+              <a:rPr sz="1800" b="1">
                 <a:solidFill>
                   <a:srgbClr val="FFFFFF"/>
                 </a:solidFill>
@@ -3223,9 +3267,9 @@
               <a:t>SAMSUNG </a:t>
             </a:r>
             <a:r>
-              <a:rPr sz="1600" b="1">
-                <a:solidFill>
-                  <a:srgbClr val="9FB3F2"/>
+              <a:rPr sz="1800" b="1">
+                <a:solidFill>
+                  <a:srgbClr val="B9C4EA"/>
                 </a:solidFill>
                 <a:latin typeface="맑은 고딕"/>
                 <a:ea typeface="맑은 고딕"/>
@@ -3238,13 +3282,13 @@
       </p:sp>
       <p:sp>
         <p:nvSpPr>
-          <p:cNvPr id="5" name="TextBox 4"/>
+          <p:cNvPr id="6" name="TextBox 5"/>
           <p:cNvSpPr txBox="1"/>
           <p:nvPr/>
         </p:nvSpPr>
         <p:spPr>
           <a:xfrm>
-            <a:off x="822960" y="2286000"/>
+            <a:off x="822960" y="2468880"/>
             <a:ext cx="10515600" cy="1828800"/>
           </a:xfrm>
           <a:prstGeom prst="rect">
@@ -3260,13 +3304,13 @@
           <a:p>
             <a:pPr algn="l">
               <a:lnSpc>
-                <a:spcPct val="110000"/>
+                <a:spcPct val="112000"/>
               </a:lnSpc>
             </a:pPr>
             <a:r>
               <a:rPr sz="4400" b="1">
                 <a:solidFill>
-                  <a:srgbClr val="FFFFFF"/>
+                  <a:srgbClr val="1A1A1A"/>
                 </a:solidFill>
                 <a:latin typeface="맑은 고딕"/>
                 <a:ea typeface="맑은 고딕"/>
@@ -3278,13 +3322,13 @@
           <a:p>
             <a:pPr algn="l">
               <a:lnSpc>
-                <a:spcPct val="110000"/>
+                <a:spcPct val="112000"/>
               </a:lnSpc>
             </a:pPr>
             <a:r>
               <a:rPr sz="2200" b="0">
                 <a:solidFill>
-                  <a:srgbClr val="9FB3F2"/>
+                  <a:srgbClr val="1428A0"/>
                 </a:solidFill>
                 <a:latin typeface="맑은 고딕"/>
                 <a:ea typeface="맑은 고딕"/>
@@ -3297,13 +3341,57 @@
       </p:sp>
       <p:sp>
         <p:nvSpPr>
-          <p:cNvPr id="6" name="TextBox 5"/>
+          <p:cNvPr id="7" name="Rectangle 6"/>
+          <p:cNvSpPr/>
+          <p:nvPr/>
+        </p:nvSpPr>
+        <p:spPr>
+          <a:xfrm>
+            <a:off x="868680" y="4160520"/>
+            <a:ext cx="2103120" cy="54864"/>
+          </a:xfrm>
+          <a:prstGeom prst="rect">
+            <a:avLst/>
+          </a:prstGeom>
+          <a:solidFill>
+            <a:srgbClr val="111111"/>
+          </a:solidFill>
+          <a:ln>
+            <a:noFill/>
+          </a:ln>
+          <a:effectLst/>
+        </p:spPr>
+        <p:style>
+          <a:lnRef idx="1">
+            <a:schemeClr val="accent1"/>
+          </a:lnRef>
+          <a:fillRef idx="3">
+            <a:schemeClr val="accent1"/>
+          </a:fillRef>
+          <a:effectRef idx="2">
+            <a:schemeClr val="accent1"/>
+          </a:effectRef>
+          <a:fontRef idx="minor">
+            <a:schemeClr val="lt1"/>
+          </a:fontRef>
+        </p:style>
+        <p:txBody>
+          <a:bodyPr rtlCol="0" anchor="ctr"/>
+          <a:lstStyle/>
+          <a:p>
+            <a:pPr algn="ctr"/>
+          </a:p>
+        </p:txBody>
+      </p:sp>
+      <p:sp>
+        <p:nvSpPr>
+          <p:cNvPr id="8" name="TextBox 7"/>
           <p:cNvSpPr txBox="1"/>
           <p:nvPr/>
         </p:nvSpPr>
         <p:spPr>
           <a:xfrm>
-            <a:off x="868680" y="4297680"/>
+            <a:off x="868680" y="4389120"/>
             <a:ext cx="10058400" cy="548640"/>
           </a:xfrm>
           <a:prstGeom prst="rect">
@@ -3325,7 +3413,7 @@
             <a:r>
               <a:rPr sz="1800" b="0">
                 <a:solidFill>
-                  <a:srgbClr val="D7DEF7"/>
+                  <a:srgbClr val="1A1A1A"/>
                 </a:solidFill>
                 <a:latin typeface="맑은 고딕"/>
                 <a:ea typeface="맑은 고딕"/>
@@ -3336,7 +3424,7 @@
             <a:r>
               <a:rPr sz="1800" b="1">
                 <a:solidFill>
-                  <a:srgbClr val="FFFFFF"/>
+                  <a:srgbClr val="1A1A1A"/>
                 </a:solidFill>
                 <a:latin typeface="맑은 고딕"/>
                 <a:ea typeface="맑은 고딕"/>
@@ -3347,7 +3435,7 @@
             <a:r>
               <a:rPr sz="1800" b="0">
                 <a:solidFill>
-                  <a:srgbClr val="D7DEF7"/>
+                  <a:srgbClr val="1A1A1A"/>
                 </a:solidFill>
                 <a:latin typeface="맑은 고딕"/>
                 <a:ea typeface="맑은 고딕"/>
@@ -3360,13 +3448,13 @@
       </p:sp>
       <p:sp>
         <p:nvSpPr>
-          <p:cNvPr id="7" name="TextBox 6"/>
+          <p:cNvPr id="9" name="TextBox 8"/>
           <p:cNvSpPr txBox="1"/>
           <p:nvPr/>
         </p:nvSpPr>
         <p:spPr>
           <a:xfrm>
-            <a:off x="868680" y="5852160"/>
+            <a:off x="868680" y="5897880"/>
             <a:ext cx="10058400" cy="365760"/>
           </a:xfrm>
           <a:prstGeom prst="rect">
@@ -3388,7 +3476,7 @@
             <a:r>
               <a:rPr sz="1300" b="0">
                 <a:solidFill>
-                  <a:srgbClr val="9FB3F2"/>
+                  <a:srgbClr val="70747C"/>
                 </a:solidFill>
                 <a:latin typeface="맑은 고딕"/>
                 <a:ea typeface="맑은 고딕"/>
@@ -3426,7 +3514,7 @@
         <p:spPr>
           <a:xfrm>
             <a:off x="0" y="0"/>
-            <a:ext cx="12191695" cy="1051560"/>
+            <a:ext cx="12191695" cy="6858000"/>
           </a:xfrm>
           <a:prstGeom prst="rect">
             <a:avLst/>
@@ -3469,8 +3557,52 @@
         </p:nvSpPr>
         <p:spPr>
           <a:xfrm>
-            <a:off x="0" y="1051560"/>
-            <a:ext cx="12191695" cy="41148"/>
+            <a:off x="0" y="0"/>
+            <a:ext cx="12191695" cy="1097280"/>
+          </a:xfrm>
+          <a:prstGeom prst="rect">
+            <a:avLst/>
+          </a:prstGeom>
+          <a:solidFill>
+            <a:srgbClr val="111111"/>
+          </a:solidFill>
+          <a:ln>
+            <a:noFill/>
+          </a:ln>
+          <a:effectLst/>
+        </p:spPr>
+        <p:style>
+          <a:lnRef idx="1">
+            <a:schemeClr val="accent1"/>
+          </a:lnRef>
+          <a:fillRef idx="3">
+            <a:schemeClr val="accent1"/>
+          </a:fillRef>
+          <a:effectRef idx="2">
+            <a:schemeClr val="accent1"/>
+          </a:effectRef>
+          <a:fontRef idx="minor">
+            <a:schemeClr val="lt1"/>
+          </a:fontRef>
+        </p:style>
+        <p:txBody>
+          <a:bodyPr rtlCol="0" anchor="ctr"/>
+          <a:lstStyle/>
+          <a:p>
+            <a:pPr algn="ctr"/>
+          </a:p>
+        </p:txBody>
+      </p:sp>
+      <p:sp>
+        <p:nvSpPr>
+          <p:cNvPr id="4" name="Rectangle 3"/>
+          <p:cNvSpPr/>
+          <p:nvPr/>
+        </p:nvSpPr>
+        <p:spPr>
+          <a:xfrm>
+            <a:off x="0" y="1097280"/>
+            <a:ext cx="12191695" cy="45720"/>
           </a:xfrm>
           <a:prstGeom prst="rect">
             <a:avLst/>
@@ -3507,13 +3639,13 @@
       </p:sp>
       <p:sp>
         <p:nvSpPr>
-          <p:cNvPr id="4" name="TextBox 3"/>
+          <p:cNvPr id="5" name="TextBox 4"/>
           <p:cNvSpPr txBox="1"/>
           <p:nvPr/>
         </p:nvSpPr>
         <p:spPr>
           <a:xfrm>
-            <a:off x="548640" y="164592"/>
+            <a:off x="548640" y="182880"/>
             <a:ext cx="10058400" cy="274320"/>
           </a:xfrm>
           <a:prstGeom prst="rect">
@@ -3535,7 +3667,7 @@
             <a:r>
               <a:rPr sz="1200" b="1">
                 <a:solidFill>
-                  <a:srgbClr val="3E5CD0"/>
+                  <a:srgbClr val="B9C4EA"/>
                 </a:solidFill>
                 <a:latin typeface="맑은 고딕"/>
                 <a:ea typeface="맑은 고딕"/>
@@ -3548,14 +3680,14 @@
       </p:sp>
       <p:sp>
         <p:nvSpPr>
-          <p:cNvPr id="5" name="TextBox 4"/>
+          <p:cNvPr id="6" name="TextBox 5"/>
           <p:cNvSpPr txBox="1"/>
           <p:nvPr/>
         </p:nvSpPr>
         <p:spPr>
           <a:xfrm>
-            <a:off x="548640" y="384048"/>
-            <a:ext cx="10972800" cy="640080"/>
+            <a:off x="548640" y="420624"/>
+            <a:ext cx="10972800" cy="603504"/>
           </a:xfrm>
           <a:prstGeom prst="rect">
             <a:avLst/>
@@ -3576,7 +3708,7 @@
             <a:r>
               <a:rPr sz="2600" b="1">
                 <a:solidFill>
-                  <a:srgbClr val="0B145A"/>
+                  <a:srgbClr val="FFFFFF"/>
                 </a:solidFill>
                 <a:latin typeface="맑은 고딕"/>
                 <a:ea typeface="맑은 고딕"/>
@@ -3589,13 +3721,65 @@
       </p:sp>
       <p:sp>
         <p:nvSpPr>
-          <p:cNvPr id="6" name="TextBox 5"/>
+          <p:cNvPr id="7" name="TextBox 6"/>
           <p:cNvSpPr txBox="1"/>
           <p:nvPr/>
         </p:nvSpPr>
         <p:spPr>
           <a:xfrm>
-            <a:off x="548640" y="6455664"/>
+            <a:off x="8229600" y="182880"/>
+            <a:ext cx="3410712" cy="274320"/>
+          </a:xfrm>
+          <a:prstGeom prst="rect">
+            <a:avLst/>
+          </a:prstGeom>
+          <a:noFill/>
+        </p:spPr>
+        <p:txBody>
+          <a:bodyPr wrap="square" anchor="t" lIns="25400" rIns="25400" tIns="25400" bIns="25400">
+            <a:spAutoFit/>
+          </a:bodyPr>
+          <a:lstStyle/>
+          <a:p>
+            <a:pPr algn="r">
+              <a:lnSpc>
+                <a:spcPct val="100000"/>
+              </a:lnSpc>
+            </a:pPr>
+            <a:r>
+              <a:rPr sz="1100" b="1">
+                <a:solidFill>
+                  <a:srgbClr val="FFFFFF"/>
+                </a:solidFill>
+                <a:latin typeface="맑은 고딕"/>
+                <a:ea typeface="맑은 고딕"/>
+                <a:cs typeface="맑은 고딕"/>
+              </a:rPr>
+              <a:t>SAMSUNG </a:t>
+            </a:r>
+            <a:r>
+              <a:rPr sz="1100" b="1">
+                <a:solidFill>
+                  <a:srgbClr val="B9C4EA"/>
+                </a:solidFill>
+                <a:latin typeface="맑은 고딕"/>
+                <a:ea typeface="맑은 고딕"/>
+                <a:cs typeface="맑은 고딕"/>
+              </a:rPr>
+              <a:t>DS</a:t>
+            </a:r>
+          </a:p>
+        </p:txBody>
+      </p:sp>
+      <p:sp>
+        <p:nvSpPr>
+          <p:cNvPr id="8" name="TextBox 7"/>
+          <p:cNvSpPr txBox="1"/>
+          <p:nvPr/>
+        </p:nvSpPr>
+        <p:spPr>
+          <a:xfrm>
+            <a:off x="548640" y="6473952"/>
             <a:ext cx="6400800" cy="274320"/>
           </a:xfrm>
           <a:prstGeom prst="rect">
@@ -3617,7 +3801,7 @@
             <a:r>
               <a:rPr sz="900" b="0">
                 <a:solidFill>
-                  <a:srgbClr val="6B7280"/>
+                  <a:srgbClr val="70747C"/>
                 </a:solidFill>
                 <a:latin typeface="맑은 고딕"/>
                 <a:ea typeface="맑은 고딕"/>
@@ -3630,14 +3814,14 @@
       </p:sp>
       <p:sp>
         <p:nvSpPr>
-          <p:cNvPr id="7" name="TextBox 6"/>
+          <p:cNvPr id="9" name="TextBox 8"/>
           <p:cNvSpPr txBox="1"/>
           <p:nvPr/>
         </p:nvSpPr>
         <p:spPr>
           <a:xfrm>
-            <a:off x="5486400" y="6455664"/>
-            <a:ext cx="6126480" cy="274320"/>
+            <a:off x="5486400" y="6473952"/>
+            <a:ext cx="6153912" cy="274320"/>
           </a:xfrm>
           <a:prstGeom prst="rect">
             <a:avLst/>
@@ -3656,39 +3840,28 @@
               </a:lnSpc>
             </a:pPr>
             <a:r>
-              <a:rPr sz="900" b="1">
-                <a:solidFill>
-                  <a:srgbClr val="1428A0"/>
-                </a:solidFill>
-                <a:latin typeface="맑은 고딕"/>
-                <a:ea typeface="맑은 고딕"/>
-                <a:cs typeface="맑은 고딕"/>
-              </a:rPr>
-              <a:t>SAMSUNG </a:t>
-            </a:r>
-            <a:r>
               <a:rPr sz="900" b="0">
                 <a:solidFill>
-                  <a:srgbClr val="6B7280"/>
-                </a:solidFill>
-                <a:latin typeface="맑은 고딕"/>
-                <a:ea typeface="맑은 고딕"/>
-                <a:cs typeface="맑은 고딕"/>
-              </a:rPr>
-              <a:t>DS  |  인사팀 대상 설명자료</a:t>
-            </a:r>
-          </a:p>
-        </p:txBody>
-      </p:sp>
-      <p:sp>
-        <p:nvSpPr>
-          <p:cNvPr id="8" name="TextBox 7"/>
+                  <a:srgbClr val="70747C"/>
+                </a:solidFill>
+                <a:latin typeface="맑은 고딕"/>
+                <a:ea typeface="맑은 고딕"/>
+                <a:cs typeface="맑은 고딕"/>
+              </a:rPr>
+              <a:t>인사팀 대상 설명자료</a:t>
+            </a:r>
+          </a:p>
+        </p:txBody>
+      </p:sp>
+      <p:sp>
+        <p:nvSpPr>
+          <p:cNvPr id="10" name="TextBox 9"/>
           <p:cNvSpPr txBox="1"/>
           <p:nvPr/>
         </p:nvSpPr>
         <p:spPr>
           <a:xfrm>
-            <a:off x="548640" y="1371600"/>
+            <a:off x="548640" y="1417320"/>
             <a:ext cx="11064240" cy="548640"/>
           </a:xfrm>
           <a:prstGeom prst="rect">
@@ -3710,7 +3883,7 @@
             <a:r>
               <a:rPr sz="1800" b="0">
                 <a:solidFill>
-                  <a:srgbClr val="222222"/>
+                  <a:srgbClr val="1A1A1A"/>
                 </a:solidFill>
                 <a:latin typeface="맑은 고딕"/>
                 <a:ea typeface="맑은 고딕"/>
@@ -3732,7 +3905,7 @@
             <a:r>
               <a:rPr sz="1800" b="0">
                 <a:solidFill>
-                  <a:srgbClr val="222222"/>
+                  <a:srgbClr val="1A1A1A"/>
                 </a:solidFill>
                 <a:latin typeface="맑은 고딕"/>
                 <a:ea typeface="맑은 고딕"/>
@@ -3745,23 +3918,25 @@
       </p:sp>
       <p:sp>
         <p:nvSpPr>
-          <p:cNvPr id="9" name="Rounded Rectangle 8"/>
+          <p:cNvPr id="11" name="Rounded Rectangle 10"/>
           <p:cNvSpPr/>
           <p:nvPr/>
         </p:nvSpPr>
         <p:spPr>
           <a:xfrm>
-            <a:off x="548640" y="2057400"/>
+            <a:off x="548640" y="2103120"/>
             <a:ext cx="2057400" cy="914400"/>
           </a:xfrm>
           <a:prstGeom prst="roundRect">
             <a:avLst/>
           </a:prstGeom>
           <a:solidFill>
-            <a:srgbClr val="E8EDFB"/>
+            <a:srgbClr val="F4F5F7"/>
           </a:solidFill>
-          <a:ln>
-            <a:noFill/>
+          <a:ln w="12700">
+            <a:solidFill>
+              <a:srgbClr val="DDDFE4"/>
+            </a:solidFill>
           </a:ln>
           <a:effectLst/>
         </p:spPr>
@@ -3787,7 +3962,7 @@
             <a:r>
               <a:rPr sz="1500" b="1">
                 <a:solidFill>
-                  <a:srgbClr val="1428A0"/>
+                  <a:srgbClr val="1A1A1A"/>
                 </a:solidFill>
                 <a:latin typeface="맑은 고딕"/>
                 <a:ea typeface="맑은 고딕"/>
@@ -3801,7 +3976,7 @@
             <a:r>
               <a:rPr sz="1100" b="0">
                 <a:solidFill>
-                  <a:srgbClr val="6B7280"/>
+                  <a:srgbClr val="70747C"/>
                 </a:solidFill>
                 <a:latin typeface="맑은 고딕"/>
                 <a:ea typeface="맑은 고딕"/>
@@ -3814,23 +3989,25 @@
       </p:sp>
       <p:sp>
         <p:nvSpPr>
-          <p:cNvPr id="10" name="Rounded Rectangle 9"/>
+          <p:cNvPr id="12" name="Rounded Rectangle 11"/>
           <p:cNvSpPr/>
           <p:nvPr/>
         </p:nvSpPr>
         <p:spPr>
           <a:xfrm>
-            <a:off x="2761488" y="2057400"/>
+            <a:off x="2761488" y="2103120"/>
             <a:ext cx="2057400" cy="914400"/>
           </a:xfrm>
           <a:prstGeom prst="roundRect">
             <a:avLst/>
           </a:prstGeom>
           <a:solidFill>
-            <a:srgbClr val="E8EDFB"/>
+            <a:srgbClr val="F4F5F7"/>
           </a:solidFill>
-          <a:ln>
-            <a:noFill/>
+          <a:ln w="12700">
+            <a:solidFill>
+              <a:srgbClr val="DDDFE4"/>
+            </a:solidFill>
           </a:ln>
           <a:effectLst/>
         </p:spPr>
@@ -3856,7 +4033,7 @@
             <a:r>
               <a:rPr sz="1500" b="1">
                 <a:solidFill>
-                  <a:srgbClr val="1428A0"/>
+                  <a:srgbClr val="1A1A1A"/>
                 </a:solidFill>
                 <a:latin typeface="맑은 고딕"/>
                 <a:ea typeface="맑은 고딕"/>
@@ -3870,7 +4047,7 @@
             <a:r>
               <a:rPr sz="1100" b="0">
                 <a:solidFill>
-                  <a:srgbClr val="6B7280"/>
+                  <a:srgbClr val="70747C"/>
                 </a:solidFill>
                 <a:latin typeface="맑은 고딕"/>
                 <a:ea typeface="맑은 고딕"/>
@@ -3883,23 +4060,25 @@
       </p:sp>
       <p:sp>
         <p:nvSpPr>
-          <p:cNvPr id="11" name="Rounded Rectangle 10"/>
+          <p:cNvPr id="13" name="Rounded Rectangle 12"/>
           <p:cNvSpPr/>
           <p:nvPr/>
         </p:nvSpPr>
         <p:spPr>
           <a:xfrm>
-            <a:off x="4974336" y="2057400"/>
+            <a:off x="4974336" y="2103120"/>
             <a:ext cx="2057400" cy="914400"/>
           </a:xfrm>
           <a:prstGeom prst="roundRect">
             <a:avLst/>
           </a:prstGeom>
           <a:solidFill>
-            <a:srgbClr val="E8EDFB"/>
+            <a:srgbClr val="F4F5F7"/>
           </a:solidFill>
-          <a:ln>
-            <a:noFill/>
+          <a:ln w="12700">
+            <a:solidFill>
+              <a:srgbClr val="DDDFE4"/>
+            </a:solidFill>
           </a:ln>
           <a:effectLst/>
         </p:spPr>
@@ -3925,7 +4104,7 @@
             <a:r>
               <a:rPr sz="1500" b="1">
                 <a:solidFill>
-                  <a:srgbClr val="1428A0"/>
+                  <a:srgbClr val="1A1A1A"/>
                 </a:solidFill>
                 <a:latin typeface="맑은 고딕"/>
                 <a:ea typeface="맑은 고딕"/>
@@ -3939,7 +4118,7 @@
             <a:r>
               <a:rPr sz="1100" b="0">
                 <a:solidFill>
-                  <a:srgbClr val="6B7280"/>
+                  <a:srgbClr val="70747C"/>
                 </a:solidFill>
                 <a:latin typeface="맑은 고딕"/>
                 <a:ea typeface="맑은 고딕"/>
@@ -3952,23 +4131,25 @@
       </p:sp>
       <p:sp>
         <p:nvSpPr>
-          <p:cNvPr id="12" name="Rounded Rectangle 11"/>
+          <p:cNvPr id="14" name="Rounded Rectangle 13"/>
           <p:cNvSpPr/>
           <p:nvPr/>
         </p:nvSpPr>
         <p:spPr>
           <a:xfrm>
-            <a:off x="7187183" y="2057400"/>
+            <a:off x="7187183" y="2103120"/>
             <a:ext cx="2057400" cy="914400"/>
           </a:xfrm>
           <a:prstGeom prst="roundRect">
             <a:avLst/>
           </a:prstGeom>
           <a:solidFill>
-            <a:srgbClr val="E8EDFB"/>
+            <a:srgbClr val="F4F5F7"/>
           </a:solidFill>
-          <a:ln>
-            <a:noFill/>
+          <a:ln w="12700">
+            <a:solidFill>
+              <a:srgbClr val="DDDFE4"/>
+            </a:solidFill>
           </a:ln>
           <a:effectLst/>
         </p:spPr>
@@ -3994,7 +4175,7 @@
             <a:r>
               <a:rPr sz="1500" b="1">
                 <a:solidFill>
-                  <a:srgbClr val="1428A0"/>
+                  <a:srgbClr val="1A1A1A"/>
                 </a:solidFill>
                 <a:latin typeface="맑은 고딕"/>
                 <a:ea typeface="맑은 고딕"/>
@@ -4008,7 +4189,7 @@
             <a:r>
               <a:rPr sz="1100" b="0">
                 <a:solidFill>
-                  <a:srgbClr val="6B7280"/>
+                  <a:srgbClr val="70747C"/>
                 </a:solidFill>
                 <a:latin typeface="맑은 고딕"/>
                 <a:ea typeface="맑은 고딕"/>
@@ -4021,23 +4202,25 @@
       </p:sp>
       <p:sp>
         <p:nvSpPr>
-          <p:cNvPr id="13" name="Rounded Rectangle 12"/>
+          <p:cNvPr id="15" name="Rounded Rectangle 14"/>
           <p:cNvSpPr/>
           <p:nvPr/>
         </p:nvSpPr>
         <p:spPr>
           <a:xfrm>
-            <a:off x="9400032" y="2057400"/>
+            <a:off x="9400032" y="2103120"/>
             <a:ext cx="2057400" cy="914400"/>
           </a:xfrm>
           <a:prstGeom prst="roundRect">
             <a:avLst/>
           </a:prstGeom>
           <a:solidFill>
-            <a:srgbClr val="E8EDFB"/>
+            <a:srgbClr val="F4F5F7"/>
           </a:solidFill>
-          <a:ln>
-            <a:noFill/>
+          <a:ln w="12700">
+            <a:solidFill>
+              <a:srgbClr val="DDDFE4"/>
+            </a:solidFill>
           </a:ln>
           <a:effectLst/>
         </p:spPr>
@@ -4063,7 +4246,7 @@
             <a:r>
               <a:rPr sz="1500" b="1">
                 <a:solidFill>
-                  <a:srgbClr val="1428A0"/>
+                  <a:srgbClr val="1A1A1A"/>
                 </a:solidFill>
                 <a:latin typeface="맑은 고딕"/>
                 <a:ea typeface="맑은 고딕"/>
@@ -4077,7 +4260,7 @@
             <a:r>
               <a:rPr sz="1100" b="0">
                 <a:solidFill>
-                  <a:srgbClr val="6B7280"/>
+                  <a:srgbClr val="70747C"/>
                 </a:solidFill>
                 <a:latin typeface="맑은 고딕"/>
                 <a:ea typeface="맑은 고딕"/>
@@ -4090,13 +4273,13 @@
       </p:sp>
       <p:sp>
         <p:nvSpPr>
-          <p:cNvPr id="14" name="TextBox 13"/>
+          <p:cNvPr id="16" name="TextBox 15"/>
           <p:cNvSpPr txBox="1"/>
           <p:nvPr/>
         </p:nvSpPr>
         <p:spPr>
           <a:xfrm>
-            <a:off x="548640" y="3429000"/>
+            <a:off x="548640" y="3474720"/>
             <a:ext cx="11064240" cy="548640"/>
           </a:xfrm>
           <a:prstGeom prst="rect">
@@ -4118,7 +4301,7 @@
             <a:r>
               <a:rPr sz="1800" b="0">
                 <a:solidFill>
-                  <a:srgbClr val="222222"/>
+                  <a:srgbClr val="1A1A1A"/>
                 </a:solidFill>
                 <a:latin typeface="맑은 고딕"/>
                 <a:ea typeface="맑은 고딕"/>
@@ -4140,7 +4323,7 @@
             <a:r>
               <a:rPr sz="1800" b="0">
                 <a:solidFill>
-                  <a:srgbClr val="222222"/>
+                  <a:srgbClr val="1A1A1A"/>
                 </a:solidFill>
                 <a:latin typeface="맑은 고딕"/>
                 <a:ea typeface="맑은 고딕"/>
@@ -4153,13 +4336,13 @@
       </p:sp>
       <p:sp>
         <p:nvSpPr>
-          <p:cNvPr id="15" name="Rounded Rectangle 14"/>
+          <p:cNvPr id="17" name="Rounded Rectangle 16"/>
           <p:cNvSpPr/>
           <p:nvPr/>
         </p:nvSpPr>
         <p:spPr>
           <a:xfrm>
-            <a:off x="548640" y="4114800"/>
+            <a:off x="548640" y="4160520"/>
             <a:ext cx="11091672" cy="1737360"/>
           </a:xfrm>
           <a:prstGeom prst="roundRect">
@@ -4211,7 +4394,7 @@
             <a:r>
               <a:rPr sz="1400" b="0">
                 <a:solidFill>
-                  <a:srgbClr val="6B7280"/>
+                  <a:srgbClr val="70747C"/>
                 </a:solidFill>
                 <a:latin typeface="Consolas"/>
                 <a:ea typeface="Consolas"/>
@@ -4225,7 +4408,7 @@
             <a:r>
               <a:rPr sz="1400" b="0">
                 <a:solidFill>
-                  <a:srgbClr val="222222"/>
+                  <a:srgbClr val="1A1A1A"/>
                 </a:solidFill>
                 <a:latin typeface="맑은 고딕"/>
                 <a:ea typeface="맑은 고딕"/>
@@ -4263,7 +4446,7 @@
         <p:spPr>
           <a:xfrm>
             <a:off x="0" y="0"/>
-            <a:ext cx="12191695" cy="1051560"/>
+            <a:ext cx="12191695" cy="6858000"/>
           </a:xfrm>
           <a:prstGeom prst="rect">
             <a:avLst/>
@@ -4306,8 +4489,52 @@
         </p:nvSpPr>
         <p:spPr>
           <a:xfrm>
-            <a:off x="0" y="1051560"/>
-            <a:ext cx="12191695" cy="41148"/>
+            <a:off x="0" y="0"/>
+            <a:ext cx="12191695" cy="1097280"/>
+          </a:xfrm>
+          <a:prstGeom prst="rect">
+            <a:avLst/>
+          </a:prstGeom>
+          <a:solidFill>
+            <a:srgbClr val="111111"/>
+          </a:solidFill>
+          <a:ln>
+            <a:noFill/>
+          </a:ln>
+          <a:effectLst/>
+        </p:spPr>
+        <p:style>
+          <a:lnRef idx="1">
+            <a:schemeClr val="accent1"/>
+          </a:lnRef>
+          <a:fillRef idx="3">
+            <a:schemeClr val="accent1"/>
+          </a:fillRef>
+          <a:effectRef idx="2">
+            <a:schemeClr val="accent1"/>
+          </a:effectRef>
+          <a:fontRef idx="minor">
+            <a:schemeClr val="lt1"/>
+          </a:fontRef>
+        </p:style>
+        <p:txBody>
+          <a:bodyPr rtlCol="0" anchor="ctr"/>
+          <a:lstStyle/>
+          <a:p>
+            <a:pPr algn="ctr"/>
+          </a:p>
+        </p:txBody>
+      </p:sp>
+      <p:sp>
+        <p:nvSpPr>
+          <p:cNvPr id="4" name="Rectangle 3"/>
+          <p:cNvSpPr/>
+          <p:nvPr/>
+        </p:nvSpPr>
+        <p:spPr>
+          <a:xfrm>
+            <a:off x="0" y="1097280"/>
+            <a:ext cx="12191695" cy="45720"/>
           </a:xfrm>
           <a:prstGeom prst="rect">
             <a:avLst/>
@@ -4344,13 +4571,13 @@
       </p:sp>
       <p:sp>
         <p:nvSpPr>
-          <p:cNvPr id="4" name="TextBox 3"/>
+          <p:cNvPr id="5" name="TextBox 4"/>
           <p:cNvSpPr txBox="1"/>
           <p:nvPr/>
         </p:nvSpPr>
         <p:spPr>
           <a:xfrm>
-            <a:off x="548640" y="164592"/>
+            <a:off x="548640" y="182880"/>
             <a:ext cx="10058400" cy="274320"/>
           </a:xfrm>
           <a:prstGeom prst="rect">
@@ -4372,7 +4599,7 @@
             <a:r>
               <a:rPr sz="1200" b="1">
                 <a:solidFill>
-                  <a:srgbClr val="3E5CD0"/>
+                  <a:srgbClr val="B9C4EA"/>
                 </a:solidFill>
                 <a:latin typeface="맑은 고딕"/>
                 <a:ea typeface="맑은 고딕"/>
@@ -4385,14 +4612,14 @@
       </p:sp>
       <p:sp>
         <p:nvSpPr>
-          <p:cNvPr id="5" name="TextBox 4"/>
+          <p:cNvPr id="6" name="TextBox 5"/>
           <p:cNvSpPr txBox="1"/>
           <p:nvPr/>
         </p:nvSpPr>
         <p:spPr>
           <a:xfrm>
-            <a:off x="548640" y="384048"/>
-            <a:ext cx="10972800" cy="640080"/>
+            <a:off x="548640" y="420624"/>
+            <a:ext cx="10972800" cy="603504"/>
           </a:xfrm>
           <a:prstGeom prst="rect">
             <a:avLst/>
@@ -4413,7 +4640,7 @@
             <a:r>
               <a:rPr sz="2600" b="1">
                 <a:solidFill>
-                  <a:srgbClr val="0B145A"/>
+                  <a:srgbClr val="FFFFFF"/>
                 </a:solidFill>
                 <a:latin typeface="맑은 고딕"/>
                 <a:ea typeface="맑은 고딕"/>
@@ -4426,13 +4653,65 @@
       </p:sp>
       <p:sp>
         <p:nvSpPr>
-          <p:cNvPr id="6" name="TextBox 5"/>
+          <p:cNvPr id="7" name="TextBox 6"/>
           <p:cNvSpPr txBox="1"/>
           <p:nvPr/>
         </p:nvSpPr>
         <p:spPr>
           <a:xfrm>
-            <a:off x="548640" y="6455664"/>
+            <a:off x="8229600" y="182880"/>
+            <a:ext cx="3410712" cy="274320"/>
+          </a:xfrm>
+          <a:prstGeom prst="rect">
+            <a:avLst/>
+          </a:prstGeom>
+          <a:noFill/>
+        </p:spPr>
+        <p:txBody>
+          <a:bodyPr wrap="square" anchor="t" lIns="25400" rIns="25400" tIns="25400" bIns="25400">
+            <a:spAutoFit/>
+          </a:bodyPr>
+          <a:lstStyle/>
+          <a:p>
+            <a:pPr algn="r">
+              <a:lnSpc>
+                <a:spcPct val="100000"/>
+              </a:lnSpc>
+            </a:pPr>
+            <a:r>
+              <a:rPr sz="1100" b="1">
+                <a:solidFill>
+                  <a:srgbClr val="FFFFFF"/>
+                </a:solidFill>
+                <a:latin typeface="맑은 고딕"/>
+                <a:ea typeface="맑은 고딕"/>
+                <a:cs typeface="맑은 고딕"/>
+              </a:rPr>
+              <a:t>SAMSUNG </a:t>
+            </a:r>
+            <a:r>
+              <a:rPr sz="1100" b="1">
+                <a:solidFill>
+                  <a:srgbClr val="B9C4EA"/>
+                </a:solidFill>
+                <a:latin typeface="맑은 고딕"/>
+                <a:ea typeface="맑은 고딕"/>
+                <a:cs typeface="맑은 고딕"/>
+              </a:rPr>
+              <a:t>DS</a:t>
+            </a:r>
+          </a:p>
+        </p:txBody>
+      </p:sp>
+      <p:sp>
+        <p:nvSpPr>
+          <p:cNvPr id="8" name="TextBox 7"/>
+          <p:cNvSpPr txBox="1"/>
+          <p:nvPr/>
+        </p:nvSpPr>
+        <p:spPr>
+          <a:xfrm>
+            <a:off x="548640" y="6473952"/>
             <a:ext cx="6400800" cy="274320"/>
           </a:xfrm>
           <a:prstGeom prst="rect">
@@ -4454,7 +4733,7 @@
             <a:r>
               <a:rPr sz="900" b="0">
                 <a:solidFill>
-                  <a:srgbClr val="6B7280"/>
+                  <a:srgbClr val="70747C"/>
                 </a:solidFill>
                 <a:latin typeface="맑은 고딕"/>
                 <a:ea typeface="맑은 고딕"/>
@@ -4467,14 +4746,14 @@
       </p:sp>
       <p:sp>
         <p:nvSpPr>
-          <p:cNvPr id="7" name="TextBox 6"/>
+          <p:cNvPr id="9" name="TextBox 8"/>
           <p:cNvSpPr txBox="1"/>
           <p:nvPr/>
         </p:nvSpPr>
         <p:spPr>
           <a:xfrm>
-            <a:off x="5486400" y="6455664"/>
-            <a:ext cx="6126480" cy="274320"/>
+            <a:off x="5486400" y="6473952"/>
+            <a:ext cx="6153912" cy="274320"/>
           </a:xfrm>
           <a:prstGeom prst="rect">
             <a:avLst/>
@@ -4493,46 +4772,35 @@
               </a:lnSpc>
             </a:pPr>
             <a:r>
-              <a:rPr sz="900" b="1">
-                <a:solidFill>
-                  <a:srgbClr val="1428A0"/>
-                </a:solidFill>
-                <a:latin typeface="맑은 고딕"/>
-                <a:ea typeface="맑은 고딕"/>
-                <a:cs typeface="맑은 고딕"/>
-              </a:rPr>
-              <a:t>SAMSUNG </a:t>
-            </a:r>
-            <a:r>
               <a:rPr sz="900" b="0">
                 <a:solidFill>
-                  <a:srgbClr val="6B7280"/>
-                </a:solidFill>
-                <a:latin typeface="맑은 고딕"/>
-                <a:ea typeface="맑은 고딕"/>
-                <a:cs typeface="맑은 고딕"/>
-              </a:rPr>
-              <a:t>DS  |  인사팀 대상 설명자료</a:t>
-            </a:r>
-          </a:p>
-        </p:txBody>
-      </p:sp>
-      <p:sp>
-        <p:nvSpPr>
-          <p:cNvPr id="8" name="Rounded Rectangle 7"/>
+                  <a:srgbClr val="70747C"/>
+                </a:solidFill>
+                <a:latin typeface="맑은 고딕"/>
+                <a:ea typeface="맑은 고딕"/>
+                <a:cs typeface="맑은 고딕"/>
+              </a:rPr>
+              <a:t>인사팀 대상 설명자료</a:t>
+            </a:r>
+          </a:p>
+        </p:txBody>
+      </p:sp>
+      <p:sp>
+        <p:nvSpPr>
+          <p:cNvPr id="10" name="Rounded Rectangle 9"/>
           <p:cNvSpPr/>
           <p:nvPr/>
         </p:nvSpPr>
         <p:spPr>
           <a:xfrm>
-            <a:off x="548640" y="1371600"/>
+            <a:off x="548640" y="1417320"/>
             <a:ext cx="11091672" cy="1234440"/>
           </a:xfrm>
           <a:prstGeom prst="roundRect">
             <a:avLst/>
           </a:prstGeom>
           <a:solidFill>
-            <a:srgbClr val="1428A0"/>
+            <a:srgbClr val="111111"/>
           </a:solidFill>
           <a:ln>
             <a:noFill/>
@@ -4588,13 +4856,13 @@
       </p:sp>
       <p:sp>
         <p:nvSpPr>
-          <p:cNvPr id="9" name="TextBox 8"/>
+          <p:cNvPr id="11" name="TextBox 10"/>
           <p:cNvSpPr txBox="1"/>
           <p:nvPr/>
         </p:nvSpPr>
         <p:spPr>
           <a:xfrm>
-            <a:off x="548640" y="2880360"/>
+            <a:off x="548640" y="2926080"/>
             <a:ext cx="10972800" cy="365760"/>
           </a:xfrm>
           <a:prstGeom prst="rect">
@@ -4616,7 +4884,7 @@
             <a:r>
               <a:rPr sz="1500" b="1">
                 <a:solidFill>
-                  <a:srgbClr val="3E5CD0"/>
+                  <a:srgbClr val="1428A0"/>
                 </a:solidFill>
                 <a:latin typeface="맑은 고딕"/>
                 <a:ea typeface="맑은 고딕"/>
@@ -4629,24 +4897,24 @@
       </p:sp>
       <p:sp>
         <p:nvSpPr>
-          <p:cNvPr id="10" name="Rounded Rectangle 9"/>
+          <p:cNvPr id="12" name="Rounded Rectangle 11"/>
           <p:cNvSpPr/>
           <p:nvPr/>
         </p:nvSpPr>
         <p:spPr>
           <a:xfrm>
-            <a:off x="548640" y="3291840"/>
+            <a:off x="548640" y="3337560"/>
             <a:ext cx="3520440" cy="2286000"/>
           </a:xfrm>
           <a:prstGeom prst="roundRect">
             <a:avLst/>
           </a:prstGeom>
           <a:solidFill>
-            <a:srgbClr val="F4F6FB"/>
+            <a:srgbClr val="F4F5F7"/>
           </a:solidFill>
           <a:ln w="12700">
             <a:solidFill>
-              <a:srgbClr val="E2E6F0"/>
+              <a:srgbClr val="DDDFE4"/>
             </a:solidFill>
           </a:ln>
           <a:effectLst/>
@@ -4675,20 +4943,20 @@
       </p:sp>
       <p:sp>
         <p:nvSpPr>
-          <p:cNvPr id="11" name="Oval 10"/>
+          <p:cNvPr id="13" name="Oval 12"/>
           <p:cNvSpPr/>
           <p:nvPr/>
         </p:nvSpPr>
         <p:spPr>
           <a:xfrm>
-            <a:off x="777240" y="3520440"/>
+            <a:off x="777240" y="3566160"/>
             <a:ext cx="548640" cy="548640"/>
           </a:xfrm>
           <a:prstGeom prst="ellipse">
             <a:avLst/>
           </a:prstGeom>
           <a:solidFill>
-            <a:srgbClr val="1428A0"/>
+            <a:srgbClr val="111111"/>
           </a:solidFill>
           <a:ln>
             <a:noFill/>
@@ -4730,13 +4998,13 @@
       </p:sp>
       <p:sp>
         <p:nvSpPr>
-          <p:cNvPr id="12" name="TextBox 11"/>
+          <p:cNvPr id="14" name="TextBox 13"/>
           <p:cNvSpPr txBox="1"/>
           <p:nvPr/>
         </p:nvSpPr>
         <p:spPr>
           <a:xfrm>
-            <a:off x="777240" y="4251960"/>
+            <a:off x="777240" y="4297680"/>
             <a:ext cx="3108960" cy="457200"/>
           </a:xfrm>
           <a:prstGeom prst="rect">
@@ -4758,7 +5026,7 @@
             <a:r>
               <a:rPr sz="1700" b="1">
                 <a:solidFill>
-                  <a:srgbClr val="0B145A"/>
+                  <a:srgbClr val="1A1A1A"/>
                 </a:solidFill>
                 <a:latin typeface="맑은 고딕"/>
                 <a:ea typeface="맑은 고딕"/>
@@ -4771,13 +5039,13 @@
       </p:sp>
       <p:sp>
         <p:nvSpPr>
-          <p:cNvPr id="13" name="TextBox 12"/>
+          <p:cNvPr id="15" name="TextBox 14"/>
           <p:cNvSpPr txBox="1"/>
           <p:nvPr/>
         </p:nvSpPr>
         <p:spPr>
           <a:xfrm>
-            <a:off x="777240" y="4709160"/>
+            <a:off x="777240" y="4754880"/>
             <a:ext cx="3108960" cy="914400"/>
           </a:xfrm>
           <a:prstGeom prst="rect">
@@ -4799,7 +5067,7 @@
             <a:r>
               <a:rPr sz="1300" b="0">
                 <a:solidFill>
-                  <a:srgbClr val="222222"/>
+                  <a:srgbClr val="1A1A1A"/>
                 </a:solidFill>
                 <a:latin typeface="맑은 고딕"/>
                 <a:ea typeface="맑은 고딕"/>
@@ -4812,24 +5080,24 @@
       </p:sp>
       <p:sp>
         <p:nvSpPr>
-          <p:cNvPr id="14" name="Rounded Rectangle 13"/>
+          <p:cNvPr id="16" name="Rounded Rectangle 15"/>
           <p:cNvSpPr/>
           <p:nvPr/>
         </p:nvSpPr>
         <p:spPr>
           <a:xfrm>
-            <a:off x="4242816" y="3291840"/>
+            <a:off x="4242816" y="3337560"/>
             <a:ext cx="3520440" cy="2286000"/>
           </a:xfrm>
           <a:prstGeom prst="roundRect">
             <a:avLst/>
           </a:prstGeom>
           <a:solidFill>
-            <a:srgbClr val="F4F6FB"/>
+            <a:srgbClr val="F4F5F7"/>
           </a:solidFill>
           <a:ln w="12700">
             <a:solidFill>
-              <a:srgbClr val="E2E6F0"/>
+              <a:srgbClr val="DDDFE4"/>
             </a:solidFill>
           </a:ln>
           <a:effectLst/>
@@ -4858,20 +5126,20 @@
       </p:sp>
       <p:sp>
         <p:nvSpPr>
-          <p:cNvPr id="15" name="Oval 14"/>
+          <p:cNvPr id="17" name="Oval 16"/>
           <p:cNvSpPr/>
           <p:nvPr/>
         </p:nvSpPr>
         <p:spPr>
           <a:xfrm>
-            <a:off x="4471416" y="3520440"/>
+            <a:off x="4471416" y="3566160"/>
             <a:ext cx="548640" cy="548640"/>
           </a:xfrm>
           <a:prstGeom prst="ellipse">
             <a:avLst/>
           </a:prstGeom>
           <a:solidFill>
-            <a:srgbClr val="1428A0"/>
+            <a:srgbClr val="111111"/>
           </a:solidFill>
           <a:ln>
             <a:noFill/>
@@ -4913,13 +5181,13 @@
       </p:sp>
       <p:sp>
         <p:nvSpPr>
-          <p:cNvPr id="16" name="TextBox 15"/>
+          <p:cNvPr id="18" name="TextBox 17"/>
           <p:cNvSpPr txBox="1"/>
           <p:nvPr/>
         </p:nvSpPr>
         <p:spPr>
           <a:xfrm>
-            <a:off x="4471416" y="4251960"/>
+            <a:off x="4471416" y="4297680"/>
             <a:ext cx="3108960" cy="457200"/>
           </a:xfrm>
           <a:prstGeom prst="rect">
@@ -4941,7 +5209,7 @@
             <a:r>
               <a:rPr sz="1700" b="1">
                 <a:solidFill>
-                  <a:srgbClr val="0B145A"/>
+                  <a:srgbClr val="1A1A1A"/>
                 </a:solidFill>
                 <a:latin typeface="맑은 고딕"/>
                 <a:ea typeface="맑은 고딕"/>
@@ -4954,13 +5222,13 @@
       </p:sp>
       <p:sp>
         <p:nvSpPr>
-          <p:cNvPr id="17" name="TextBox 16"/>
+          <p:cNvPr id="19" name="TextBox 18"/>
           <p:cNvSpPr txBox="1"/>
           <p:nvPr/>
         </p:nvSpPr>
         <p:spPr>
           <a:xfrm>
-            <a:off x="4471416" y="4709160"/>
+            <a:off x="4471416" y="4754880"/>
             <a:ext cx="3108960" cy="914400"/>
           </a:xfrm>
           <a:prstGeom prst="rect">
@@ -4982,7 +5250,7 @@
             <a:r>
               <a:rPr sz="1300" b="0">
                 <a:solidFill>
-                  <a:srgbClr val="222222"/>
+                  <a:srgbClr val="1A1A1A"/>
                 </a:solidFill>
                 <a:latin typeface="맑은 고딕"/>
                 <a:ea typeface="맑은 고딕"/>
@@ -4995,24 +5263,24 @@
       </p:sp>
       <p:sp>
         <p:nvSpPr>
-          <p:cNvPr id="18" name="Rounded Rectangle 17"/>
+          <p:cNvPr id="20" name="Rounded Rectangle 19"/>
           <p:cNvSpPr/>
           <p:nvPr/>
         </p:nvSpPr>
         <p:spPr>
           <a:xfrm>
-            <a:off x="7936992" y="3291840"/>
+            <a:off x="7936992" y="3337560"/>
             <a:ext cx="3520440" cy="2286000"/>
           </a:xfrm>
           <a:prstGeom prst="roundRect">
             <a:avLst/>
           </a:prstGeom>
           <a:solidFill>
-            <a:srgbClr val="F4F6FB"/>
+            <a:srgbClr val="F4F5F7"/>
           </a:solidFill>
           <a:ln w="12700">
             <a:solidFill>
-              <a:srgbClr val="E2E6F0"/>
+              <a:srgbClr val="DDDFE4"/>
             </a:solidFill>
           </a:ln>
           <a:effectLst/>
@@ -5041,20 +5309,20 @@
       </p:sp>
       <p:sp>
         <p:nvSpPr>
-          <p:cNvPr id="19" name="Oval 18"/>
+          <p:cNvPr id="21" name="Oval 20"/>
           <p:cNvSpPr/>
           <p:nvPr/>
         </p:nvSpPr>
         <p:spPr>
           <a:xfrm>
-            <a:off x="8165592" y="3520440"/>
+            <a:off x="8165592" y="3566160"/>
             <a:ext cx="548640" cy="548640"/>
           </a:xfrm>
           <a:prstGeom prst="ellipse">
             <a:avLst/>
           </a:prstGeom>
           <a:solidFill>
-            <a:srgbClr val="1428A0"/>
+            <a:srgbClr val="111111"/>
           </a:solidFill>
           <a:ln>
             <a:noFill/>
@@ -5096,13 +5364,13 @@
       </p:sp>
       <p:sp>
         <p:nvSpPr>
-          <p:cNvPr id="20" name="TextBox 19"/>
+          <p:cNvPr id="22" name="TextBox 21"/>
           <p:cNvSpPr txBox="1"/>
           <p:nvPr/>
         </p:nvSpPr>
         <p:spPr>
           <a:xfrm>
-            <a:off x="8165592" y="4251960"/>
+            <a:off x="8165592" y="4297680"/>
             <a:ext cx="3108960" cy="457200"/>
           </a:xfrm>
           <a:prstGeom prst="rect">
@@ -5124,7 +5392,7 @@
             <a:r>
               <a:rPr sz="1700" b="1">
                 <a:solidFill>
-                  <a:srgbClr val="0B145A"/>
+                  <a:srgbClr val="1A1A1A"/>
                 </a:solidFill>
                 <a:latin typeface="맑은 고딕"/>
                 <a:ea typeface="맑은 고딕"/>
@@ -5137,13 +5405,13 @@
       </p:sp>
       <p:sp>
         <p:nvSpPr>
-          <p:cNvPr id="21" name="TextBox 20"/>
+          <p:cNvPr id="23" name="TextBox 22"/>
           <p:cNvSpPr txBox="1"/>
           <p:nvPr/>
         </p:nvSpPr>
         <p:spPr>
           <a:xfrm>
-            <a:off x="8165592" y="4709160"/>
+            <a:off x="8165592" y="4754880"/>
             <a:ext cx="3108960" cy="914400"/>
           </a:xfrm>
           <a:prstGeom prst="rect">
@@ -5165,7 +5433,7 @@
             <a:r>
               <a:rPr sz="1300" b="0">
                 <a:solidFill>
-                  <a:srgbClr val="222222"/>
+                  <a:srgbClr val="1A1A1A"/>
                 </a:solidFill>
                 <a:latin typeface="맑은 고딕"/>
                 <a:ea typeface="맑은 고딕"/>
@@ -5203,7 +5471,7 @@
         <p:spPr>
           <a:xfrm>
             <a:off x="0" y="0"/>
-            <a:ext cx="12191695" cy="1051560"/>
+            <a:ext cx="12191695" cy="6858000"/>
           </a:xfrm>
           <a:prstGeom prst="rect">
             <a:avLst/>
@@ -5246,8 +5514,52 @@
         </p:nvSpPr>
         <p:spPr>
           <a:xfrm>
-            <a:off x="0" y="1051560"/>
-            <a:ext cx="12191695" cy="41148"/>
+            <a:off x="0" y="0"/>
+            <a:ext cx="12191695" cy="1097280"/>
+          </a:xfrm>
+          <a:prstGeom prst="rect">
+            <a:avLst/>
+          </a:prstGeom>
+          <a:solidFill>
+            <a:srgbClr val="111111"/>
+          </a:solidFill>
+          <a:ln>
+            <a:noFill/>
+          </a:ln>
+          <a:effectLst/>
+        </p:spPr>
+        <p:style>
+          <a:lnRef idx="1">
+            <a:schemeClr val="accent1"/>
+          </a:lnRef>
+          <a:fillRef idx="3">
+            <a:schemeClr val="accent1"/>
+          </a:fillRef>
+          <a:effectRef idx="2">
+            <a:schemeClr val="accent1"/>
+          </a:effectRef>
+          <a:fontRef idx="minor">
+            <a:schemeClr val="lt1"/>
+          </a:fontRef>
+        </p:style>
+        <p:txBody>
+          <a:bodyPr rtlCol="0" anchor="ctr"/>
+          <a:lstStyle/>
+          <a:p>
+            <a:pPr algn="ctr"/>
+          </a:p>
+        </p:txBody>
+      </p:sp>
+      <p:sp>
+        <p:nvSpPr>
+          <p:cNvPr id="4" name="Rectangle 3"/>
+          <p:cNvSpPr/>
+          <p:nvPr/>
+        </p:nvSpPr>
+        <p:spPr>
+          <a:xfrm>
+            <a:off x="0" y="1097280"/>
+            <a:ext cx="12191695" cy="45720"/>
           </a:xfrm>
           <a:prstGeom prst="rect">
             <a:avLst/>
@@ -5284,13 +5596,13 @@
       </p:sp>
       <p:sp>
         <p:nvSpPr>
-          <p:cNvPr id="4" name="TextBox 3"/>
+          <p:cNvPr id="5" name="TextBox 4"/>
           <p:cNvSpPr txBox="1"/>
           <p:nvPr/>
         </p:nvSpPr>
         <p:spPr>
           <a:xfrm>
-            <a:off x="548640" y="164592"/>
+            <a:off x="548640" y="182880"/>
             <a:ext cx="10058400" cy="274320"/>
           </a:xfrm>
           <a:prstGeom prst="rect">
@@ -5312,7 +5624,7 @@
             <a:r>
               <a:rPr sz="1200" b="1">
                 <a:solidFill>
-                  <a:srgbClr val="3E5CD0"/>
+                  <a:srgbClr val="B9C4EA"/>
                 </a:solidFill>
                 <a:latin typeface="맑은 고딕"/>
                 <a:ea typeface="맑은 고딕"/>
@@ -5325,14 +5637,14 @@
       </p:sp>
       <p:sp>
         <p:nvSpPr>
-          <p:cNvPr id="5" name="TextBox 4"/>
+          <p:cNvPr id="6" name="TextBox 5"/>
           <p:cNvSpPr txBox="1"/>
           <p:nvPr/>
         </p:nvSpPr>
         <p:spPr>
           <a:xfrm>
-            <a:off x="548640" y="384048"/>
-            <a:ext cx="10972800" cy="640080"/>
+            <a:off x="548640" y="420624"/>
+            <a:ext cx="10972800" cy="603504"/>
           </a:xfrm>
           <a:prstGeom prst="rect">
             <a:avLst/>
@@ -5353,7 +5665,7 @@
             <a:r>
               <a:rPr sz="2600" b="1">
                 <a:solidFill>
-                  <a:srgbClr val="0B145A"/>
+                  <a:srgbClr val="FFFFFF"/>
                 </a:solidFill>
                 <a:latin typeface="맑은 고딕"/>
                 <a:ea typeface="맑은 고딕"/>
@@ -5366,13 +5678,65 @@
       </p:sp>
       <p:sp>
         <p:nvSpPr>
-          <p:cNvPr id="6" name="TextBox 5"/>
+          <p:cNvPr id="7" name="TextBox 6"/>
           <p:cNvSpPr txBox="1"/>
           <p:nvPr/>
         </p:nvSpPr>
         <p:spPr>
           <a:xfrm>
-            <a:off x="548640" y="6455664"/>
+            <a:off x="8229600" y="182880"/>
+            <a:ext cx="3410712" cy="274320"/>
+          </a:xfrm>
+          <a:prstGeom prst="rect">
+            <a:avLst/>
+          </a:prstGeom>
+          <a:noFill/>
+        </p:spPr>
+        <p:txBody>
+          <a:bodyPr wrap="square" anchor="t" lIns="25400" rIns="25400" tIns="25400" bIns="25400">
+            <a:spAutoFit/>
+          </a:bodyPr>
+          <a:lstStyle/>
+          <a:p>
+            <a:pPr algn="r">
+              <a:lnSpc>
+                <a:spcPct val="100000"/>
+              </a:lnSpc>
+            </a:pPr>
+            <a:r>
+              <a:rPr sz="1100" b="1">
+                <a:solidFill>
+                  <a:srgbClr val="FFFFFF"/>
+                </a:solidFill>
+                <a:latin typeface="맑은 고딕"/>
+                <a:ea typeface="맑은 고딕"/>
+                <a:cs typeface="맑은 고딕"/>
+              </a:rPr>
+              <a:t>SAMSUNG </a:t>
+            </a:r>
+            <a:r>
+              <a:rPr sz="1100" b="1">
+                <a:solidFill>
+                  <a:srgbClr val="B9C4EA"/>
+                </a:solidFill>
+                <a:latin typeface="맑은 고딕"/>
+                <a:ea typeface="맑은 고딕"/>
+                <a:cs typeface="맑은 고딕"/>
+              </a:rPr>
+              <a:t>DS</a:t>
+            </a:r>
+          </a:p>
+        </p:txBody>
+      </p:sp>
+      <p:sp>
+        <p:nvSpPr>
+          <p:cNvPr id="8" name="TextBox 7"/>
+          <p:cNvSpPr txBox="1"/>
+          <p:nvPr/>
+        </p:nvSpPr>
+        <p:spPr>
+          <a:xfrm>
+            <a:off x="548640" y="6473952"/>
             <a:ext cx="6400800" cy="274320"/>
           </a:xfrm>
           <a:prstGeom prst="rect">
@@ -5394,7 +5758,7 @@
             <a:r>
               <a:rPr sz="900" b="0">
                 <a:solidFill>
-                  <a:srgbClr val="6B7280"/>
+                  <a:srgbClr val="70747C"/>
                 </a:solidFill>
                 <a:latin typeface="맑은 고딕"/>
                 <a:ea typeface="맑은 고딕"/>
@@ -5407,14 +5771,14 @@
       </p:sp>
       <p:sp>
         <p:nvSpPr>
-          <p:cNvPr id="7" name="TextBox 6"/>
+          <p:cNvPr id="9" name="TextBox 8"/>
           <p:cNvSpPr txBox="1"/>
           <p:nvPr/>
         </p:nvSpPr>
         <p:spPr>
           <a:xfrm>
-            <a:off x="5486400" y="6455664"/>
-            <a:ext cx="6126480" cy="274320"/>
+            <a:off x="5486400" y="6473952"/>
+            <a:ext cx="6153912" cy="274320"/>
           </a:xfrm>
           <a:prstGeom prst="rect">
             <a:avLst/>
@@ -5433,39 +5797,28 @@
               </a:lnSpc>
             </a:pPr>
             <a:r>
-              <a:rPr sz="900" b="1">
-                <a:solidFill>
-                  <a:srgbClr val="1428A0"/>
-                </a:solidFill>
-                <a:latin typeface="맑은 고딕"/>
-                <a:ea typeface="맑은 고딕"/>
-                <a:cs typeface="맑은 고딕"/>
-              </a:rPr>
-              <a:t>SAMSUNG </a:t>
-            </a:r>
-            <a:r>
               <a:rPr sz="900" b="0">
                 <a:solidFill>
-                  <a:srgbClr val="6B7280"/>
-                </a:solidFill>
-                <a:latin typeface="맑은 고딕"/>
-                <a:ea typeface="맑은 고딕"/>
-                <a:cs typeface="맑은 고딕"/>
-              </a:rPr>
-              <a:t>DS  |  인사팀 대상 설명자료</a:t>
-            </a:r>
-          </a:p>
-        </p:txBody>
-      </p:sp>
-      <p:sp>
-        <p:nvSpPr>
-          <p:cNvPr id="8" name="Rounded Rectangle 7"/>
+                  <a:srgbClr val="70747C"/>
+                </a:solidFill>
+                <a:latin typeface="맑은 고딕"/>
+                <a:ea typeface="맑은 고딕"/>
+                <a:cs typeface="맑은 고딕"/>
+              </a:rPr>
+              <a:t>인사팀 대상 설명자료</a:t>
+            </a:r>
+          </a:p>
+        </p:txBody>
+      </p:sp>
+      <p:sp>
+        <p:nvSpPr>
+          <p:cNvPr id="10" name="Rounded Rectangle 9"/>
           <p:cNvSpPr/>
           <p:nvPr/>
         </p:nvSpPr>
         <p:spPr>
           <a:xfrm>
-            <a:off x="548640" y="1554480"/>
+            <a:off x="548640" y="1600200"/>
             <a:ext cx="3611880" cy="3383280"/>
           </a:xfrm>
           <a:prstGeom prst="roundRect">
@@ -5476,7 +5829,7 @@
           </a:solidFill>
           <a:ln w="19050">
             <a:solidFill>
-              <a:srgbClr val="1428A0"/>
+              <a:srgbClr val="111111"/>
             </a:solidFill>
           </a:ln>
           <a:effectLst/>
@@ -5505,20 +5858,20 @@
       </p:sp>
       <p:sp>
         <p:nvSpPr>
-          <p:cNvPr id="9" name="Rounded Rectangle 8"/>
+          <p:cNvPr id="11" name="Rounded Rectangle 10"/>
           <p:cNvSpPr/>
           <p:nvPr/>
         </p:nvSpPr>
         <p:spPr>
           <a:xfrm>
-            <a:off x="548640" y="1554480"/>
+            <a:off x="548640" y="1600200"/>
             <a:ext cx="3611880" cy="640080"/>
           </a:xfrm>
           <a:prstGeom prst="roundRect">
             <a:avLst/>
           </a:prstGeom>
           <a:solidFill>
-            <a:srgbClr val="1428A0"/>
+            <a:srgbClr val="111111"/>
           </a:solidFill>
           <a:ln>
             <a:noFill/>
@@ -5549,13 +5902,13 @@
       </p:sp>
       <p:sp>
         <p:nvSpPr>
-          <p:cNvPr id="10" name="TextBox 9"/>
+          <p:cNvPr id="12" name="TextBox 11"/>
           <p:cNvSpPr txBox="1"/>
           <p:nvPr/>
         </p:nvSpPr>
         <p:spPr>
           <a:xfrm>
-            <a:off x="548640" y="1627632"/>
+            <a:off x="548640" y="1673352"/>
             <a:ext cx="3611880" cy="502920"/>
           </a:xfrm>
           <a:prstGeom prst="rect">
@@ -5590,13 +5943,13 @@
       </p:sp>
       <p:sp>
         <p:nvSpPr>
-          <p:cNvPr id="11" name="TextBox 10"/>
+          <p:cNvPr id="13" name="TextBox 12"/>
           <p:cNvSpPr txBox="1"/>
           <p:nvPr/>
         </p:nvSpPr>
         <p:spPr>
           <a:xfrm>
-            <a:off x="822959" y="2423160"/>
+            <a:off x="822959" y="2468880"/>
             <a:ext cx="3063240" cy="1188720"/>
           </a:xfrm>
           <a:prstGeom prst="rect">
@@ -5618,7 +5971,7 @@
             <a:r>
               <a:rPr sz="1400" b="0">
                 <a:solidFill>
-                  <a:srgbClr val="222222"/>
+                  <a:srgbClr val="1A1A1A"/>
                 </a:solidFill>
                 <a:latin typeface="맑은 고딕"/>
                 <a:ea typeface="맑은 고딕"/>
@@ -5636,7 +5989,7 @@
             <a:r>
               <a:rPr sz="1400" b="0">
                 <a:solidFill>
-                  <a:srgbClr val="222222"/>
+                  <a:srgbClr val="1A1A1A"/>
                 </a:solidFill>
                 <a:latin typeface="맑은 고딕"/>
                 <a:ea typeface="맑은 고딕"/>
@@ -5649,20 +6002,77 @@
       </p:sp>
       <p:sp>
         <p:nvSpPr>
-          <p:cNvPr id="12" name="Rounded Rectangle 11"/>
+          <p:cNvPr id="14" name="Rounded Rectangle 13"/>
           <p:cNvSpPr/>
           <p:nvPr/>
         </p:nvSpPr>
         <p:spPr>
           <a:xfrm>
-            <a:off x="777240" y="3886200"/>
+            <a:off x="777240" y="3931920"/>
             <a:ext cx="3154680" cy="868680"/>
           </a:xfrm>
           <a:prstGeom prst="roundRect">
             <a:avLst/>
           </a:prstGeom>
           <a:solidFill>
-            <a:srgbClr val="E8EDFB"/>
+            <a:srgbClr val="F4F5F7"/>
+          </a:solidFill>
+          <a:ln w="12700">
+            <a:solidFill>
+              <a:srgbClr val="DDDFE4"/>
+            </a:solidFill>
+          </a:ln>
+          <a:effectLst/>
+        </p:spPr>
+        <p:style>
+          <a:lnRef idx="1">
+            <a:schemeClr val="accent1"/>
+          </a:lnRef>
+          <a:fillRef idx="3">
+            <a:schemeClr val="accent1"/>
+          </a:fillRef>
+          <a:effectRef idx="2">
+            <a:schemeClr val="accent1"/>
+          </a:effectRef>
+          <a:fontRef idx="minor">
+            <a:schemeClr val="lt1"/>
+          </a:fontRef>
+        </p:style>
+        <p:txBody>
+          <a:bodyPr rtlCol="0" anchor="ctr" wrap="square" lIns="76200" rIns="76200" tIns="50800" bIns="50800"/>
+          <a:lstStyle/>
+          <a:p>
+            <a:pPr algn="ctr"/>
+            <a:r>
+              <a:rPr sz="1100" b="0">
+                <a:solidFill>
+                  <a:srgbClr val="1A1A1A"/>
+                </a:solidFill>
+                <a:latin typeface="Consolas"/>
+                <a:ea typeface="Consolas"/>
+                <a:cs typeface="Consolas"/>
+              </a:rPr>
+              <a:t>5,350만원  →  [[SALARY:3f9a2c1d]]</a:t>
+            </a:r>
+          </a:p>
+        </p:txBody>
+      </p:sp>
+      <p:sp>
+        <p:nvSpPr>
+          <p:cNvPr id="15" name="Chevron 14"/>
+          <p:cNvSpPr/>
+          <p:nvPr/>
+        </p:nvSpPr>
+        <p:spPr>
+          <a:xfrm>
+            <a:off x="4187952" y="3017520"/>
+            <a:ext cx="310896" cy="548640"/>
+          </a:xfrm>
+          <a:prstGeom prst="chevron">
+            <a:avLst/>
+          </a:prstGeom>
+          <a:solidFill>
+            <a:srgbClr val="111111"/>
           </a:solidFill>
           <a:ln>
             <a:noFill/>
@@ -5684,40 +6094,75 @@
           </a:fontRef>
         </p:style>
         <p:txBody>
-          <a:bodyPr rtlCol="0" anchor="ctr" wrap="square" lIns="76200" rIns="76200" tIns="50800" bIns="50800"/>
+          <a:bodyPr rtlCol="0" anchor="ctr"/>
           <a:lstStyle/>
           <a:p>
             <a:pPr algn="ctr"/>
-            <a:r>
-              <a:rPr sz="1100" b="0">
-                <a:solidFill>
-                  <a:srgbClr val="0B145A"/>
-                </a:solidFill>
-                <a:latin typeface="Consolas"/>
-                <a:ea typeface="Consolas"/>
-                <a:cs typeface="Consolas"/>
-              </a:rPr>
-              <a:t>5,350만원  →  [[SALARY:3f9a2c1d]]</a:t>
-            </a:r>
-          </a:p>
-        </p:txBody>
-      </p:sp>
-      <p:sp>
-        <p:nvSpPr>
-          <p:cNvPr id="13" name="Chevron 12"/>
+          </a:p>
+        </p:txBody>
+      </p:sp>
+      <p:sp>
+        <p:nvSpPr>
+          <p:cNvPr id="16" name="Rounded Rectangle 15"/>
           <p:cNvSpPr/>
           <p:nvPr/>
         </p:nvSpPr>
         <p:spPr>
           <a:xfrm>
-            <a:off x="4187952" y="2971800"/>
-            <a:ext cx="310896" cy="548640"/>
-          </a:xfrm>
-          <a:prstGeom prst="chevron">
+            <a:off x="4526279" y="1600200"/>
+            <a:ext cx="3611880" cy="3383280"/>
+          </a:xfrm>
+          <a:prstGeom prst="roundRect">
             <a:avLst/>
           </a:prstGeom>
           <a:solidFill>
-            <a:srgbClr val="3E5CD0"/>
+            <a:srgbClr val="FFFFFF"/>
+          </a:solidFill>
+          <a:ln w="19050">
+            <a:solidFill>
+              <a:srgbClr val="111111"/>
+            </a:solidFill>
+          </a:ln>
+          <a:effectLst/>
+        </p:spPr>
+        <p:style>
+          <a:lnRef idx="1">
+            <a:schemeClr val="accent1"/>
+          </a:lnRef>
+          <a:fillRef idx="3">
+            <a:schemeClr val="accent1"/>
+          </a:fillRef>
+          <a:effectRef idx="2">
+            <a:schemeClr val="accent1"/>
+          </a:effectRef>
+          <a:fontRef idx="minor">
+            <a:schemeClr val="lt1"/>
+          </a:fontRef>
+        </p:style>
+        <p:txBody>
+          <a:bodyPr rtlCol="0" anchor="ctr"/>
+          <a:lstStyle/>
+          <a:p>
+            <a:pPr algn="ctr"/>
+          </a:p>
+        </p:txBody>
+      </p:sp>
+      <p:sp>
+        <p:nvSpPr>
+          <p:cNvPr id="17" name="Rounded Rectangle 16"/>
+          <p:cNvSpPr/>
+          <p:nvPr/>
+        </p:nvSpPr>
+        <p:spPr>
+          <a:xfrm>
+            <a:off x="4526279" y="1600200"/>
+            <a:ext cx="3611880" cy="640080"/>
+          </a:xfrm>
+          <a:prstGeom prst="roundRect">
+            <a:avLst/>
+          </a:prstGeom>
+          <a:solidFill>
+            <a:srgbClr val="111111"/>
           </a:solidFill>
           <a:ln>
             <a:noFill/>
@@ -5748,13 +6193,214 @@
       </p:sp>
       <p:sp>
         <p:nvSpPr>
-          <p:cNvPr id="14" name="Rounded Rectangle 13"/>
+          <p:cNvPr id="18" name="TextBox 17"/>
+          <p:cNvSpPr txBox="1"/>
+          <p:nvPr/>
+        </p:nvSpPr>
+        <p:spPr>
+          <a:xfrm>
+            <a:off x="4526279" y="1673352"/>
+            <a:ext cx="3611880" cy="502920"/>
+          </a:xfrm>
+          <a:prstGeom prst="rect">
+            <a:avLst/>
+          </a:prstGeom>
+          <a:noFill/>
+        </p:spPr>
+        <p:txBody>
+          <a:bodyPr wrap="square" anchor="t" lIns="25400" rIns="25400" tIns="25400" bIns="25400">
+            <a:spAutoFit/>
+          </a:bodyPr>
+          <a:lstStyle/>
+          <a:p>
+            <a:pPr algn="ctr">
+              <a:lnSpc>
+                <a:spcPct val="100000"/>
+              </a:lnSpc>
+            </a:pPr>
+            <a:r>
+              <a:rPr sz="1600" b="1">
+                <a:solidFill>
+                  <a:srgbClr val="FFFFFF"/>
+                </a:solidFill>
+                <a:latin typeface="맑은 고딕"/>
+                <a:ea typeface="맑은 고딕"/>
+                <a:cs typeface="맑은 고딕"/>
+              </a:rPr>
+              <a:t>2. 작업 (Work)</a:t>
+            </a:r>
+          </a:p>
+        </p:txBody>
+      </p:sp>
+      <p:sp>
+        <p:nvSpPr>
+          <p:cNvPr id="19" name="TextBox 18"/>
+          <p:cNvSpPr txBox="1"/>
+          <p:nvPr/>
+        </p:nvSpPr>
+        <p:spPr>
+          <a:xfrm>
+            <a:off x="4800599" y="2468880"/>
+            <a:ext cx="3063240" cy="1188720"/>
+          </a:xfrm>
+          <a:prstGeom prst="rect">
+            <a:avLst/>
+          </a:prstGeom>
+          <a:noFill/>
+        </p:spPr>
+        <p:txBody>
+          <a:bodyPr wrap="square" anchor="t" lIns="25400" rIns="25400" tIns="25400" bIns="25400">
+            <a:spAutoFit/>
+          </a:bodyPr>
+          <a:lstStyle/>
+          <a:p>
+            <a:pPr algn="ctr">
+              <a:lnSpc>
+                <a:spcPct val="115000"/>
+              </a:lnSpc>
+            </a:pPr>
+            <a:r>
+              <a:rPr sz="1400" b="0">
+                <a:solidFill>
+                  <a:srgbClr val="1A1A1A"/>
+                </a:solidFill>
+                <a:latin typeface="맑은 고딕"/>
+                <a:ea typeface="맑은 고딕"/>
+                <a:cs typeface="맑은 고딕"/>
+              </a:rPr>
+              <a:t>AI는 토큰만 보고</a:t>
+            </a:r>
+          </a:p>
+          <a:p>
+            <a:pPr algn="ctr">
+              <a:lnSpc>
+                <a:spcPct val="115000"/>
+              </a:lnSpc>
+            </a:pPr>
+            <a:r>
+              <a:rPr sz="1400" b="0">
+                <a:solidFill>
+                  <a:srgbClr val="1A1A1A"/>
+                </a:solidFill>
+                <a:latin typeface="맑은 고딕"/>
+                <a:ea typeface="맑은 고딕"/>
+                <a:cs typeface="맑은 고딕"/>
+              </a:rPr>
+              <a:t>안내문·통지·리포트 작성</a:t>
+            </a:r>
+          </a:p>
+        </p:txBody>
+      </p:sp>
+      <p:sp>
+        <p:nvSpPr>
+          <p:cNvPr id="20" name="Rounded Rectangle 19"/>
           <p:cNvSpPr/>
           <p:nvPr/>
         </p:nvSpPr>
         <p:spPr>
           <a:xfrm>
-            <a:off x="4526279" y="1554480"/>
+            <a:off x="4754879" y="3931920"/>
+            <a:ext cx="3154680" cy="868680"/>
+          </a:xfrm>
+          <a:prstGeom prst="roundRect">
+            <a:avLst/>
+          </a:prstGeom>
+          <a:solidFill>
+            <a:srgbClr val="F4F5F7"/>
+          </a:solidFill>
+          <a:ln w="12700">
+            <a:solidFill>
+              <a:srgbClr val="DDDFE4"/>
+            </a:solidFill>
+          </a:ln>
+          <a:effectLst/>
+        </p:spPr>
+        <p:style>
+          <a:lnRef idx="1">
+            <a:schemeClr val="accent1"/>
+          </a:lnRef>
+          <a:fillRef idx="3">
+            <a:schemeClr val="accent1"/>
+          </a:fillRef>
+          <a:effectRef idx="2">
+            <a:schemeClr val="accent1"/>
+          </a:effectRef>
+          <a:fontRef idx="minor">
+            <a:schemeClr val="lt1"/>
+          </a:fontRef>
+        </p:style>
+        <p:txBody>
+          <a:bodyPr rtlCol="0" anchor="ctr" wrap="square" lIns="76200" rIns="76200" tIns="50800" bIns="50800"/>
+          <a:lstStyle/>
+          <a:p>
+            <a:pPr algn="ctr"/>
+            <a:r>
+              <a:rPr sz="1100" b="0">
+                <a:solidFill>
+                  <a:srgbClr val="1A1A1A"/>
+                </a:solidFill>
+                <a:latin typeface="Consolas"/>
+                <a:ea typeface="Consolas"/>
+                <a:cs typeface="Consolas"/>
+              </a:rPr>
+              <a:t>“[[NAME]]님의 연봉은 [[SALARY]]…”</a:t>
+            </a:r>
+          </a:p>
+        </p:txBody>
+      </p:sp>
+      <p:sp>
+        <p:nvSpPr>
+          <p:cNvPr id="21" name="Chevron 20"/>
+          <p:cNvSpPr/>
+          <p:nvPr/>
+        </p:nvSpPr>
+        <p:spPr>
+          <a:xfrm>
+            <a:off x="8165592" y="3017520"/>
+            <a:ext cx="310896" cy="548640"/>
+          </a:xfrm>
+          <a:prstGeom prst="chevron">
+            <a:avLst/>
+          </a:prstGeom>
+          <a:solidFill>
+            <a:srgbClr val="111111"/>
+          </a:solidFill>
+          <a:ln>
+            <a:noFill/>
+          </a:ln>
+          <a:effectLst/>
+        </p:spPr>
+        <p:style>
+          <a:lnRef idx="1">
+            <a:schemeClr val="accent1"/>
+          </a:lnRef>
+          <a:fillRef idx="3">
+            <a:schemeClr val="accent1"/>
+          </a:fillRef>
+          <a:effectRef idx="2">
+            <a:schemeClr val="accent1"/>
+          </a:effectRef>
+          <a:fontRef idx="minor">
+            <a:schemeClr val="lt1"/>
+          </a:fontRef>
+        </p:style>
+        <p:txBody>
+          <a:bodyPr rtlCol="0" anchor="ctr"/>
+          <a:lstStyle/>
+          <a:p>
+            <a:pPr algn="ctr"/>
+          </a:p>
+        </p:txBody>
+      </p:sp>
+      <p:sp>
+        <p:nvSpPr>
+          <p:cNvPr id="22" name="Rounded Rectangle 21"/>
+          <p:cNvSpPr/>
+          <p:nvPr/>
+        </p:nvSpPr>
+        <p:spPr>
+          <a:xfrm>
+            <a:off x="8503919" y="1600200"/>
             <a:ext cx="3611880" cy="3383280"/>
           </a:xfrm>
           <a:prstGeom prst="roundRect">
@@ -5765,7 +6411,7 @@
           </a:solidFill>
           <a:ln w="19050">
             <a:solidFill>
-              <a:srgbClr val="1428A0"/>
+              <a:srgbClr val="111111"/>
             </a:solidFill>
           </a:ln>
           <a:effectLst/>
@@ -5794,20 +6440,20 @@
       </p:sp>
       <p:sp>
         <p:nvSpPr>
-          <p:cNvPr id="15" name="Rounded Rectangle 14"/>
+          <p:cNvPr id="23" name="Rounded Rectangle 22"/>
           <p:cNvSpPr/>
           <p:nvPr/>
         </p:nvSpPr>
         <p:spPr>
           <a:xfrm>
-            <a:off x="4526279" y="1554480"/>
+            <a:off x="8503919" y="1600200"/>
             <a:ext cx="3611880" cy="640080"/>
           </a:xfrm>
           <a:prstGeom prst="roundRect">
             <a:avLst/>
           </a:prstGeom>
           <a:solidFill>
-            <a:srgbClr val="1428A0"/>
+            <a:srgbClr val="111111"/>
           </a:solidFill>
           <a:ln>
             <a:noFill/>
@@ -5838,13 +6484,13 @@
       </p:sp>
       <p:sp>
         <p:nvSpPr>
-          <p:cNvPr id="16" name="TextBox 15"/>
+          <p:cNvPr id="24" name="TextBox 23"/>
           <p:cNvSpPr txBox="1"/>
           <p:nvPr/>
         </p:nvSpPr>
         <p:spPr>
           <a:xfrm>
-            <a:off x="4526279" y="1627632"/>
+            <a:off x="8503919" y="1673352"/>
             <a:ext cx="3611880" cy="502920"/>
           </a:xfrm>
           <a:prstGeom prst="rect">
@@ -5872,20 +6518,20 @@
                 <a:ea typeface="맑은 고딕"/>
                 <a:cs typeface="맑은 고딕"/>
               </a:rPr>
-              <a:t>2. 작업 (Work)</a:t>
-            </a:r>
-          </a:p>
-        </p:txBody>
-      </p:sp>
-      <p:sp>
-        <p:nvSpPr>
-          <p:cNvPr id="17" name="TextBox 16"/>
+              <a:t>3. 복원 (Reveal)</a:t>
+            </a:r>
+          </a:p>
+        </p:txBody>
+      </p:sp>
+      <p:sp>
+        <p:nvSpPr>
+          <p:cNvPr id="25" name="TextBox 24"/>
           <p:cNvSpPr txBox="1"/>
           <p:nvPr/>
         </p:nvSpPr>
         <p:spPr>
           <a:xfrm>
-            <a:off x="4800599" y="2423160"/>
+            <a:off x="8778240" y="2468880"/>
             <a:ext cx="3063240" cy="1188720"/>
           </a:xfrm>
           <a:prstGeom prst="rect">
@@ -5907,13 +6553,13 @@
             <a:r>
               <a:rPr sz="1400" b="0">
                 <a:solidFill>
-                  <a:srgbClr val="222222"/>
-                </a:solidFill>
-                <a:latin typeface="맑은 고딕"/>
-                <a:ea typeface="맑은 고딕"/>
-                <a:cs typeface="맑은 고딕"/>
-              </a:rPr>
-              <a:t>AI는 토큰만 보고</a:t>
+                  <a:srgbClr val="1A1A1A"/>
+                </a:solidFill>
+                <a:latin typeface="맑은 고딕"/>
+                <a:ea typeface="맑은 고딕"/>
+                <a:cs typeface="맑은 고딕"/>
+              </a:rPr>
+              <a:t>담당자 키로 토큰 →</a:t>
             </a:r>
           </a:p>
           <a:p>
@@ -5925,36 +6571,38 @@
             <a:r>
               <a:rPr sz="1400" b="0">
                 <a:solidFill>
-                  <a:srgbClr val="222222"/>
-                </a:solidFill>
-                <a:latin typeface="맑은 고딕"/>
-                <a:ea typeface="맑은 고딕"/>
-                <a:cs typeface="맑은 고딕"/>
-              </a:rPr>
-              <a:t>안내문·통지·리포트 작성</a:t>
-            </a:r>
-          </a:p>
-        </p:txBody>
-      </p:sp>
-      <p:sp>
-        <p:nvSpPr>
-          <p:cNvPr id="18" name="Rounded Rectangle 17"/>
+                  <a:srgbClr val="1A1A1A"/>
+                </a:solidFill>
+                <a:latin typeface="맑은 고딕"/>
+                <a:ea typeface="맑은 고딕"/>
+                <a:cs typeface="맑은 고딕"/>
+              </a:rPr>
+              <a:t>원본 (인가자만)</a:t>
+            </a:r>
+          </a:p>
+        </p:txBody>
+      </p:sp>
+      <p:sp>
+        <p:nvSpPr>
+          <p:cNvPr id="26" name="Rounded Rectangle 25"/>
           <p:cNvSpPr/>
           <p:nvPr/>
         </p:nvSpPr>
         <p:spPr>
           <a:xfrm>
-            <a:off x="4754879" y="3886200"/>
+            <a:off x="8732519" y="3931920"/>
             <a:ext cx="3154680" cy="868680"/>
           </a:xfrm>
           <a:prstGeom prst="roundRect">
             <a:avLst/>
           </a:prstGeom>
           <a:solidFill>
-            <a:srgbClr val="E8EDFB"/>
+            <a:srgbClr val="F4F5F7"/>
           </a:solidFill>
-          <a:ln>
-            <a:noFill/>
+          <a:ln w="12700">
+            <a:solidFill>
+              <a:srgbClr val="DDDFE4"/>
+            </a:solidFill>
           </a:ln>
           <a:effectLst/>
         </p:spPr>
@@ -5980,36 +6628,38 @@
             <a:r>
               <a:rPr sz="1100" b="0">
                 <a:solidFill>
-                  <a:srgbClr val="0B145A"/>
+                  <a:srgbClr val="1A1A1A"/>
                 </a:solidFill>
                 <a:latin typeface="Consolas"/>
                 <a:ea typeface="Consolas"/>
                 <a:cs typeface="Consolas"/>
               </a:rPr>
-              <a:t>“[[NAME]]님의 연봉은 [[SALARY]]…”</a:t>
-            </a:r>
-          </a:p>
-        </p:txBody>
-      </p:sp>
-      <p:sp>
-        <p:nvSpPr>
-          <p:cNvPr id="19" name="Chevron 18"/>
+              <a:t>[[SALARY:3f9a2c1d]]  →  5,350만원</a:t>
+            </a:r>
+          </a:p>
+        </p:txBody>
+      </p:sp>
+      <p:sp>
+        <p:nvSpPr>
+          <p:cNvPr id="27" name="Rounded Rectangle 26"/>
           <p:cNvSpPr/>
           <p:nvPr/>
         </p:nvSpPr>
         <p:spPr>
           <a:xfrm>
-            <a:off x="8165592" y="2971800"/>
-            <a:ext cx="310896" cy="548640"/>
-          </a:xfrm>
-          <a:prstGeom prst="chevron">
+            <a:off x="548640" y="5303520"/>
+            <a:ext cx="11091672" cy="777240"/>
+          </a:xfrm>
+          <a:prstGeom prst="roundRect">
             <a:avLst/>
           </a:prstGeom>
           <a:solidFill>
-            <a:srgbClr val="3E5CD0"/>
+            <a:srgbClr val="F4F5F7"/>
           </a:solidFill>
-          <a:ln>
-            <a:noFill/>
+          <a:ln w="12700">
+            <a:solidFill>
+              <a:srgbClr val="DDDFE4"/>
+            </a:solidFill>
           </a:ln>
           <a:effectLst/>
         </p:spPr>
@@ -6028,303 +6678,14 @@
           </a:fontRef>
         </p:style>
         <p:txBody>
-          <a:bodyPr rtlCol="0" anchor="ctr"/>
+          <a:bodyPr rtlCol="0" anchor="ctr" wrap="square" lIns="76200" rIns="76200" tIns="50800" bIns="50800"/>
           <a:lstStyle/>
           <a:p>
             <a:pPr algn="ctr"/>
-          </a:p>
-        </p:txBody>
-      </p:sp>
-      <p:sp>
-        <p:nvSpPr>
-          <p:cNvPr id="20" name="Rounded Rectangle 19"/>
-          <p:cNvSpPr/>
-          <p:nvPr/>
-        </p:nvSpPr>
-        <p:spPr>
-          <a:xfrm>
-            <a:off x="8503919" y="1554480"/>
-            <a:ext cx="3611880" cy="3383280"/>
-          </a:xfrm>
-          <a:prstGeom prst="roundRect">
-            <a:avLst/>
-          </a:prstGeom>
-          <a:solidFill>
-            <a:srgbClr val="FFFFFF"/>
-          </a:solidFill>
-          <a:ln w="19050">
-            <a:solidFill>
-              <a:srgbClr val="1428A0"/>
-            </a:solidFill>
-          </a:ln>
-          <a:effectLst/>
-        </p:spPr>
-        <p:style>
-          <a:lnRef idx="1">
-            <a:schemeClr val="accent1"/>
-          </a:lnRef>
-          <a:fillRef idx="3">
-            <a:schemeClr val="accent1"/>
-          </a:fillRef>
-          <a:effectRef idx="2">
-            <a:schemeClr val="accent1"/>
-          </a:effectRef>
-          <a:fontRef idx="minor">
-            <a:schemeClr val="lt1"/>
-          </a:fontRef>
-        </p:style>
-        <p:txBody>
-          <a:bodyPr rtlCol="0" anchor="ctr"/>
-          <a:lstStyle/>
-          <a:p>
-            <a:pPr algn="ctr"/>
-          </a:p>
-        </p:txBody>
-      </p:sp>
-      <p:sp>
-        <p:nvSpPr>
-          <p:cNvPr id="21" name="Rounded Rectangle 20"/>
-          <p:cNvSpPr/>
-          <p:nvPr/>
-        </p:nvSpPr>
-        <p:spPr>
-          <a:xfrm>
-            <a:off x="8503919" y="1554480"/>
-            <a:ext cx="3611880" cy="640080"/>
-          </a:xfrm>
-          <a:prstGeom prst="roundRect">
-            <a:avLst/>
-          </a:prstGeom>
-          <a:solidFill>
-            <a:srgbClr val="1428A0"/>
-          </a:solidFill>
-          <a:ln>
-            <a:noFill/>
-          </a:ln>
-          <a:effectLst/>
-        </p:spPr>
-        <p:style>
-          <a:lnRef idx="1">
-            <a:schemeClr val="accent1"/>
-          </a:lnRef>
-          <a:fillRef idx="3">
-            <a:schemeClr val="accent1"/>
-          </a:fillRef>
-          <a:effectRef idx="2">
-            <a:schemeClr val="accent1"/>
-          </a:effectRef>
-          <a:fontRef idx="minor">
-            <a:schemeClr val="lt1"/>
-          </a:fontRef>
-        </p:style>
-        <p:txBody>
-          <a:bodyPr rtlCol="0" anchor="ctr"/>
-          <a:lstStyle/>
-          <a:p>
-            <a:pPr algn="ctr"/>
-          </a:p>
-        </p:txBody>
-      </p:sp>
-      <p:sp>
-        <p:nvSpPr>
-          <p:cNvPr id="22" name="TextBox 21"/>
-          <p:cNvSpPr txBox="1"/>
-          <p:nvPr/>
-        </p:nvSpPr>
-        <p:spPr>
-          <a:xfrm>
-            <a:off x="8503919" y="1627632"/>
-            <a:ext cx="3611880" cy="502920"/>
-          </a:xfrm>
-          <a:prstGeom prst="rect">
-            <a:avLst/>
-          </a:prstGeom>
-          <a:noFill/>
-        </p:spPr>
-        <p:txBody>
-          <a:bodyPr wrap="square" anchor="t" lIns="25400" rIns="25400" tIns="25400" bIns="25400">
-            <a:spAutoFit/>
-          </a:bodyPr>
-          <a:lstStyle/>
-          <a:p>
-            <a:pPr algn="ctr">
-              <a:lnSpc>
-                <a:spcPct val="100000"/>
-              </a:lnSpc>
-            </a:pPr>
-            <a:r>
-              <a:rPr sz="1600" b="1">
-                <a:solidFill>
-                  <a:srgbClr val="FFFFFF"/>
-                </a:solidFill>
-                <a:latin typeface="맑은 고딕"/>
-                <a:ea typeface="맑은 고딕"/>
-                <a:cs typeface="맑은 고딕"/>
-              </a:rPr>
-              <a:t>3. 복원 (Reveal)</a:t>
-            </a:r>
-          </a:p>
-        </p:txBody>
-      </p:sp>
-      <p:sp>
-        <p:nvSpPr>
-          <p:cNvPr id="23" name="TextBox 22"/>
-          <p:cNvSpPr txBox="1"/>
-          <p:nvPr/>
-        </p:nvSpPr>
-        <p:spPr>
-          <a:xfrm>
-            <a:off x="8778240" y="2423160"/>
-            <a:ext cx="3063240" cy="1188720"/>
-          </a:xfrm>
-          <a:prstGeom prst="rect">
-            <a:avLst/>
-          </a:prstGeom>
-          <a:noFill/>
-        </p:spPr>
-        <p:txBody>
-          <a:bodyPr wrap="square" anchor="t" lIns="25400" rIns="25400" tIns="25400" bIns="25400">
-            <a:spAutoFit/>
-          </a:bodyPr>
-          <a:lstStyle/>
-          <a:p>
-            <a:pPr algn="ctr">
-              <a:lnSpc>
-                <a:spcPct val="115000"/>
-              </a:lnSpc>
-            </a:pPr>
-            <a:r>
-              <a:rPr sz="1400" b="0">
-                <a:solidFill>
-                  <a:srgbClr val="222222"/>
-                </a:solidFill>
-                <a:latin typeface="맑은 고딕"/>
-                <a:ea typeface="맑은 고딕"/>
-                <a:cs typeface="맑은 고딕"/>
-              </a:rPr>
-              <a:t>담당자 키로 토큰 →</a:t>
-            </a:r>
-          </a:p>
-          <a:p>
-            <a:pPr algn="ctr">
-              <a:lnSpc>
-                <a:spcPct val="115000"/>
-              </a:lnSpc>
-            </a:pPr>
-            <a:r>
-              <a:rPr sz="1400" b="0">
-                <a:solidFill>
-                  <a:srgbClr val="222222"/>
-                </a:solidFill>
-                <a:latin typeface="맑은 고딕"/>
-                <a:ea typeface="맑은 고딕"/>
-                <a:cs typeface="맑은 고딕"/>
-              </a:rPr>
-              <a:t>원본 (인가자만)</a:t>
-            </a:r>
-          </a:p>
-        </p:txBody>
-      </p:sp>
-      <p:sp>
-        <p:nvSpPr>
-          <p:cNvPr id="24" name="Rounded Rectangle 23"/>
-          <p:cNvSpPr/>
-          <p:nvPr/>
-        </p:nvSpPr>
-        <p:spPr>
-          <a:xfrm>
-            <a:off x="8732519" y="3886200"/>
-            <a:ext cx="3154680" cy="868680"/>
-          </a:xfrm>
-          <a:prstGeom prst="roundRect">
-            <a:avLst/>
-          </a:prstGeom>
-          <a:solidFill>
-            <a:srgbClr val="E8EDFB"/>
-          </a:solidFill>
-          <a:ln>
-            <a:noFill/>
-          </a:ln>
-          <a:effectLst/>
-        </p:spPr>
-        <p:style>
-          <a:lnRef idx="1">
-            <a:schemeClr val="accent1"/>
-          </a:lnRef>
-          <a:fillRef idx="3">
-            <a:schemeClr val="accent1"/>
-          </a:fillRef>
-          <a:effectRef idx="2">
-            <a:schemeClr val="accent1"/>
-          </a:effectRef>
-          <a:fontRef idx="minor">
-            <a:schemeClr val="lt1"/>
-          </a:fontRef>
-        </p:style>
-        <p:txBody>
-          <a:bodyPr rtlCol="0" anchor="ctr" wrap="square" lIns="76200" rIns="76200" tIns="50800" bIns="50800"/>
-          <a:lstStyle/>
-          <a:p>
-            <a:pPr algn="ctr"/>
-            <a:r>
-              <a:rPr sz="1100" b="0">
-                <a:solidFill>
-                  <a:srgbClr val="0B145A"/>
-                </a:solidFill>
-                <a:latin typeface="Consolas"/>
-                <a:ea typeface="Consolas"/>
-                <a:cs typeface="Consolas"/>
-              </a:rPr>
-              <a:t>[[SALARY:3f9a2c1d]]  →  5,350만원</a:t>
-            </a:r>
-          </a:p>
-        </p:txBody>
-      </p:sp>
-      <p:sp>
-        <p:nvSpPr>
-          <p:cNvPr id="25" name="Rounded Rectangle 24"/>
-          <p:cNvSpPr/>
-          <p:nvPr/>
-        </p:nvSpPr>
-        <p:spPr>
-          <a:xfrm>
-            <a:off x="548640" y="5257800"/>
-            <a:ext cx="11091672" cy="777240"/>
-          </a:xfrm>
-          <a:prstGeom prst="roundRect">
-            <a:avLst/>
-          </a:prstGeom>
-          <a:solidFill>
-            <a:srgbClr val="E8EDFB"/>
-          </a:solidFill>
-          <a:ln>
-            <a:noFill/>
-          </a:ln>
-          <a:effectLst/>
-        </p:spPr>
-        <p:style>
-          <a:lnRef idx="1">
-            <a:schemeClr val="accent1"/>
-          </a:lnRef>
-          <a:fillRef idx="3">
-            <a:schemeClr val="accent1"/>
-          </a:fillRef>
-          <a:effectRef idx="2">
-            <a:schemeClr val="accent1"/>
-          </a:effectRef>
-          <a:fontRef idx="minor">
-            <a:schemeClr val="lt1"/>
-          </a:fontRef>
-        </p:style>
-        <p:txBody>
-          <a:bodyPr rtlCol="0" anchor="ctr" wrap="square" lIns="76200" rIns="76200" tIns="50800" bIns="50800"/>
-          <a:lstStyle/>
-          <a:p>
-            <a:pPr algn="ctr"/>
             <a:r>
               <a:rPr sz="1500" b="0">
                 <a:solidFill>
-                  <a:srgbClr val="222222"/>
+                  <a:srgbClr val="1A1A1A"/>
                 </a:solidFill>
                 <a:latin typeface="맑은 고딕"/>
                 <a:ea typeface="맑은 고딕"/>
@@ -6373,7 +6734,7 @@
         <p:spPr>
           <a:xfrm>
             <a:off x="0" y="0"/>
-            <a:ext cx="12191695" cy="1051560"/>
+            <a:ext cx="12191695" cy="6858000"/>
           </a:xfrm>
           <a:prstGeom prst="rect">
             <a:avLst/>
@@ -6416,8 +6777,52 @@
         </p:nvSpPr>
         <p:spPr>
           <a:xfrm>
-            <a:off x="0" y="1051560"/>
-            <a:ext cx="12191695" cy="41148"/>
+            <a:off x="0" y="0"/>
+            <a:ext cx="12191695" cy="1097280"/>
+          </a:xfrm>
+          <a:prstGeom prst="rect">
+            <a:avLst/>
+          </a:prstGeom>
+          <a:solidFill>
+            <a:srgbClr val="111111"/>
+          </a:solidFill>
+          <a:ln>
+            <a:noFill/>
+          </a:ln>
+          <a:effectLst/>
+        </p:spPr>
+        <p:style>
+          <a:lnRef idx="1">
+            <a:schemeClr val="accent1"/>
+          </a:lnRef>
+          <a:fillRef idx="3">
+            <a:schemeClr val="accent1"/>
+          </a:fillRef>
+          <a:effectRef idx="2">
+            <a:schemeClr val="accent1"/>
+          </a:effectRef>
+          <a:fontRef idx="minor">
+            <a:schemeClr val="lt1"/>
+          </a:fontRef>
+        </p:style>
+        <p:txBody>
+          <a:bodyPr rtlCol="0" anchor="ctr"/>
+          <a:lstStyle/>
+          <a:p>
+            <a:pPr algn="ctr"/>
+          </a:p>
+        </p:txBody>
+      </p:sp>
+      <p:sp>
+        <p:nvSpPr>
+          <p:cNvPr id="4" name="Rectangle 3"/>
+          <p:cNvSpPr/>
+          <p:nvPr/>
+        </p:nvSpPr>
+        <p:spPr>
+          <a:xfrm>
+            <a:off x="0" y="1097280"/>
+            <a:ext cx="12191695" cy="45720"/>
           </a:xfrm>
           <a:prstGeom prst="rect">
             <a:avLst/>
@@ -6454,13 +6859,13 @@
       </p:sp>
       <p:sp>
         <p:nvSpPr>
-          <p:cNvPr id="4" name="TextBox 3"/>
+          <p:cNvPr id="5" name="TextBox 4"/>
           <p:cNvSpPr txBox="1"/>
           <p:nvPr/>
         </p:nvSpPr>
         <p:spPr>
           <a:xfrm>
-            <a:off x="548640" y="164592"/>
+            <a:off x="548640" y="182880"/>
             <a:ext cx="10058400" cy="274320"/>
           </a:xfrm>
           <a:prstGeom prst="rect">
@@ -6482,7 +6887,7 @@
             <a:r>
               <a:rPr sz="1200" b="1">
                 <a:solidFill>
-                  <a:srgbClr val="3E5CD0"/>
+                  <a:srgbClr val="B9C4EA"/>
                 </a:solidFill>
                 <a:latin typeface="맑은 고딕"/>
                 <a:ea typeface="맑은 고딕"/>
@@ -6495,14 +6900,14 @@
       </p:sp>
       <p:sp>
         <p:nvSpPr>
-          <p:cNvPr id="5" name="TextBox 4"/>
+          <p:cNvPr id="6" name="TextBox 5"/>
           <p:cNvSpPr txBox="1"/>
           <p:nvPr/>
         </p:nvSpPr>
         <p:spPr>
           <a:xfrm>
-            <a:off x="548640" y="384048"/>
-            <a:ext cx="10972800" cy="640080"/>
+            <a:off x="548640" y="420624"/>
+            <a:ext cx="10972800" cy="603504"/>
           </a:xfrm>
           <a:prstGeom prst="rect">
             <a:avLst/>
@@ -6523,7 +6928,7 @@
             <a:r>
               <a:rPr sz="2600" b="1">
                 <a:solidFill>
-                  <a:srgbClr val="0B145A"/>
+                  <a:srgbClr val="FFFFFF"/>
                 </a:solidFill>
                 <a:latin typeface="맑은 고딕"/>
                 <a:ea typeface="맑은 고딕"/>
@@ -6536,13 +6941,65 @@
       </p:sp>
       <p:sp>
         <p:nvSpPr>
-          <p:cNvPr id="6" name="TextBox 5"/>
+          <p:cNvPr id="7" name="TextBox 6"/>
           <p:cNvSpPr txBox="1"/>
           <p:nvPr/>
         </p:nvSpPr>
         <p:spPr>
           <a:xfrm>
-            <a:off x="548640" y="6455664"/>
+            <a:off x="8229600" y="182880"/>
+            <a:ext cx="3410712" cy="274320"/>
+          </a:xfrm>
+          <a:prstGeom prst="rect">
+            <a:avLst/>
+          </a:prstGeom>
+          <a:noFill/>
+        </p:spPr>
+        <p:txBody>
+          <a:bodyPr wrap="square" anchor="t" lIns="25400" rIns="25400" tIns="25400" bIns="25400">
+            <a:spAutoFit/>
+          </a:bodyPr>
+          <a:lstStyle/>
+          <a:p>
+            <a:pPr algn="r">
+              <a:lnSpc>
+                <a:spcPct val="100000"/>
+              </a:lnSpc>
+            </a:pPr>
+            <a:r>
+              <a:rPr sz="1100" b="1">
+                <a:solidFill>
+                  <a:srgbClr val="FFFFFF"/>
+                </a:solidFill>
+                <a:latin typeface="맑은 고딕"/>
+                <a:ea typeface="맑은 고딕"/>
+                <a:cs typeface="맑은 고딕"/>
+              </a:rPr>
+              <a:t>SAMSUNG </a:t>
+            </a:r>
+            <a:r>
+              <a:rPr sz="1100" b="1">
+                <a:solidFill>
+                  <a:srgbClr val="B9C4EA"/>
+                </a:solidFill>
+                <a:latin typeface="맑은 고딕"/>
+                <a:ea typeface="맑은 고딕"/>
+                <a:cs typeface="맑은 고딕"/>
+              </a:rPr>
+              <a:t>DS</a:t>
+            </a:r>
+          </a:p>
+        </p:txBody>
+      </p:sp>
+      <p:sp>
+        <p:nvSpPr>
+          <p:cNvPr id="8" name="TextBox 7"/>
+          <p:cNvSpPr txBox="1"/>
+          <p:nvPr/>
+        </p:nvSpPr>
+        <p:spPr>
+          <a:xfrm>
+            <a:off x="548640" y="6473952"/>
             <a:ext cx="6400800" cy="274320"/>
           </a:xfrm>
           <a:prstGeom prst="rect">
@@ -6564,7 +7021,7 @@
             <a:r>
               <a:rPr sz="900" b="0">
                 <a:solidFill>
-                  <a:srgbClr val="6B7280"/>
+                  <a:srgbClr val="70747C"/>
                 </a:solidFill>
                 <a:latin typeface="맑은 고딕"/>
                 <a:ea typeface="맑은 고딕"/>
@@ -6577,14 +7034,14 @@
       </p:sp>
       <p:sp>
         <p:nvSpPr>
-          <p:cNvPr id="7" name="TextBox 6"/>
+          <p:cNvPr id="9" name="TextBox 8"/>
           <p:cNvSpPr txBox="1"/>
           <p:nvPr/>
         </p:nvSpPr>
         <p:spPr>
           <a:xfrm>
-            <a:off x="5486400" y="6455664"/>
-            <a:ext cx="6126480" cy="274320"/>
+            <a:off x="5486400" y="6473952"/>
+            <a:ext cx="6153912" cy="274320"/>
           </a:xfrm>
           <a:prstGeom prst="rect">
             <a:avLst/>
@@ -6603,39 +7060,28 @@
               </a:lnSpc>
             </a:pPr>
             <a:r>
-              <a:rPr sz="900" b="1">
-                <a:solidFill>
-                  <a:srgbClr val="1428A0"/>
-                </a:solidFill>
-                <a:latin typeface="맑은 고딕"/>
-                <a:ea typeface="맑은 고딕"/>
-                <a:cs typeface="맑은 고딕"/>
-              </a:rPr>
-              <a:t>SAMSUNG </a:t>
-            </a:r>
-            <a:r>
               <a:rPr sz="900" b="0">
                 <a:solidFill>
-                  <a:srgbClr val="6B7280"/>
-                </a:solidFill>
-                <a:latin typeface="맑은 고딕"/>
-                <a:ea typeface="맑은 고딕"/>
-                <a:cs typeface="맑은 고딕"/>
-              </a:rPr>
-              <a:t>DS  |  인사팀 대상 설명자료</a:t>
-            </a:r>
-          </a:p>
-        </p:txBody>
-      </p:sp>
-      <p:sp>
-        <p:nvSpPr>
-          <p:cNvPr id="8" name="TextBox 7"/>
+                  <a:srgbClr val="70747C"/>
+                </a:solidFill>
+                <a:latin typeface="맑은 고딕"/>
+                <a:ea typeface="맑은 고딕"/>
+                <a:cs typeface="맑은 고딕"/>
+              </a:rPr>
+              <a:t>인사팀 대상 설명자료</a:t>
+            </a:r>
+          </a:p>
+        </p:txBody>
+      </p:sp>
+      <p:sp>
+        <p:nvSpPr>
+          <p:cNvPr id="10" name="TextBox 9"/>
           <p:cNvSpPr txBox="1"/>
           <p:nvPr/>
         </p:nvSpPr>
         <p:spPr>
           <a:xfrm>
-            <a:off x="548640" y="1325880"/>
+            <a:off x="548640" y="1371600"/>
             <a:ext cx="10972800" cy="365760"/>
           </a:xfrm>
           <a:prstGeom prst="rect">
@@ -6657,7 +7103,7 @@
             <a:r>
               <a:rPr sz="1600" b="1">
                 <a:solidFill>
-                  <a:srgbClr val="0B145A"/>
+                  <a:srgbClr val="1A1A1A"/>
                 </a:solidFill>
                 <a:latin typeface="맑은 고딕"/>
                 <a:ea typeface="맑은 고딕"/>
@@ -6670,20 +7116,620 @@
       </p:sp>
       <p:sp>
         <p:nvSpPr>
-          <p:cNvPr id="9" name="Rounded Rectangle 8"/>
+          <p:cNvPr id="11" name="Rounded Rectangle 10"/>
           <p:cNvSpPr/>
           <p:nvPr/>
         </p:nvSpPr>
         <p:spPr>
           <a:xfrm>
-            <a:off x="548640" y="1783080"/>
+            <a:off x="548640" y="1828800"/>
             <a:ext cx="2103120" cy="384048"/>
           </a:xfrm>
           <a:prstGeom prst="roundRect">
             <a:avLst/>
           </a:prstGeom>
           <a:solidFill>
-            <a:srgbClr val="E8EDFB"/>
+            <a:srgbClr val="F4F5F7"/>
+          </a:solidFill>
+          <a:ln w="12700">
+            <a:solidFill>
+              <a:srgbClr val="DDDFE4"/>
+            </a:solidFill>
+          </a:ln>
+          <a:effectLst/>
+        </p:spPr>
+        <p:style>
+          <a:lnRef idx="1">
+            <a:schemeClr val="accent1"/>
+          </a:lnRef>
+          <a:fillRef idx="3">
+            <a:schemeClr val="accent1"/>
+          </a:fillRef>
+          <a:effectRef idx="2">
+            <a:schemeClr val="accent1"/>
+          </a:effectRef>
+          <a:fontRef idx="minor">
+            <a:schemeClr val="lt1"/>
+          </a:fontRef>
+        </p:style>
+        <p:txBody>
+          <a:bodyPr rtlCol="0" anchor="ctr" wrap="square" lIns="76200" rIns="76200" tIns="50800" bIns="50800"/>
+          <a:lstStyle/>
+          <a:p>
+            <a:pPr algn="ctr"/>
+            <a:r>
+              <a:rPr sz="1200" b="1">
+                <a:solidFill>
+                  <a:srgbClr val="1A1A1A"/>
+                </a:solidFill>
+                <a:latin typeface="맑은 고딕"/>
+                <a:ea typeface="맑은 고딕"/>
+                <a:cs typeface="맑은 고딕"/>
+              </a:rPr>
+              <a:t>주민등록번호</a:t>
+            </a:r>
+          </a:p>
+        </p:txBody>
+      </p:sp>
+      <p:sp>
+        <p:nvSpPr>
+          <p:cNvPr id="12" name="Rounded Rectangle 11"/>
+          <p:cNvSpPr/>
+          <p:nvPr/>
+        </p:nvSpPr>
+        <p:spPr>
+          <a:xfrm>
+            <a:off x="2788920" y="1828800"/>
+            <a:ext cx="2103120" cy="384048"/>
+          </a:xfrm>
+          <a:prstGeom prst="roundRect">
+            <a:avLst/>
+          </a:prstGeom>
+          <a:solidFill>
+            <a:srgbClr val="F4F5F7"/>
+          </a:solidFill>
+          <a:ln w="12700">
+            <a:solidFill>
+              <a:srgbClr val="DDDFE4"/>
+            </a:solidFill>
+          </a:ln>
+          <a:effectLst/>
+        </p:spPr>
+        <p:style>
+          <a:lnRef idx="1">
+            <a:schemeClr val="accent1"/>
+          </a:lnRef>
+          <a:fillRef idx="3">
+            <a:schemeClr val="accent1"/>
+          </a:fillRef>
+          <a:effectRef idx="2">
+            <a:schemeClr val="accent1"/>
+          </a:effectRef>
+          <a:fontRef idx="minor">
+            <a:schemeClr val="lt1"/>
+          </a:fontRef>
+        </p:style>
+        <p:txBody>
+          <a:bodyPr rtlCol="0" anchor="ctr" wrap="square" lIns="76200" rIns="76200" tIns="50800" bIns="50800"/>
+          <a:lstStyle/>
+          <a:p>
+            <a:pPr algn="ctr"/>
+            <a:r>
+              <a:rPr sz="1200" b="1">
+                <a:solidFill>
+                  <a:srgbClr val="1A1A1A"/>
+                </a:solidFill>
+                <a:latin typeface="맑은 고딕"/>
+                <a:ea typeface="맑은 고딕"/>
+                <a:cs typeface="맑은 고딕"/>
+              </a:rPr>
+              <a:t>연봉·급여</a:t>
+            </a:r>
+          </a:p>
+        </p:txBody>
+      </p:sp>
+      <p:sp>
+        <p:nvSpPr>
+          <p:cNvPr id="13" name="Rounded Rectangle 12"/>
+          <p:cNvSpPr/>
+          <p:nvPr/>
+        </p:nvSpPr>
+        <p:spPr>
+          <a:xfrm>
+            <a:off x="5029200" y="1828800"/>
+            <a:ext cx="2103120" cy="384048"/>
+          </a:xfrm>
+          <a:prstGeom prst="roundRect">
+            <a:avLst/>
+          </a:prstGeom>
+          <a:solidFill>
+            <a:srgbClr val="F4F5F7"/>
+          </a:solidFill>
+          <a:ln w="12700">
+            <a:solidFill>
+              <a:srgbClr val="DDDFE4"/>
+            </a:solidFill>
+          </a:ln>
+          <a:effectLst/>
+        </p:spPr>
+        <p:style>
+          <a:lnRef idx="1">
+            <a:schemeClr val="accent1"/>
+          </a:lnRef>
+          <a:fillRef idx="3">
+            <a:schemeClr val="accent1"/>
+          </a:fillRef>
+          <a:effectRef idx="2">
+            <a:schemeClr val="accent1"/>
+          </a:effectRef>
+          <a:fontRef idx="minor">
+            <a:schemeClr val="lt1"/>
+          </a:fontRef>
+        </p:style>
+        <p:txBody>
+          <a:bodyPr rtlCol="0" anchor="ctr" wrap="square" lIns="76200" rIns="76200" tIns="50800" bIns="50800"/>
+          <a:lstStyle/>
+          <a:p>
+            <a:pPr algn="ctr"/>
+            <a:r>
+              <a:rPr sz="1200" b="1">
+                <a:solidFill>
+                  <a:srgbClr val="1A1A1A"/>
+                </a:solidFill>
+                <a:latin typeface="맑은 고딕"/>
+                <a:ea typeface="맑은 고딕"/>
+                <a:cs typeface="맑은 고딕"/>
+              </a:rPr>
+              <a:t>계좌번호</a:t>
+            </a:r>
+          </a:p>
+        </p:txBody>
+      </p:sp>
+      <p:sp>
+        <p:nvSpPr>
+          <p:cNvPr id="14" name="Rounded Rectangle 13"/>
+          <p:cNvSpPr/>
+          <p:nvPr/>
+        </p:nvSpPr>
+        <p:spPr>
+          <a:xfrm>
+            <a:off x="7269480" y="1828800"/>
+            <a:ext cx="2103120" cy="384048"/>
+          </a:xfrm>
+          <a:prstGeom prst="roundRect">
+            <a:avLst/>
+          </a:prstGeom>
+          <a:solidFill>
+            <a:srgbClr val="F4F5F7"/>
+          </a:solidFill>
+          <a:ln w="12700">
+            <a:solidFill>
+              <a:srgbClr val="DDDFE4"/>
+            </a:solidFill>
+          </a:ln>
+          <a:effectLst/>
+        </p:spPr>
+        <p:style>
+          <a:lnRef idx="1">
+            <a:schemeClr val="accent1"/>
+          </a:lnRef>
+          <a:fillRef idx="3">
+            <a:schemeClr val="accent1"/>
+          </a:fillRef>
+          <a:effectRef idx="2">
+            <a:schemeClr val="accent1"/>
+          </a:effectRef>
+          <a:fontRef idx="minor">
+            <a:schemeClr val="lt1"/>
+          </a:fontRef>
+        </p:style>
+        <p:txBody>
+          <a:bodyPr rtlCol="0" anchor="ctr" wrap="square" lIns="76200" rIns="76200" tIns="50800" bIns="50800"/>
+          <a:lstStyle/>
+          <a:p>
+            <a:pPr algn="ctr"/>
+            <a:r>
+              <a:rPr sz="1200" b="1">
+                <a:solidFill>
+                  <a:srgbClr val="1A1A1A"/>
+                </a:solidFill>
+                <a:latin typeface="맑은 고딕"/>
+                <a:ea typeface="맑은 고딕"/>
+                <a:cs typeface="맑은 고딕"/>
+              </a:rPr>
+              <a:t>전화번호</a:t>
+            </a:r>
+          </a:p>
+        </p:txBody>
+      </p:sp>
+      <p:sp>
+        <p:nvSpPr>
+          <p:cNvPr id="15" name="Rounded Rectangle 14"/>
+          <p:cNvSpPr/>
+          <p:nvPr/>
+        </p:nvSpPr>
+        <p:spPr>
+          <a:xfrm>
+            <a:off x="9509760" y="1828800"/>
+            <a:ext cx="2103120" cy="384048"/>
+          </a:xfrm>
+          <a:prstGeom prst="roundRect">
+            <a:avLst/>
+          </a:prstGeom>
+          <a:solidFill>
+            <a:srgbClr val="F4F5F7"/>
+          </a:solidFill>
+          <a:ln w="12700">
+            <a:solidFill>
+              <a:srgbClr val="DDDFE4"/>
+            </a:solidFill>
+          </a:ln>
+          <a:effectLst/>
+        </p:spPr>
+        <p:style>
+          <a:lnRef idx="1">
+            <a:schemeClr val="accent1"/>
+          </a:lnRef>
+          <a:fillRef idx="3">
+            <a:schemeClr val="accent1"/>
+          </a:fillRef>
+          <a:effectRef idx="2">
+            <a:schemeClr val="accent1"/>
+          </a:effectRef>
+          <a:fontRef idx="minor">
+            <a:schemeClr val="lt1"/>
+          </a:fontRef>
+        </p:style>
+        <p:txBody>
+          <a:bodyPr rtlCol="0" anchor="ctr" wrap="square" lIns="76200" rIns="76200" tIns="50800" bIns="50800"/>
+          <a:lstStyle/>
+          <a:p>
+            <a:pPr algn="ctr"/>
+            <a:r>
+              <a:rPr sz="1200" b="1">
+                <a:solidFill>
+                  <a:srgbClr val="1A1A1A"/>
+                </a:solidFill>
+                <a:latin typeface="맑은 고딕"/>
+                <a:ea typeface="맑은 고딕"/>
+                <a:cs typeface="맑은 고딕"/>
+              </a:rPr>
+              <a:t>이메일</a:t>
+            </a:r>
+          </a:p>
+        </p:txBody>
+      </p:sp>
+      <p:sp>
+        <p:nvSpPr>
+          <p:cNvPr id="16" name="Rounded Rectangle 15"/>
+          <p:cNvSpPr/>
+          <p:nvPr/>
+        </p:nvSpPr>
+        <p:spPr>
+          <a:xfrm>
+            <a:off x="548640" y="2331720"/>
+            <a:ext cx="2103120" cy="384048"/>
+          </a:xfrm>
+          <a:prstGeom prst="roundRect">
+            <a:avLst/>
+          </a:prstGeom>
+          <a:solidFill>
+            <a:srgbClr val="F4F5F7"/>
+          </a:solidFill>
+          <a:ln w="12700">
+            <a:solidFill>
+              <a:srgbClr val="DDDFE4"/>
+            </a:solidFill>
+          </a:ln>
+          <a:effectLst/>
+        </p:spPr>
+        <p:style>
+          <a:lnRef idx="1">
+            <a:schemeClr val="accent1"/>
+          </a:lnRef>
+          <a:fillRef idx="3">
+            <a:schemeClr val="accent1"/>
+          </a:fillRef>
+          <a:effectRef idx="2">
+            <a:schemeClr val="accent1"/>
+          </a:effectRef>
+          <a:fontRef idx="minor">
+            <a:schemeClr val="lt1"/>
+          </a:fontRef>
+        </p:style>
+        <p:txBody>
+          <a:bodyPr rtlCol="0" anchor="ctr" wrap="square" lIns="76200" rIns="76200" tIns="50800" bIns="50800"/>
+          <a:lstStyle/>
+          <a:p>
+            <a:pPr algn="ctr"/>
+            <a:r>
+              <a:rPr sz="1200" b="1">
+                <a:solidFill>
+                  <a:srgbClr val="1A1A1A"/>
+                </a:solidFill>
+                <a:latin typeface="맑은 고딕"/>
+                <a:ea typeface="맑은 고딕"/>
+                <a:cs typeface="맑은 고딕"/>
+              </a:rPr>
+              <a:t>카드번호</a:t>
+            </a:r>
+          </a:p>
+        </p:txBody>
+      </p:sp>
+      <p:sp>
+        <p:nvSpPr>
+          <p:cNvPr id="17" name="Rounded Rectangle 16"/>
+          <p:cNvSpPr/>
+          <p:nvPr/>
+        </p:nvSpPr>
+        <p:spPr>
+          <a:xfrm>
+            <a:off x="2788920" y="2331720"/>
+            <a:ext cx="2103120" cy="384048"/>
+          </a:xfrm>
+          <a:prstGeom prst="roundRect">
+            <a:avLst/>
+          </a:prstGeom>
+          <a:solidFill>
+            <a:srgbClr val="F4F5F7"/>
+          </a:solidFill>
+          <a:ln w="12700">
+            <a:solidFill>
+              <a:srgbClr val="DDDFE4"/>
+            </a:solidFill>
+          </a:ln>
+          <a:effectLst/>
+        </p:spPr>
+        <p:style>
+          <a:lnRef idx="1">
+            <a:schemeClr val="accent1"/>
+          </a:lnRef>
+          <a:fillRef idx="3">
+            <a:schemeClr val="accent1"/>
+          </a:fillRef>
+          <a:effectRef idx="2">
+            <a:schemeClr val="accent1"/>
+          </a:effectRef>
+          <a:fontRef idx="minor">
+            <a:schemeClr val="lt1"/>
+          </a:fontRef>
+        </p:style>
+        <p:txBody>
+          <a:bodyPr rtlCol="0" anchor="ctr" wrap="square" lIns="76200" rIns="76200" tIns="50800" bIns="50800"/>
+          <a:lstStyle/>
+          <a:p>
+            <a:pPr algn="ctr"/>
+            <a:r>
+              <a:rPr sz="1200" b="1">
+                <a:solidFill>
+                  <a:srgbClr val="1A1A1A"/>
+                </a:solidFill>
+                <a:latin typeface="맑은 고딕"/>
+                <a:ea typeface="맑은 고딕"/>
+                <a:cs typeface="맑은 고딕"/>
+              </a:rPr>
+              <a:t>사업자등록번호</a:t>
+            </a:r>
+          </a:p>
+        </p:txBody>
+      </p:sp>
+      <p:sp>
+        <p:nvSpPr>
+          <p:cNvPr id="18" name="Rounded Rectangle 17"/>
+          <p:cNvSpPr/>
+          <p:nvPr/>
+        </p:nvSpPr>
+        <p:spPr>
+          <a:xfrm>
+            <a:off x="5029200" y="2331720"/>
+            <a:ext cx="2103120" cy="384048"/>
+          </a:xfrm>
+          <a:prstGeom prst="roundRect">
+            <a:avLst/>
+          </a:prstGeom>
+          <a:solidFill>
+            <a:srgbClr val="F4F5F7"/>
+          </a:solidFill>
+          <a:ln w="12700">
+            <a:solidFill>
+              <a:srgbClr val="DDDFE4"/>
+            </a:solidFill>
+          </a:ln>
+          <a:effectLst/>
+        </p:spPr>
+        <p:style>
+          <a:lnRef idx="1">
+            <a:schemeClr val="accent1"/>
+          </a:lnRef>
+          <a:fillRef idx="3">
+            <a:schemeClr val="accent1"/>
+          </a:fillRef>
+          <a:effectRef idx="2">
+            <a:schemeClr val="accent1"/>
+          </a:effectRef>
+          <a:fontRef idx="minor">
+            <a:schemeClr val="lt1"/>
+          </a:fontRef>
+        </p:style>
+        <p:txBody>
+          <a:bodyPr rtlCol="0" anchor="ctr" wrap="square" lIns="76200" rIns="76200" tIns="50800" bIns="50800"/>
+          <a:lstStyle/>
+          <a:p>
+            <a:pPr algn="ctr"/>
+            <a:r>
+              <a:rPr sz="1200" b="1">
+                <a:solidFill>
+                  <a:srgbClr val="1A1A1A"/>
+                </a:solidFill>
+                <a:latin typeface="맑은 고딕"/>
+                <a:ea typeface="맑은 고딕"/>
+                <a:cs typeface="맑은 고딕"/>
+              </a:rPr>
+              <a:t>IP 주소</a:t>
+            </a:r>
+          </a:p>
+        </p:txBody>
+      </p:sp>
+      <p:sp>
+        <p:nvSpPr>
+          <p:cNvPr id="19" name="Rounded Rectangle 18"/>
+          <p:cNvSpPr/>
+          <p:nvPr/>
+        </p:nvSpPr>
+        <p:spPr>
+          <a:xfrm>
+            <a:off x="7269480" y="2331720"/>
+            <a:ext cx="2103120" cy="384048"/>
+          </a:xfrm>
+          <a:prstGeom prst="roundRect">
+            <a:avLst/>
+          </a:prstGeom>
+          <a:solidFill>
+            <a:srgbClr val="F4F5F7"/>
+          </a:solidFill>
+          <a:ln w="12700">
+            <a:solidFill>
+              <a:srgbClr val="DDDFE4"/>
+            </a:solidFill>
+          </a:ln>
+          <a:effectLst/>
+        </p:spPr>
+        <p:style>
+          <a:lnRef idx="1">
+            <a:schemeClr val="accent1"/>
+          </a:lnRef>
+          <a:fillRef idx="3">
+            <a:schemeClr val="accent1"/>
+          </a:fillRef>
+          <a:effectRef idx="2">
+            <a:schemeClr val="accent1"/>
+          </a:effectRef>
+          <a:fontRef idx="minor">
+            <a:schemeClr val="lt1"/>
+          </a:fontRef>
+        </p:style>
+        <p:txBody>
+          <a:bodyPr rtlCol="0" anchor="ctr" wrap="square" lIns="76200" rIns="76200" tIns="50800" bIns="50800"/>
+          <a:lstStyle/>
+          <a:p>
+            <a:pPr algn="ctr"/>
+            <a:r>
+              <a:rPr sz="1200" b="1">
+                <a:solidFill>
+                  <a:srgbClr val="1A1A1A"/>
+                </a:solidFill>
+                <a:latin typeface="맑은 고딕"/>
+                <a:ea typeface="맑은 고딕"/>
+                <a:cs typeface="맑은 고딕"/>
+              </a:rPr>
+              <a:t>직원 이름(명부)</a:t>
+            </a:r>
+          </a:p>
+        </p:txBody>
+      </p:sp>
+      <p:sp>
+        <p:nvSpPr>
+          <p:cNvPr id="20" name="TextBox 19"/>
+          <p:cNvSpPr txBox="1"/>
+          <p:nvPr/>
+        </p:nvSpPr>
+        <p:spPr>
+          <a:xfrm>
+            <a:off x="548640" y="3017520"/>
+            <a:ext cx="10972800" cy="365760"/>
+          </a:xfrm>
+          <a:prstGeom prst="rect">
+            <a:avLst/>
+          </a:prstGeom>
+          <a:noFill/>
+        </p:spPr>
+        <p:txBody>
+          <a:bodyPr wrap="square" anchor="t" lIns="25400" rIns="25400" tIns="25400" bIns="25400">
+            <a:spAutoFit/>
+          </a:bodyPr>
+          <a:lstStyle/>
+          <a:p>
+            <a:pPr algn="l">
+              <a:lnSpc>
+                <a:spcPct val="100000"/>
+              </a:lnSpc>
+            </a:pPr>
+            <a:r>
+              <a:rPr sz="1600" b="1">
+                <a:solidFill>
+                  <a:srgbClr val="1A1A1A"/>
+                </a:solidFill>
+                <a:latin typeface="맑은 고딕"/>
+                <a:ea typeface="맑은 고딕"/>
+                <a:cs typeface="맑은 고딕"/>
+              </a:rPr>
+              <a:t>네 가지 방식으로 빠짐없이 탐지</a:t>
+            </a:r>
+          </a:p>
+        </p:txBody>
+      </p:sp>
+      <p:sp>
+        <p:nvSpPr>
+          <p:cNvPr id="21" name="Rounded Rectangle 20"/>
+          <p:cNvSpPr/>
+          <p:nvPr/>
+        </p:nvSpPr>
+        <p:spPr>
+          <a:xfrm>
+            <a:off x="548640" y="3474720"/>
+            <a:ext cx="5440680" cy="841248"/>
+          </a:xfrm>
+          <a:prstGeom prst="roundRect">
+            <a:avLst/>
+          </a:prstGeom>
+          <a:solidFill>
+            <a:srgbClr val="F4F5F7"/>
+          </a:solidFill>
+          <a:ln w="12700">
+            <a:solidFill>
+              <a:srgbClr val="DDDFE4"/>
+            </a:solidFill>
+          </a:ln>
+          <a:effectLst/>
+        </p:spPr>
+        <p:style>
+          <a:lnRef idx="1">
+            <a:schemeClr val="accent1"/>
+          </a:lnRef>
+          <a:fillRef idx="3">
+            <a:schemeClr val="accent1"/>
+          </a:fillRef>
+          <a:effectRef idx="2">
+            <a:schemeClr val="accent1"/>
+          </a:effectRef>
+          <a:fontRef idx="minor">
+            <a:schemeClr val="lt1"/>
+          </a:fontRef>
+        </p:style>
+        <p:txBody>
+          <a:bodyPr rtlCol="0" anchor="ctr"/>
+          <a:lstStyle/>
+          <a:p>
+            <a:pPr algn="ctr"/>
+          </a:p>
+        </p:txBody>
+      </p:sp>
+      <p:sp>
+        <p:nvSpPr>
+          <p:cNvPr id="22" name="Rectangle 21"/>
+          <p:cNvSpPr/>
+          <p:nvPr/>
+        </p:nvSpPr>
+        <p:spPr>
+          <a:xfrm>
+            <a:off x="548640" y="3474720"/>
+            <a:ext cx="91440" cy="841248"/>
+          </a:xfrm>
+          <a:prstGeom prst="rect">
+            <a:avLst/>
+          </a:prstGeom>
+          <a:solidFill>
+            <a:srgbClr val="111111"/>
           </a:solidFill>
           <a:ln>
             <a:noFill/>
@@ -6705,40 +7751,157 @@
           </a:fontRef>
         </p:style>
         <p:txBody>
-          <a:bodyPr rtlCol="0" anchor="ctr" wrap="square" lIns="76200" rIns="76200" tIns="50800" bIns="50800"/>
+          <a:bodyPr rtlCol="0" anchor="ctr"/>
           <a:lstStyle/>
           <a:p>
             <a:pPr algn="ctr"/>
-            <a:r>
-              <a:rPr sz="1200" b="1">
-                <a:solidFill>
-                  <a:srgbClr val="1428A0"/>
-                </a:solidFill>
-                <a:latin typeface="맑은 고딕"/>
-                <a:ea typeface="맑은 고딕"/>
-                <a:cs typeface="맑은 고딕"/>
-              </a:rPr>
-              <a:t>주민등록번호</a:t>
-            </a:r>
-          </a:p>
-        </p:txBody>
-      </p:sp>
-      <p:sp>
-        <p:nvSpPr>
-          <p:cNvPr id="10" name="Rounded Rectangle 9"/>
+          </a:p>
+        </p:txBody>
+      </p:sp>
+      <p:sp>
+        <p:nvSpPr>
+          <p:cNvPr id="23" name="TextBox 22"/>
+          <p:cNvSpPr txBox="1"/>
+          <p:nvPr/>
+        </p:nvSpPr>
+        <p:spPr>
+          <a:xfrm>
+            <a:off x="822959" y="3566160"/>
+            <a:ext cx="2194560" cy="640080"/>
+          </a:xfrm>
+          <a:prstGeom prst="rect">
+            <a:avLst/>
+          </a:prstGeom>
+          <a:noFill/>
+        </p:spPr>
+        <p:txBody>
+          <a:bodyPr wrap="square" anchor="ctr" lIns="25400" rIns="25400" tIns="25400" bIns="25400">
+            <a:spAutoFit/>
+          </a:bodyPr>
+          <a:lstStyle/>
+          <a:p>
+            <a:pPr algn="l">
+              <a:lnSpc>
+                <a:spcPct val="100000"/>
+              </a:lnSpc>
+            </a:pPr>
+            <a:r>
+              <a:rPr sz="1400" b="1">
+                <a:solidFill>
+                  <a:srgbClr val="1A1A1A"/>
+                </a:solidFill>
+                <a:latin typeface="맑은 고딕"/>
+                <a:ea typeface="맑은 고딕"/>
+                <a:cs typeface="맑은 고딕"/>
+              </a:rPr>
+              <a:t>① 컬럼 이름</a:t>
+            </a:r>
+          </a:p>
+        </p:txBody>
+      </p:sp>
+      <p:sp>
+        <p:nvSpPr>
+          <p:cNvPr id="24" name="TextBox 23"/>
+          <p:cNvSpPr txBox="1"/>
+          <p:nvPr/>
+        </p:nvSpPr>
+        <p:spPr>
+          <a:xfrm>
+            <a:off x="2880360" y="3566160"/>
+            <a:ext cx="2971800" cy="640080"/>
+          </a:xfrm>
+          <a:prstGeom prst="rect">
+            <a:avLst/>
+          </a:prstGeom>
+          <a:noFill/>
+        </p:spPr>
+        <p:txBody>
+          <a:bodyPr wrap="square" anchor="ctr" lIns="25400" rIns="25400" tIns="25400" bIns="25400">
+            <a:spAutoFit/>
+          </a:bodyPr>
+          <a:lstStyle/>
+          <a:p>
+            <a:pPr algn="l">
+              <a:lnSpc>
+                <a:spcPct val="100000"/>
+              </a:lnSpc>
+            </a:pPr>
+            <a:r>
+              <a:rPr sz="1250" b="0">
+                <a:solidFill>
+                  <a:srgbClr val="1A1A1A"/>
+                </a:solidFill>
+                <a:latin typeface="맑은 고딕"/>
+                <a:ea typeface="맑은 고딕"/>
+                <a:cs typeface="맑은 고딕"/>
+              </a:rPr>
+              <a:t>‘연봉’, ‘주민번호’ 같은 열을 인식</a:t>
+            </a:r>
+          </a:p>
+        </p:txBody>
+      </p:sp>
+      <p:sp>
+        <p:nvSpPr>
+          <p:cNvPr id="25" name="Rounded Rectangle 24"/>
           <p:cNvSpPr/>
           <p:nvPr/>
         </p:nvSpPr>
         <p:spPr>
           <a:xfrm>
-            <a:off x="2788920" y="1783080"/>
-            <a:ext cx="2103120" cy="384048"/>
+            <a:off x="6172200" y="3474720"/>
+            <a:ext cx="5440680" cy="841248"/>
           </a:xfrm>
           <a:prstGeom prst="roundRect">
             <a:avLst/>
           </a:prstGeom>
           <a:solidFill>
-            <a:srgbClr val="E8EDFB"/>
+            <a:srgbClr val="F4F5F7"/>
+          </a:solidFill>
+          <a:ln w="12700">
+            <a:solidFill>
+              <a:srgbClr val="DDDFE4"/>
+            </a:solidFill>
+          </a:ln>
+          <a:effectLst/>
+        </p:spPr>
+        <p:style>
+          <a:lnRef idx="1">
+            <a:schemeClr val="accent1"/>
+          </a:lnRef>
+          <a:fillRef idx="3">
+            <a:schemeClr val="accent1"/>
+          </a:fillRef>
+          <a:effectRef idx="2">
+            <a:schemeClr val="accent1"/>
+          </a:effectRef>
+          <a:fontRef idx="minor">
+            <a:schemeClr val="lt1"/>
+          </a:fontRef>
+        </p:style>
+        <p:txBody>
+          <a:bodyPr rtlCol="0" anchor="ctr"/>
+          <a:lstStyle/>
+          <a:p>
+            <a:pPr algn="ctr"/>
+          </a:p>
+        </p:txBody>
+      </p:sp>
+      <p:sp>
+        <p:nvSpPr>
+          <p:cNvPr id="26" name="Rectangle 25"/>
+          <p:cNvSpPr/>
+          <p:nvPr/>
+        </p:nvSpPr>
+        <p:spPr>
+          <a:xfrm>
+            <a:off x="6172200" y="3474720"/>
+            <a:ext cx="91440" cy="841248"/>
+          </a:xfrm>
+          <a:prstGeom prst="rect">
+            <a:avLst/>
+          </a:prstGeom>
+          <a:solidFill>
+            <a:srgbClr val="111111"/>
           </a:solidFill>
           <a:ln>
             <a:noFill/>
@@ -6760,40 +7923,157 @@
           </a:fontRef>
         </p:style>
         <p:txBody>
-          <a:bodyPr rtlCol="0" anchor="ctr" wrap="square" lIns="76200" rIns="76200" tIns="50800" bIns="50800"/>
+          <a:bodyPr rtlCol="0" anchor="ctr"/>
           <a:lstStyle/>
           <a:p>
             <a:pPr algn="ctr"/>
-            <a:r>
-              <a:rPr sz="1200" b="1">
-                <a:solidFill>
-                  <a:srgbClr val="1428A0"/>
-                </a:solidFill>
-                <a:latin typeface="맑은 고딕"/>
-                <a:ea typeface="맑은 고딕"/>
-                <a:cs typeface="맑은 고딕"/>
-              </a:rPr>
-              <a:t>연봉·급여</a:t>
-            </a:r>
-          </a:p>
-        </p:txBody>
-      </p:sp>
-      <p:sp>
-        <p:nvSpPr>
-          <p:cNvPr id="11" name="Rounded Rectangle 10"/>
+          </a:p>
+        </p:txBody>
+      </p:sp>
+      <p:sp>
+        <p:nvSpPr>
+          <p:cNvPr id="27" name="TextBox 26"/>
+          <p:cNvSpPr txBox="1"/>
+          <p:nvPr/>
+        </p:nvSpPr>
+        <p:spPr>
+          <a:xfrm>
+            <a:off x="6446520" y="3566160"/>
+            <a:ext cx="2194560" cy="640080"/>
+          </a:xfrm>
+          <a:prstGeom prst="rect">
+            <a:avLst/>
+          </a:prstGeom>
+          <a:noFill/>
+        </p:spPr>
+        <p:txBody>
+          <a:bodyPr wrap="square" anchor="ctr" lIns="25400" rIns="25400" tIns="25400" bIns="25400">
+            <a:spAutoFit/>
+          </a:bodyPr>
+          <a:lstStyle/>
+          <a:p>
+            <a:pPr algn="l">
+              <a:lnSpc>
+                <a:spcPct val="100000"/>
+              </a:lnSpc>
+            </a:pPr>
+            <a:r>
+              <a:rPr sz="1400" b="1">
+                <a:solidFill>
+                  <a:srgbClr val="1A1A1A"/>
+                </a:solidFill>
+                <a:latin typeface="맑은 고딕"/>
+                <a:ea typeface="맑은 고딕"/>
+                <a:cs typeface="맑은 고딕"/>
+              </a:rPr>
+              <a:t>② 컬럼 형태</a:t>
+            </a:r>
+          </a:p>
+        </p:txBody>
+      </p:sp>
+      <p:sp>
+        <p:nvSpPr>
+          <p:cNvPr id="28" name="TextBox 27"/>
+          <p:cNvSpPr txBox="1"/>
+          <p:nvPr/>
+        </p:nvSpPr>
+        <p:spPr>
+          <a:xfrm>
+            <a:off x="8503920" y="3566160"/>
+            <a:ext cx="2971800" cy="640080"/>
+          </a:xfrm>
+          <a:prstGeom prst="rect">
+            <a:avLst/>
+          </a:prstGeom>
+          <a:noFill/>
+        </p:spPr>
+        <p:txBody>
+          <a:bodyPr wrap="square" anchor="ctr" lIns="25400" rIns="25400" tIns="25400" bIns="25400">
+            <a:spAutoFit/>
+          </a:bodyPr>
+          <a:lstStyle/>
+          <a:p>
+            <a:pPr algn="l">
+              <a:lnSpc>
+                <a:spcPct val="100000"/>
+              </a:lnSpc>
+            </a:pPr>
+            <a:r>
+              <a:rPr sz="1250" b="0">
+                <a:solidFill>
+                  <a:srgbClr val="1A1A1A"/>
+                </a:solidFill>
+                <a:latin typeface="맑은 고딕"/>
+                <a:ea typeface="맑은 고딕"/>
+                <a:cs typeface="맑은 고딕"/>
+              </a:rPr>
+              <a:t>이름이 달라도 값 모양으로 자동 판별</a:t>
+            </a:r>
+          </a:p>
+        </p:txBody>
+      </p:sp>
+      <p:sp>
+        <p:nvSpPr>
+          <p:cNvPr id="29" name="Rounded Rectangle 28"/>
           <p:cNvSpPr/>
           <p:nvPr/>
         </p:nvSpPr>
         <p:spPr>
           <a:xfrm>
-            <a:off x="5029200" y="1783080"/>
-            <a:ext cx="2103120" cy="384048"/>
+            <a:off x="548640" y="4434840"/>
+            <a:ext cx="5440680" cy="841248"/>
           </a:xfrm>
           <a:prstGeom prst="roundRect">
             <a:avLst/>
           </a:prstGeom>
           <a:solidFill>
-            <a:srgbClr val="E8EDFB"/>
+            <a:srgbClr val="F4F5F7"/>
+          </a:solidFill>
+          <a:ln w="12700">
+            <a:solidFill>
+              <a:srgbClr val="DDDFE4"/>
+            </a:solidFill>
+          </a:ln>
+          <a:effectLst/>
+        </p:spPr>
+        <p:style>
+          <a:lnRef idx="1">
+            <a:schemeClr val="accent1"/>
+          </a:lnRef>
+          <a:fillRef idx="3">
+            <a:schemeClr val="accent1"/>
+          </a:fillRef>
+          <a:effectRef idx="2">
+            <a:schemeClr val="accent1"/>
+          </a:effectRef>
+          <a:fontRef idx="minor">
+            <a:schemeClr val="lt1"/>
+          </a:fontRef>
+        </p:style>
+        <p:txBody>
+          <a:bodyPr rtlCol="0" anchor="ctr"/>
+          <a:lstStyle/>
+          <a:p>
+            <a:pPr algn="ctr"/>
+          </a:p>
+        </p:txBody>
+      </p:sp>
+      <p:sp>
+        <p:nvSpPr>
+          <p:cNvPr id="30" name="Rectangle 29"/>
+          <p:cNvSpPr/>
+          <p:nvPr/>
+        </p:nvSpPr>
+        <p:spPr>
+          <a:xfrm>
+            <a:off x="548640" y="4434840"/>
+            <a:ext cx="91440" cy="841248"/>
+          </a:xfrm>
+          <a:prstGeom prst="rect">
+            <a:avLst/>
+          </a:prstGeom>
+          <a:solidFill>
+            <a:srgbClr val="111111"/>
           </a:solidFill>
           <a:ln>
             <a:noFill/>
@@ -6815,40 +8095,157 @@
           </a:fontRef>
         </p:style>
         <p:txBody>
-          <a:bodyPr rtlCol="0" anchor="ctr" wrap="square" lIns="76200" rIns="76200" tIns="50800" bIns="50800"/>
+          <a:bodyPr rtlCol="0" anchor="ctr"/>
           <a:lstStyle/>
           <a:p>
             <a:pPr algn="ctr"/>
-            <a:r>
-              <a:rPr sz="1200" b="1">
-                <a:solidFill>
-                  <a:srgbClr val="1428A0"/>
-                </a:solidFill>
-                <a:latin typeface="맑은 고딕"/>
-                <a:ea typeface="맑은 고딕"/>
-                <a:cs typeface="맑은 고딕"/>
-              </a:rPr>
-              <a:t>계좌번호</a:t>
-            </a:r>
-          </a:p>
-        </p:txBody>
-      </p:sp>
-      <p:sp>
-        <p:nvSpPr>
-          <p:cNvPr id="12" name="Rounded Rectangle 11"/>
+          </a:p>
+        </p:txBody>
+      </p:sp>
+      <p:sp>
+        <p:nvSpPr>
+          <p:cNvPr id="31" name="TextBox 30"/>
+          <p:cNvSpPr txBox="1"/>
+          <p:nvPr/>
+        </p:nvSpPr>
+        <p:spPr>
+          <a:xfrm>
+            <a:off x="822959" y="4526279"/>
+            <a:ext cx="2194560" cy="640080"/>
+          </a:xfrm>
+          <a:prstGeom prst="rect">
+            <a:avLst/>
+          </a:prstGeom>
+          <a:noFill/>
+        </p:spPr>
+        <p:txBody>
+          <a:bodyPr wrap="square" anchor="ctr" lIns="25400" rIns="25400" tIns="25400" bIns="25400">
+            <a:spAutoFit/>
+          </a:bodyPr>
+          <a:lstStyle/>
+          <a:p>
+            <a:pPr algn="l">
+              <a:lnSpc>
+                <a:spcPct val="100000"/>
+              </a:lnSpc>
+            </a:pPr>
+            <a:r>
+              <a:rPr sz="1400" b="1">
+                <a:solidFill>
+                  <a:srgbClr val="1A1A1A"/>
+                </a:solidFill>
+                <a:latin typeface="맑은 고딕"/>
+                <a:ea typeface="맑은 고딕"/>
+                <a:cs typeface="맑은 고딕"/>
+              </a:rPr>
+              <a:t>③ 값 모양</a:t>
+            </a:r>
+          </a:p>
+        </p:txBody>
+      </p:sp>
+      <p:sp>
+        <p:nvSpPr>
+          <p:cNvPr id="32" name="TextBox 31"/>
+          <p:cNvSpPr txBox="1"/>
+          <p:nvPr/>
+        </p:nvSpPr>
+        <p:spPr>
+          <a:xfrm>
+            <a:off x="2880360" y="4526279"/>
+            <a:ext cx="2971800" cy="640080"/>
+          </a:xfrm>
+          <a:prstGeom prst="rect">
+            <a:avLst/>
+          </a:prstGeom>
+          <a:noFill/>
+        </p:spPr>
+        <p:txBody>
+          <a:bodyPr wrap="square" anchor="ctr" lIns="25400" rIns="25400" tIns="25400" bIns="25400">
+            <a:spAutoFit/>
+          </a:bodyPr>
+          <a:lstStyle/>
+          <a:p>
+            <a:pPr algn="l">
+              <a:lnSpc>
+                <a:spcPct val="100000"/>
+              </a:lnSpc>
+            </a:pPr>
+            <a:r>
+              <a:rPr sz="1250" b="0">
+                <a:solidFill>
+                  <a:srgbClr val="1A1A1A"/>
+                </a:solidFill>
+                <a:latin typeface="맑은 고딕"/>
+                <a:ea typeface="맑은 고딕"/>
+                <a:cs typeface="맑은 고딕"/>
+              </a:rPr>
+              <a:t>문장 속에 섞인 번호·연락처도 탐지</a:t>
+            </a:r>
+          </a:p>
+        </p:txBody>
+      </p:sp>
+      <p:sp>
+        <p:nvSpPr>
+          <p:cNvPr id="33" name="Rounded Rectangle 32"/>
           <p:cNvSpPr/>
           <p:nvPr/>
         </p:nvSpPr>
         <p:spPr>
           <a:xfrm>
-            <a:off x="7269480" y="1783080"/>
-            <a:ext cx="2103120" cy="384048"/>
+            <a:off x="6172200" y="4434840"/>
+            <a:ext cx="5440680" cy="841248"/>
           </a:xfrm>
           <a:prstGeom prst="roundRect">
             <a:avLst/>
           </a:prstGeom>
           <a:solidFill>
-            <a:srgbClr val="E8EDFB"/>
+            <a:srgbClr val="F4F5F7"/>
+          </a:solidFill>
+          <a:ln w="12700">
+            <a:solidFill>
+              <a:srgbClr val="DDDFE4"/>
+            </a:solidFill>
+          </a:ln>
+          <a:effectLst/>
+        </p:spPr>
+        <p:style>
+          <a:lnRef idx="1">
+            <a:schemeClr val="accent1"/>
+          </a:lnRef>
+          <a:fillRef idx="3">
+            <a:schemeClr val="accent1"/>
+          </a:fillRef>
+          <a:effectRef idx="2">
+            <a:schemeClr val="accent1"/>
+          </a:effectRef>
+          <a:fontRef idx="minor">
+            <a:schemeClr val="lt1"/>
+          </a:fontRef>
+        </p:style>
+        <p:txBody>
+          <a:bodyPr rtlCol="0" anchor="ctr"/>
+          <a:lstStyle/>
+          <a:p>
+            <a:pPr algn="ctr"/>
+          </a:p>
+        </p:txBody>
+      </p:sp>
+      <p:sp>
+        <p:nvSpPr>
+          <p:cNvPr id="34" name="Rectangle 33"/>
+          <p:cNvSpPr/>
+          <p:nvPr/>
+        </p:nvSpPr>
+        <p:spPr>
+          <a:xfrm>
+            <a:off x="6172200" y="4434840"/>
+            <a:ext cx="91440" cy="841248"/>
+          </a:xfrm>
+          <a:prstGeom prst="rect">
+            <a:avLst/>
+          </a:prstGeom>
+          <a:solidFill>
+            <a:srgbClr val="111111"/>
           </a:solidFill>
           <a:ln>
             <a:noFill/>
@@ -6870,43 +8267,116 @@
           </a:fontRef>
         </p:style>
         <p:txBody>
-          <a:bodyPr rtlCol="0" anchor="ctr" wrap="square" lIns="76200" rIns="76200" tIns="50800" bIns="50800"/>
+          <a:bodyPr rtlCol="0" anchor="ctr"/>
           <a:lstStyle/>
           <a:p>
             <a:pPr algn="ctr"/>
-            <a:r>
-              <a:rPr sz="1200" b="1">
-                <a:solidFill>
-                  <a:srgbClr val="1428A0"/>
-                </a:solidFill>
-                <a:latin typeface="맑은 고딕"/>
-                <a:ea typeface="맑은 고딕"/>
-                <a:cs typeface="맑은 고딕"/>
-              </a:rPr>
-              <a:t>전화번호</a:t>
-            </a:r>
-          </a:p>
-        </p:txBody>
-      </p:sp>
-      <p:sp>
-        <p:nvSpPr>
-          <p:cNvPr id="13" name="Rounded Rectangle 12"/>
+          </a:p>
+        </p:txBody>
+      </p:sp>
+      <p:sp>
+        <p:nvSpPr>
+          <p:cNvPr id="35" name="TextBox 34"/>
+          <p:cNvSpPr txBox="1"/>
+          <p:nvPr/>
+        </p:nvSpPr>
+        <p:spPr>
+          <a:xfrm>
+            <a:off x="6446520" y="4526279"/>
+            <a:ext cx="2194560" cy="640080"/>
+          </a:xfrm>
+          <a:prstGeom prst="rect">
+            <a:avLst/>
+          </a:prstGeom>
+          <a:noFill/>
+        </p:spPr>
+        <p:txBody>
+          <a:bodyPr wrap="square" anchor="ctr" lIns="25400" rIns="25400" tIns="25400" bIns="25400">
+            <a:spAutoFit/>
+          </a:bodyPr>
+          <a:lstStyle/>
+          <a:p>
+            <a:pPr algn="l">
+              <a:lnSpc>
+                <a:spcPct val="100000"/>
+              </a:lnSpc>
+            </a:pPr>
+            <a:r>
+              <a:rPr sz="1400" b="1">
+                <a:solidFill>
+                  <a:srgbClr val="1A1A1A"/>
+                </a:solidFill>
+                <a:latin typeface="맑은 고딕"/>
+                <a:ea typeface="맑은 고딕"/>
+                <a:cs typeface="맑은 고딕"/>
+              </a:rPr>
+              <a:t>④ 명부 이름</a:t>
+            </a:r>
+          </a:p>
+        </p:txBody>
+      </p:sp>
+      <p:sp>
+        <p:nvSpPr>
+          <p:cNvPr id="36" name="TextBox 35"/>
+          <p:cNvSpPr txBox="1"/>
+          <p:nvPr/>
+        </p:nvSpPr>
+        <p:spPr>
+          <a:xfrm>
+            <a:off x="8503920" y="4526279"/>
+            <a:ext cx="2971800" cy="640080"/>
+          </a:xfrm>
+          <a:prstGeom prst="rect">
+            <a:avLst/>
+          </a:prstGeom>
+          <a:noFill/>
+        </p:spPr>
+        <p:txBody>
+          <a:bodyPr wrap="square" anchor="ctr" lIns="25400" rIns="25400" tIns="25400" bIns="25400">
+            <a:spAutoFit/>
+          </a:bodyPr>
+          <a:lstStyle/>
+          <a:p>
+            <a:pPr algn="l">
+              <a:lnSpc>
+                <a:spcPct val="100000"/>
+              </a:lnSpc>
+            </a:pPr>
+            <a:r>
+              <a:rPr sz="1250" b="0">
+                <a:solidFill>
+                  <a:srgbClr val="1A1A1A"/>
+                </a:solidFill>
+                <a:latin typeface="맑은 고딕"/>
+                <a:ea typeface="맑은 고딕"/>
+                <a:cs typeface="맑은 고딕"/>
+              </a:rPr>
+              <a:t>담당자 명부의 직원 이름을 정확히 가림</a:t>
+            </a:r>
+          </a:p>
+        </p:txBody>
+      </p:sp>
+      <p:sp>
+        <p:nvSpPr>
+          <p:cNvPr id="37" name="Rounded Rectangle 36"/>
           <p:cNvSpPr/>
           <p:nvPr/>
         </p:nvSpPr>
         <p:spPr>
           <a:xfrm>
-            <a:off x="9509760" y="1783080"/>
-            <a:ext cx="2103120" cy="384048"/>
+            <a:off x="548640" y="5486400"/>
+            <a:ext cx="11091672" cy="566928"/>
           </a:xfrm>
           <a:prstGeom prst="roundRect">
             <a:avLst/>
           </a:prstGeom>
           <a:solidFill>
-            <a:srgbClr val="E8EDFB"/>
+            <a:srgbClr val="ECEFF9"/>
           </a:solidFill>
-          <a:ln>
-            <a:noFill/>
+          <a:ln w="12700">
+            <a:solidFill>
+              <a:srgbClr val="DDDFE4"/>
+            </a:solidFill>
           </a:ln>
           <a:effectLst/>
         </p:spPr>
@@ -6930,7 +8400,18 @@
           <a:p>
             <a:pPr algn="ctr"/>
             <a:r>
-              <a:rPr sz="1200" b="1">
+              <a:rPr sz="1400" b="0">
+                <a:solidFill>
+                  <a:srgbClr val="1A1A1A"/>
+                </a:solidFill>
+                <a:latin typeface="맑은 고딕"/>
+                <a:ea typeface="맑은 고딕"/>
+                <a:cs typeface="맑은 고딕"/>
+              </a:rPr>
+              <a:t>엑셀·CSV 명부뿐 아니라 </a:t>
+            </a:r>
+            <a:r>
+              <a:rPr sz="1400" b="1">
                 <a:solidFill>
                   <a:srgbClr val="1428A0"/>
                 </a:solidFill>
@@ -6938,851 +8419,12 @@
                 <a:ea typeface="맑은 고딕"/>
                 <a:cs typeface="맑은 고딕"/>
               </a:rPr>
-              <a:t>이메일</a:t>
-            </a:r>
-          </a:p>
-        </p:txBody>
-      </p:sp>
-      <p:sp>
-        <p:nvSpPr>
-          <p:cNvPr id="14" name="Rounded Rectangle 13"/>
-          <p:cNvSpPr/>
-          <p:nvPr/>
-        </p:nvSpPr>
-        <p:spPr>
-          <a:xfrm>
-            <a:off x="548640" y="2286000"/>
-            <a:ext cx="2103120" cy="384048"/>
-          </a:xfrm>
-          <a:prstGeom prst="roundRect">
-            <a:avLst/>
-          </a:prstGeom>
-          <a:solidFill>
-            <a:srgbClr val="E8EDFB"/>
-          </a:solidFill>
-          <a:ln>
-            <a:noFill/>
-          </a:ln>
-          <a:effectLst/>
-        </p:spPr>
-        <p:style>
-          <a:lnRef idx="1">
-            <a:schemeClr val="accent1"/>
-          </a:lnRef>
-          <a:fillRef idx="3">
-            <a:schemeClr val="accent1"/>
-          </a:fillRef>
-          <a:effectRef idx="2">
-            <a:schemeClr val="accent1"/>
-          </a:effectRef>
-          <a:fontRef idx="minor">
-            <a:schemeClr val="lt1"/>
-          </a:fontRef>
-        </p:style>
-        <p:txBody>
-          <a:bodyPr rtlCol="0" anchor="ctr" wrap="square" lIns="76200" rIns="76200" tIns="50800" bIns="50800"/>
-          <a:lstStyle/>
-          <a:p>
-            <a:pPr algn="ctr"/>
-            <a:r>
-              <a:rPr sz="1200" b="1">
-                <a:solidFill>
-                  <a:srgbClr val="1428A0"/>
-                </a:solidFill>
-                <a:latin typeface="맑은 고딕"/>
-                <a:ea typeface="맑은 고딕"/>
-                <a:cs typeface="맑은 고딕"/>
-              </a:rPr>
-              <a:t>카드번호</a:t>
-            </a:r>
-          </a:p>
-        </p:txBody>
-      </p:sp>
-      <p:sp>
-        <p:nvSpPr>
-          <p:cNvPr id="15" name="Rounded Rectangle 14"/>
-          <p:cNvSpPr/>
-          <p:nvPr/>
-        </p:nvSpPr>
-        <p:spPr>
-          <a:xfrm>
-            <a:off x="2788920" y="2286000"/>
-            <a:ext cx="2103120" cy="384048"/>
-          </a:xfrm>
-          <a:prstGeom prst="roundRect">
-            <a:avLst/>
-          </a:prstGeom>
-          <a:solidFill>
-            <a:srgbClr val="E8EDFB"/>
-          </a:solidFill>
-          <a:ln>
-            <a:noFill/>
-          </a:ln>
-          <a:effectLst/>
-        </p:spPr>
-        <p:style>
-          <a:lnRef idx="1">
-            <a:schemeClr val="accent1"/>
-          </a:lnRef>
-          <a:fillRef idx="3">
-            <a:schemeClr val="accent1"/>
-          </a:fillRef>
-          <a:effectRef idx="2">
-            <a:schemeClr val="accent1"/>
-          </a:effectRef>
-          <a:fontRef idx="minor">
-            <a:schemeClr val="lt1"/>
-          </a:fontRef>
-        </p:style>
-        <p:txBody>
-          <a:bodyPr rtlCol="0" anchor="ctr" wrap="square" lIns="76200" rIns="76200" tIns="50800" bIns="50800"/>
-          <a:lstStyle/>
-          <a:p>
-            <a:pPr algn="ctr"/>
-            <a:r>
-              <a:rPr sz="1200" b="1">
-                <a:solidFill>
-                  <a:srgbClr val="1428A0"/>
-                </a:solidFill>
-                <a:latin typeface="맑은 고딕"/>
-                <a:ea typeface="맑은 고딕"/>
-                <a:cs typeface="맑은 고딕"/>
-              </a:rPr>
-              <a:t>사업자등록번호</a:t>
-            </a:r>
-          </a:p>
-        </p:txBody>
-      </p:sp>
-      <p:sp>
-        <p:nvSpPr>
-          <p:cNvPr id="16" name="Rounded Rectangle 15"/>
-          <p:cNvSpPr/>
-          <p:nvPr/>
-        </p:nvSpPr>
-        <p:spPr>
-          <a:xfrm>
-            <a:off x="5029200" y="2286000"/>
-            <a:ext cx="2103120" cy="384048"/>
-          </a:xfrm>
-          <a:prstGeom prst="roundRect">
-            <a:avLst/>
-          </a:prstGeom>
-          <a:solidFill>
-            <a:srgbClr val="E8EDFB"/>
-          </a:solidFill>
-          <a:ln>
-            <a:noFill/>
-          </a:ln>
-          <a:effectLst/>
-        </p:spPr>
-        <p:style>
-          <a:lnRef idx="1">
-            <a:schemeClr val="accent1"/>
-          </a:lnRef>
-          <a:fillRef idx="3">
-            <a:schemeClr val="accent1"/>
-          </a:fillRef>
-          <a:effectRef idx="2">
-            <a:schemeClr val="accent1"/>
-          </a:effectRef>
-          <a:fontRef idx="minor">
-            <a:schemeClr val="lt1"/>
-          </a:fontRef>
-        </p:style>
-        <p:txBody>
-          <a:bodyPr rtlCol="0" anchor="ctr" wrap="square" lIns="76200" rIns="76200" tIns="50800" bIns="50800"/>
-          <a:lstStyle/>
-          <a:p>
-            <a:pPr algn="ctr"/>
-            <a:r>
-              <a:rPr sz="1200" b="1">
-                <a:solidFill>
-                  <a:srgbClr val="1428A0"/>
-                </a:solidFill>
-                <a:latin typeface="맑은 고딕"/>
-                <a:ea typeface="맑은 고딕"/>
-                <a:cs typeface="맑은 고딕"/>
-              </a:rPr>
-              <a:t>IP 주소</a:t>
-            </a:r>
-          </a:p>
-        </p:txBody>
-      </p:sp>
-      <p:sp>
-        <p:nvSpPr>
-          <p:cNvPr id="17" name="Rounded Rectangle 16"/>
-          <p:cNvSpPr/>
-          <p:nvPr/>
-        </p:nvSpPr>
-        <p:spPr>
-          <a:xfrm>
-            <a:off x="7269480" y="2286000"/>
-            <a:ext cx="2103120" cy="384048"/>
-          </a:xfrm>
-          <a:prstGeom prst="roundRect">
-            <a:avLst/>
-          </a:prstGeom>
-          <a:solidFill>
-            <a:srgbClr val="E8EDFB"/>
-          </a:solidFill>
-          <a:ln>
-            <a:noFill/>
-          </a:ln>
-          <a:effectLst/>
-        </p:spPr>
-        <p:style>
-          <a:lnRef idx="1">
-            <a:schemeClr val="accent1"/>
-          </a:lnRef>
-          <a:fillRef idx="3">
-            <a:schemeClr val="accent1"/>
-          </a:fillRef>
-          <a:effectRef idx="2">
-            <a:schemeClr val="accent1"/>
-          </a:effectRef>
-          <a:fontRef idx="minor">
-            <a:schemeClr val="lt1"/>
-          </a:fontRef>
-        </p:style>
-        <p:txBody>
-          <a:bodyPr rtlCol="0" anchor="ctr" wrap="square" lIns="76200" rIns="76200" tIns="50800" bIns="50800"/>
-          <a:lstStyle/>
-          <a:p>
-            <a:pPr algn="ctr"/>
-            <a:r>
-              <a:rPr sz="1200" b="1">
-                <a:solidFill>
-                  <a:srgbClr val="1428A0"/>
-                </a:solidFill>
-                <a:latin typeface="맑은 고딕"/>
-                <a:ea typeface="맑은 고딕"/>
-                <a:cs typeface="맑은 고딕"/>
-              </a:rPr>
-              <a:t>직원 이름(명부)</a:t>
-            </a:r>
-          </a:p>
-        </p:txBody>
-      </p:sp>
-      <p:sp>
-        <p:nvSpPr>
-          <p:cNvPr id="18" name="TextBox 17"/>
-          <p:cNvSpPr txBox="1"/>
-          <p:nvPr/>
-        </p:nvSpPr>
-        <p:spPr>
-          <a:xfrm>
-            <a:off x="548640" y="2971800"/>
-            <a:ext cx="10972800" cy="365760"/>
-          </a:xfrm>
-          <a:prstGeom prst="rect">
-            <a:avLst/>
-          </a:prstGeom>
-          <a:noFill/>
-        </p:spPr>
-        <p:txBody>
-          <a:bodyPr wrap="square" anchor="t" lIns="25400" rIns="25400" tIns="25400" bIns="25400">
-            <a:spAutoFit/>
-          </a:bodyPr>
-          <a:lstStyle/>
-          <a:p>
-            <a:pPr algn="l">
-              <a:lnSpc>
-                <a:spcPct val="100000"/>
-              </a:lnSpc>
-            </a:pPr>
-            <a:r>
-              <a:rPr sz="1600" b="1">
-                <a:solidFill>
-                  <a:srgbClr val="0B145A"/>
-                </a:solidFill>
-                <a:latin typeface="맑은 고딕"/>
-                <a:ea typeface="맑은 고딕"/>
-                <a:cs typeface="맑은 고딕"/>
-              </a:rPr>
-              <a:t>네 가지 방식으로 빠짐없이 탐지</a:t>
-            </a:r>
-          </a:p>
-        </p:txBody>
-      </p:sp>
-      <p:sp>
-        <p:nvSpPr>
-          <p:cNvPr id="19" name="Rounded Rectangle 18"/>
-          <p:cNvSpPr/>
-          <p:nvPr/>
-        </p:nvSpPr>
-        <p:spPr>
-          <a:xfrm>
-            <a:off x="548640" y="3429000"/>
-            <a:ext cx="5440680" cy="841248"/>
-          </a:xfrm>
-          <a:prstGeom prst="roundRect">
-            <a:avLst/>
-          </a:prstGeom>
-          <a:solidFill>
-            <a:srgbClr val="F4F6FB"/>
-          </a:solidFill>
-          <a:ln w="12700">
-            <a:solidFill>
-              <a:srgbClr val="E2E6F0"/>
-            </a:solidFill>
-          </a:ln>
-          <a:effectLst/>
-        </p:spPr>
-        <p:style>
-          <a:lnRef idx="1">
-            <a:schemeClr val="accent1"/>
-          </a:lnRef>
-          <a:fillRef idx="3">
-            <a:schemeClr val="accent1"/>
-          </a:fillRef>
-          <a:effectRef idx="2">
-            <a:schemeClr val="accent1"/>
-          </a:effectRef>
-          <a:fontRef idx="minor">
-            <a:schemeClr val="lt1"/>
-          </a:fontRef>
-        </p:style>
-        <p:txBody>
-          <a:bodyPr rtlCol="0" anchor="ctr"/>
-          <a:lstStyle/>
-          <a:p>
-            <a:pPr algn="ctr"/>
-          </a:p>
-        </p:txBody>
-      </p:sp>
-      <p:sp>
-        <p:nvSpPr>
-          <p:cNvPr id="20" name="TextBox 19"/>
-          <p:cNvSpPr txBox="1"/>
-          <p:nvPr/>
-        </p:nvSpPr>
-        <p:spPr>
-          <a:xfrm>
-            <a:off x="777240" y="3520440"/>
-            <a:ext cx="2194560" cy="640080"/>
-          </a:xfrm>
-          <a:prstGeom prst="rect">
-            <a:avLst/>
-          </a:prstGeom>
-          <a:noFill/>
-        </p:spPr>
-        <p:txBody>
-          <a:bodyPr wrap="square" anchor="ctr" lIns="25400" rIns="25400" tIns="25400" bIns="25400">
-            <a:spAutoFit/>
-          </a:bodyPr>
-          <a:lstStyle/>
-          <a:p>
-            <a:pPr algn="l">
-              <a:lnSpc>
-                <a:spcPct val="100000"/>
-              </a:lnSpc>
-            </a:pPr>
-            <a:r>
-              <a:rPr sz="1400" b="1">
-                <a:solidFill>
-                  <a:srgbClr val="1428A0"/>
-                </a:solidFill>
-                <a:latin typeface="맑은 고딕"/>
-                <a:ea typeface="맑은 고딕"/>
-                <a:cs typeface="맑은 고딕"/>
-              </a:rPr>
-              <a:t>① 컬럼 이름</a:t>
-            </a:r>
-          </a:p>
-        </p:txBody>
-      </p:sp>
-      <p:sp>
-        <p:nvSpPr>
-          <p:cNvPr id="21" name="TextBox 20"/>
-          <p:cNvSpPr txBox="1"/>
-          <p:nvPr/>
-        </p:nvSpPr>
-        <p:spPr>
-          <a:xfrm>
-            <a:off x="2834640" y="3520440"/>
-            <a:ext cx="3017520" cy="640080"/>
-          </a:xfrm>
-          <a:prstGeom prst="rect">
-            <a:avLst/>
-          </a:prstGeom>
-          <a:noFill/>
-        </p:spPr>
-        <p:txBody>
-          <a:bodyPr wrap="square" anchor="ctr" lIns="25400" rIns="25400" tIns="25400" bIns="25400">
-            <a:spAutoFit/>
-          </a:bodyPr>
-          <a:lstStyle/>
-          <a:p>
-            <a:pPr algn="l">
-              <a:lnSpc>
-                <a:spcPct val="100000"/>
-              </a:lnSpc>
-            </a:pPr>
-            <a:r>
-              <a:rPr sz="1250" b="0">
-                <a:solidFill>
-                  <a:srgbClr val="222222"/>
-                </a:solidFill>
-                <a:latin typeface="맑은 고딕"/>
-                <a:ea typeface="맑은 고딕"/>
-                <a:cs typeface="맑은 고딕"/>
-              </a:rPr>
-              <a:t>‘연봉’, ‘주민번호’ 같은 열을 인식</a:t>
-            </a:r>
-          </a:p>
-        </p:txBody>
-      </p:sp>
-      <p:sp>
-        <p:nvSpPr>
-          <p:cNvPr id="22" name="Rounded Rectangle 21"/>
-          <p:cNvSpPr/>
-          <p:nvPr/>
-        </p:nvSpPr>
-        <p:spPr>
-          <a:xfrm>
-            <a:off x="6172200" y="3429000"/>
-            <a:ext cx="5440680" cy="841248"/>
-          </a:xfrm>
-          <a:prstGeom prst="roundRect">
-            <a:avLst/>
-          </a:prstGeom>
-          <a:solidFill>
-            <a:srgbClr val="F4F6FB"/>
-          </a:solidFill>
-          <a:ln w="12700">
-            <a:solidFill>
-              <a:srgbClr val="E2E6F0"/>
-            </a:solidFill>
-          </a:ln>
-          <a:effectLst/>
-        </p:spPr>
-        <p:style>
-          <a:lnRef idx="1">
-            <a:schemeClr val="accent1"/>
-          </a:lnRef>
-          <a:fillRef idx="3">
-            <a:schemeClr val="accent1"/>
-          </a:fillRef>
-          <a:effectRef idx="2">
-            <a:schemeClr val="accent1"/>
-          </a:effectRef>
-          <a:fontRef idx="minor">
-            <a:schemeClr val="lt1"/>
-          </a:fontRef>
-        </p:style>
-        <p:txBody>
-          <a:bodyPr rtlCol="0" anchor="ctr"/>
-          <a:lstStyle/>
-          <a:p>
-            <a:pPr algn="ctr"/>
-          </a:p>
-        </p:txBody>
-      </p:sp>
-      <p:sp>
-        <p:nvSpPr>
-          <p:cNvPr id="23" name="TextBox 22"/>
-          <p:cNvSpPr txBox="1"/>
-          <p:nvPr/>
-        </p:nvSpPr>
-        <p:spPr>
-          <a:xfrm>
-            <a:off x="6400800" y="3520440"/>
-            <a:ext cx="2194560" cy="640080"/>
-          </a:xfrm>
-          <a:prstGeom prst="rect">
-            <a:avLst/>
-          </a:prstGeom>
-          <a:noFill/>
-        </p:spPr>
-        <p:txBody>
-          <a:bodyPr wrap="square" anchor="ctr" lIns="25400" rIns="25400" tIns="25400" bIns="25400">
-            <a:spAutoFit/>
-          </a:bodyPr>
-          <a:lstStyle/>
-          <a:p>
-            <a:pPr algn="l">
-              <a:lnSpc>
-                <a:spcPct val="100000"/>
-              </a:lnSpc>
-            </a:pPr>
-            <a:r>
-              <a:rPr sz="1400" b="1">
-                <a:solidFill>
-                  <a:srgbClr val="1428A0"/>
-                </a:solidFill>
-                <a:latin typeface="맑은 고딕"/>
-                <a:ea typeface="맑은 고딕"/>
-                <a:cs typeface="맑은 고딕"/>
-              </a:rPr>
-              <a:t>② 컬럼 형태</a:t>
-            </a:r>
-          </a:p>
-        </p:txBody>
-      </p:sp>
-      <p:sp>
-        <p:nvSpPr>
-          <p:cNvPr id="24" name="TextBox 23"/>
-          <p:cNvSpPr txBox="1"/>
-          <p:nvPr/>
-        </p:nvSpPr>
-        <p:spPr>
-          <a:xfrm>
-            <a:off x="8458200" y="3520440"/>
-            <a:ext cx="3017520" cy="640080"/>
-          </a:xfrm>
-          <a:prstGeom prst="rect">
-            <a:avLst/>
-          </a:prstGeom>
-          <a:noFill/>
-        </p:spPr>
-        <p:txBody>
-          <a:bodyPr wrap="square" anchor="ctr" lIns="25400" rIns="25400" tIns="25400" bIns="25400">
-            <a:spAutoFit/>
-          </a:bodyPr>
-          <a:lstStyle/>
-          <a:p>
-            <a:pPr algn="l">
-              <a:lnSpc>
-                <a:spcPct val="100000"/>
-              </a:lnSpc>
-            </a:pPr>
-            <a:r>
-              <a:rPr sz="1250" b="0">
-                <a:solidFill>
-                  <a:srgbClr val="222222"/>
-                </a:solidFill>
-                <a:latin typeface="맑은 고딕"/>
-                <a:ea typeface="맑은 고딕"/>
-                <a:cs typeface="맑은 고딕"/>
-              </a:rPr>
-              <a:t>이름이 달라도 값 모양으로 자동 판별</a:t>
-            </a:r>
-          </a:p>
-        </p:txBody>
-      </p:sp>
-      <p:sp>
-        <p:nvSpPr>
-          <p:cNvPr id="25" name="Rounded Rectangle 24"/>
-          <p:cNvSpPr/>
-          <p:nvPr/>
-        </p:nvSpPr>
-        <p:spPr>
-          <a:xfrm>
-            <a:off x="548640" y="4389120"/>
-            <a:ext cx="5440680" cy="841248"/>
-          </a:xfrm>
-          <a:prstGeom prst="roundRect">
-            <a:avLst/>
-          </a:prstGeom>
-          <a:solidFill>
-            <a:srgbClr val="F4F6FB"/>
-          </a:solidFill>
-          <a:ln w="12700">
-            <a:solidFill>
-              <a:srgbClr val="E2E6F0"/>
-            </a:solidFill>
-          </a:ln>
-          <a:effectLst/>
-        </p:spPr>
-        <p:style>
-          <a:lnRef idx="1">
-            <a:schemeClr val="accent1"/>
-          </a:lnRef>
-          <a:fillRef idx="3">
-            <a:schemeClr val="accent1"/>
-          </a:fillRef>
-          <a:effectRef idx="2">
-            <a:schemeClr val="accent1"/>
-          </a:effectRef>
-          <a:fontRef idx="minor">
-            <a:schemeClr val="lt1"/>
-          </a:fontRef>
-        </p:style>
-        <p:txBody>
-          <a:bodyPr rtlCol="0" anchor="ctr"/>
-          <a:lstStyle/>
-          <a:p>
-            <a:pPr algn="ctr"/>
-          </a:p>
-        </p:txBody>
-      </p:sp>
-      <p:sp>
-        <p:nvSpPr>
-          <p:cNvPr id="26" name="TextBox 25"/>
-          <p:cNvSpPr txBox="1"/>
-          <p:nvPr/>
-        </p:nvSpPr>
-        <p:spPr>
-          <a:xfrm>
-            <a:off x="777240" y="4480559"/>
-            <a:ext cx="2194560" cy="640080"/>
-          </a:xfrm>
-          <a:prstGeom prst="rect">
-            <a:avLst/>
-          </a:prstGeom>
-          <a:noFill/>
-        </p:spPr>
-        <p:txBody>
-          <a:bodyPr wrap="square" anchor="ctr" lIns="25400" rIns="25400" tIns="25400" bIns="25400">
-            <a:spAutoFit/>
-          </a:bodyPr>
-          <a:lstStyle/>
-          <a:p>
-            <a:pPr algn="l">
-              <a:lnSpc>
-                <a:spcPct val="100000"/>
-              </a:lnSpc>
-            </a:pPr>
-            <a:r>
-              <a:rPr sz="1400" b="1">
-                <a:solidFill>
-                  <a:srgbClr val="1428A0"/>
-                </a:solidFill>
-                <a:latin typeface="맑은 고딕"/>
-                <a:ea typeface="맑은 고딕"/>
-                <a:cs typeface="맑은 고딕"/>
-              </a:rPr>
-              <a:t>③ 값 모양</a:t>
-            </a:r>
-          </a:p>
-        </p:txBody>
-      </p:sp>
-      <p:sp>
-        <p:nvSpPr>
-          <p:cNvPr id="27" name="TextBox 26"/>
-          <p:cNvSpPr txBox="1"/>
-          <p:nvPr/>
-        </p:nvSpPr>
-        <p:spPr>
-          <a:xfrm>
-            <a:off x="2834640" y="4480559"/>
-            <a:ext cx="3017520" cy="640080"/>
-          </a:xfrm>
-          <a:prstGeom prst="rect">
-            <a:avLst/>
-          </a:prstGeom>
-          <a:noFill/>
-        </p:spPr>
-        <p:txBody>
-          <a:bodyPr wrap="square" anchor="ctr" lIns="25400" rIns="25400" tIns="25400" bIns="25400">
-            <a:spAutoFit/>
-          </a:bodyPr>
-          <a:lstStyle/>
-          <a:p>
-            <a:pPr algn="l">
-              <a:lnSpc>
-                <a:spcPct val="100000"/>
-              </a:lnSpc>
-            </a:pPr>
-            <a:r>
-              <a:rPr sz="1250" b="0">
-                <a:solidFill>
-                  <a:srgbClr val="222222"/>
-                </a:solidFill>
-                <a:latin typeface="맑은 고딕"/>
-                <a:ea typeface="맑은 고딕"/>
-                <a:cs typeface="맑은 고딕"/>
-              </a:rPr>
-              <a:t>문장 속에 섞인 번호·연락처도 탐지</a:t>
-            </a:r>
-          </a:p>
-        </p:txBody>
-      </p:sp>
-      <p:sp>
-        <p:nvSpPr>
-          <p:cNvPr id="28" name="Rounded Rectangle 27"/>
-          <p:cNvSpPr/>
-          <p:nvPr/>
-        </p:nvSpPr>
-        <p:spPr>
-          <a:xfrm>
-            <a:off x="6172200" y="4389120"/>
-            <a:ext cx="5440680" cy="841248"/>
-          </a:xfrm>
-          <a:prstGeom prst="roundRect">
-            <a:avLst/>
-          </a:prstGeom>
-          <a:solidFill>
-            <a:srgbClr val="F4F6FB"/>
-          </a:solidFill>
-          <a:ln w="12700">
-            <a:solidFill>
-              <a:srgbClr val="E2E6F0"/>
-            </a:solidFill>
-          </a:ln>
-          <a:effectLst/>
-        </p:spPr>
-        <p:style>
-          <a:lnRef idx="1">
-            <a:schemeClr val="accent1"/>
-          </a:lnRef>
-          <a:fillRef idx="3">
-            <a:schemeClr val="accent1"/>
-          </a:fillRef>
-          <a:effectRef idx="2">
-            <a:schemeClr val="accent1"/>
-          </a:effectRef>
-          <a:fontRef idx="minor">
-            <a:schemeClr val="lt1"/>
-          </a:fontRef>
-        </p:style>
-        <p:txBody>
-          <a:bodyPr rtlCol="0" anchor="ctr"/>
-          <a:lstStyle/>
-          <a:p>
-            <a:pPr algn="ctr"/>
-          </a:p>
-        </p:txBody>
-      </p:sp>
-      <p:sp>
-        <p:nvSpPr>
-          <p:cNvPr id="29" name="TextBox 28"/>
-          <p:cNvSpPr txBox="1"/>
-          <p:nvPr/>
-        </p:nvSpPr>
-        <p:spPr>
-          <a:xfrm>
-            <a:off x="6400800" y="4480559"/>
-            <a:ext cx="2194560" cy="640080"/>
-          </a:xfrm>
-          <a:prstGeom prst="rect">
-            <a:avLst/>
-          </a:prstGeom>
-          <a:noFill/>
-        </p:spPr>
-        <p:txBody>
-          <a:bodyPr wrap="square" anchor="ctr" lIns="25400" rIns="25400" tIns="25400" bIns="25400">
-            <a:spAutoFit/>
-          </a:bodyPr>
-          <a:lstStyle/>
-          <a:p>
-            <a:pPr algn="l">
-              <a:lnSpc>
-                <a:spcPct val="100000"/>
-              </a:lnSpc>
-            </a:pPr>
-            <a:r>
-              <a:rPr sz="1400" b="1">
-                <a:solidFill>
-                  <a:srgbClr val="1428A0"/>
-                </a:solidFill>
-                <a:latin typeface="맑은 고딕"/>
-                <a:ea typeface="맑은 고딕"/>
-                <a:cs typeface="맑은 고딕"/>
-              </a:rPr>
-              <a:t>④ 명부 이름</a:t>
-            </a:r>
-          </a:p>
-        </p:txBody>
-      </p:sp>
-      <p:sp>
-        <p:nvSpPr>
-          <p:cNvPr id="30" name="TextBox 29"/>
-          <p:cNvSpPr txBox="1"/>
-          <p:nvPr/>
-        </p:nvSpPr>
-        <p:spPr>
-          <a:xfrm>
-            <a:off x="8458200" y="4480559"/>
-            <a:ext cx="3017520" cy="640080"/>
-          </a:xfrm>
-          <a:prstGeom prst="rect">
-            <a:avLst/>
-          </a:prstGeom>
-          <a:noFill/>
-        </p:spPr>
-        <p:txBody>
-          <a:bodyPr wrap="square" anchor="ctr" lIns="25400" rIns="25400" tIns="25400" bIns="25400">
-            <a:spAutoFit/>
-          </a:bodyPr>
-          <a:lstStyle/>
-          <a:p>
-            <a:pPr algn="l">
-              <a:lnSpc>
-                <a:spcPct val="100000"/>
-              </a:lnSpc>
-            </a:pPr>
-            <a:r>
-              <a:rPr sz="1250" b="0">
-                <a:solidFill>
-                  <a:srgbClr val="222222"/>
-                </a:solidFill>
-                <a:latin typeface="맑은 고딕"/>
-                <a:ea typeface="맑은 고딕"/>
-                <a:cs typeface="맑은 고딕"/>
-              </a:rPr>
-              <a:t>담당자 명부의 직원 이름을 정확히 가림</a:t>
-            </a:r>
-          </a:p>
-        </p:txBody>
-      </p:sp>
-      <p:sp>
-        <p:nvSpPr>
-          <p:cNvPr id="31" name="Rounded Rectangle 30"/>
-          <p:cNvSpPr/>
-          <p:nvPr/>
-        </p:nvSpPr>
-        <p:spPr>
-          <a:xfrm>
-            <a:off x="548640" y="5440680"/>
-            <a:ext cx="11091672" cy="594360"/>
-          </a:xfrm>
-          <a:prstGeom prst="roundRect">
-            <a:avLst/>
-          </a:prstGeom>
-          <a:solidFill>
-            <a:srgbClr val="E8EDFB"/>
-          </a:solidFill>
-          <a:ln>
-            <a:noFill/>
-          </a:ln>
-          <a:effectLst/>
-        </p:spPr>
-        <p:style>
-          <a:lnRef idx="1">
-            <a:schemeClr val="accent1"/>
-          </a:lnRef>
-          <a:fillRef idx="3">
-            <a:schemeClr val="accent1"/>
-          </a:fillRef>
-          <a:effectRef idx="2">
-            <a:schemeClr val="accent1"/>
-          </a:effectRef>
-          <a:fontRef idx="minor">
-            <a:schemeClr val="lt1"/>
-          </a:fontRef>
-        </p:style>
-        <p:txBody>
-          <a:bodyPr rtlCol="0" anchor="ctr" wrap="square" lIns="76200" rIns="76200" tIns="50800" bIns="50800"/>
-          <a:lstStyle/>
-          <a:p>
-            <a:pPr algn="ctr"/>
+              <a:t>메모·이메일 초안 같은 문서(.txt/.md)</a:t>
+            </a:r>
             <a:r>
               <a:rPr sz="1400" b="0">
                 <a:solidFill>
-                  <a:srgbClr val="222222"/>
-                </a:solidFill>
-                <a:latin typeface="맑은 고딕"/>
-                <a:ea typeface="맑은 고딕"/>
-                <a:cs typeface="맑은 고딕"/>
-              </a:rPr>
-              <a:t>엑셀·CSV 명부뿐 아니라 </a:t>
-            </a:r>
-            <a:r>
-              <a:rPr sz="1400" b="1">
-                <a:solidFill>
-                  <a:srgbClr val="1428A0"/>
-                </a:solidFill>
-                <a:latin typeface="맑은 고딕"/>
-                <a:ea typeface="맑은 고딕"/>
-                <a:cs typeface="맑은 고딕"/>
-              </a:rPr>
-              <a:t>메모·이메일 초안 같은 문서(.txt/.md)</a:t>
-            </a:r>
-            <a:r>
-              <a:rPr sz="1400" b="0">
-                <a:solidFill>
-                  <a:srgbClr val="222222"/>
+                  <a:srgbClr val="1A1A1A"/>
                 </a:solidFill>
                 <a:latin typeface="맑은 고딕"/>
                 <a:ea typeface="맑은 고딕"/>
@@ -7820,7 +8462,7 @@
         <p:spPr>
           <a:xfrm>
             <a:off x="0" y="0"/>
-            <a:ext cx="12191695" cy="1051560"/>
+            <a:ext cx="12191695" cy="6858000"/>
           </a:xfrm>
           <a:prstGeom prst="rect">
             <a:avLst/>
@@ -7863,8 +8505,52 @@
         </p:nvSpPr>
         <p:spPr>
           <a:xfrm>
-            <a:off x="0" y="1051560"/>
-            <a:ext cx="12191695" cy="41148"/>
+            <a:off x="0" y="0"/>
+            <a:ext cx="12191695" cy="1097280"/>
+          </a:xfrm>
+          <a:prstGeom prst="rect">
+            <a:avLst/>
+          </a:prstGeom>
+          <a:solidFill>
+            <a:srgbClr val="111111"/>
+          </a:solidFill>
+          <a:ln>
+            <a:noFill/>
+          </a:ln>
+          <a:effectLst/>
+        </p:spPr>
+        <p:style>
+          <a:lnRef idx="1">
+            <a:schemeClr val="accent1"/>
+          </a:lnRef>
+          <a:fillRef idx="3">
+            <a:schemeClr val="accent1"/>
+          </a:fillRef>
+          <a:effectRef idx="2">
+            <a:schemeClr val="accent1"/>
+          </a:effectRef>
+          <a:fontRef idx="minor">
+            <a:schemeClr val="lt1"/>
+          </a:fontRef>
+        </p:style>
+        <p:txBody>
+          <a:bodyPr rtlCol="0" anchor="ctr"/>
+          <a:lstStyle/>
+          <a:p>
+            <a:pPr algn="ctr"/>
+          </a:p>
+        </p:txBody>
+      </p:sp>
+      <p:sp>
+        <p:nvSpPr>
+          <p:cNvPr id="4" name="Rectangle 3"/>
+          <p:cNvSpPr/>
+          <p:nvPr/>
+        </p:nvSpPr>
+        <p:spPr>
+          <a:xfrm>
+            <a:off x="0" y="1097280"/>
+            <a:ext cx="12191695" cy="45720"/>
           </a:xfrm>
           <a:prstGeom prst="rect">
             <a:avLst/>
@@ -7901,13 +8587,13 @@
       </p:sp>
       <p:sp>
         <p:nvSpPr>
-          <p:cNvPr id="4" name="TextBox 3"/>
+          <p:cNvPr id="5" name="TextBox 4"/>
           <p:cNvSpPr txBox="1"/>
           <p:nvPr/>
         </p:nvSpPr>
         <p:spPr>
           <a:xfrm>
-            <a:off x="548640" y="164592"/>
+            <a:off x="548640" y="182880"/>
             <a:ext cx="10058400" cy="274320"/>
           </a:xfrm>
           <a:prstGeom prst="rect">
@@ -7929,7 +8615,7 @@
             <a:r>
               <a:rPr sz="1200" b="1">
                 <a:solidFill>
-                  <a:srgbClr val="3E5CD0"/>
+                  <a:srgbClr val="B9C4EA"/>
                 </a:solidFill>
                 <a:latin typeface="맑은 고딕"/>
                 <a:ea typeface="맑은 고딕"/>
@@ -7942,14 +8628,14 @@
       </p:sp>
       <p:sp>
         <p:nvSpPr>
-          <p:cNvPr id="5" name="TextBox 4"/>
+          <p:cNvPr id="6" name="TextBox 5"/>
           <p:cNvSpPr txBox="1"/>
           <p:nvPr/>
         </p:nvSpPr>
         <p:spPr>
           <a:xfrm>
-            <a:off x="548640" y="384048"/>
-            <a:ext cx="10972800" cy="640080"/>
+            <a:off x="548640" y="420624"/>
+            <a:ext cx="10972800" cy="603504"/>
           </a:xfrm>
           <a:prstGeom prst="rect">
             <a:avLst/>
@@ -7970,7 +8656,7 @@
             <a:r>
               <a:rPr sz="2600" b="1">
                 <a:solidFill>
-                  <a:srgbClr val="0B145A"/>
+                  <a:srgbClr val="FFFFFF"/>
                 </a:solidFill>
                 <a:latin typeface="맑은 고딕"/>
                 <a:ea typeface="맑은 고딕"/>
@@ -7983,13 +8669,65 @@
       </p:sp>
       <p:sp>
         <p:nvSpPr>
-          <p:cNvPr id="6" name="TextBox 5"/>
+          <p:cNvPr id="7" name="TextBox 6"/>
           <p:cNvSpPr txBox="1"/>
           <p:nvPr/>
         </p:nvSpPr>
         <p:spPr>
           <a:xfrm>
-            <a:off x="548640" y="6455664"/>
+            <a:off x="8229600" y="182880"/>
+            <a:ext cx="3410712" cy="274320"/>
+          </a:xfrm>
+          <a:prstGeom prst="rect">
+            <a:avLst/>
+          </a:prstGeom>
+          <a:noFill/>
+        </p:spPr>
+        <p:txBody>
+          <a:bodyPr wrap="square" anchor="t" lIns="25400" rIns="25400" tIns="25400" bIns="25400">
+            <a:spAutoFit/>
+          </a:bodyPr>
+          <a:lstStyle/>
+          <a:p>
+            <a:pPr algn="r">
+              <a:lnSpc>
+                <a:spcPct val="100000"/>
+              </a:lnSpc>
+            </a:pPr>
+            <a:r>
+              <a:rPr sz="1100" b="1">
+                <a:solidFill>
+                  <a:srgbClr val="FFFFFF"/>
+                </a:solidFill>
+                <a:latin typeface="맑은 고딕"/>
+                <a:ea typeface="맑은 고딕"/>
+                <a:cs typeface="맑은 고딕"/>
+              </a:rPr>
+              <a:t>SAMSUNG </a:t>
+            </a:r>
+            <a:r>
+              <a:rPr sz="1100" b="1">
+                <a:solidFill>
+                  <a:srgbClr val="B9C4EA"/>
+                </a:solidFill>
+                <a:latin typeface="맑은 고딕"/>
+                <a:ea typeface="맑은 고딕"/>
+                <a:cs typeface="맑은 고딕"/>
+              </a:rPr>
+              <a:t>DS</a:t>
+            </a:r>
+          </a:p>
+        </p:txBody>
+      </p:sp>
+      <p:sp>
+        <p:nvSpPr>
+          <p:cNvPr id="8" name="TextBox 7"/>
+          <p:cNvSpPr txBox="1"/>
+          <p:nvPr/>
+        </p:nvSpPr>
+        <p:spPr>
+          <a:xfrm>
+            <a:off x="548640" y="6473952"/>
             <a:ext cx="6400800" cy="274320"/>
           </a:xfrm>
           <a:prstGeom prst="rect">
@@ -8011,7 +8749,7 @@
             <a:r>
               <a:rPr sz="900" b="0">
                 <a:solidFill>
-                  <a:srgbClr val="6B7280"/>
+                  <a:srgbClr val="70747C"/>
                 </a:solidFill>
                 <a:latin typeface="맑은 고딕"/>
                 <a:ea typeface="맑은 고딕"/>
@@ -8024,14 +8762,14 @@
       </p:sp>
       <p:sp>
         <p:nvSpPr>
-          <p:cNvPr id="7" name="TextBox 6"/>
+          <p:cNvPr id="9" name="TextBox 8"/>
           <p:cNvSpPr txBox="1"/>
           <p:nvPr/>
         </p:nvSpPr>
         <p:spPr>
           <a:xfrm>
-            <a:off x="5486400" y="6455664"/>
-            <a:ext cx="6126480" cy="274320"/>
+            <a:off x="5486400" y="6473952"/>
+            <a:ext cx="6153912" cy="274320"/>
           </a:xfrm>
           <a:prstGeom prst="rect">
             <a:avLst/>
@@ -8050,39 +8788,28 @@
               </a:lnSpc>
             </a:pPr>
             <a:r>
-              <a:rPr sz="900" b="1">
-                <a:solidFill>
-                  <a:srgbClr val="1428A0"/>
-                </a:solidFill>
-                <a:latin typeface="맑은 고딕"/>
-                <a:ea typeface="맑은 고딕"/>
-                <a:cs typeface="맑은 고딕"/>
-              </a:rPr>
-              <a:t>SAMSUNG </a:t>
-            </a:r>
-            <a:r>
               <a:rPr sz="900" b="0">
                 <a:solidFill>
-                  <a:srgbClr val="6B7280"/>
-                </a:solidFill>
-                <a:latin typeface="맑은 고딕"/>
-                <a:ea typeface="맑은 고딕"/>
-                <a:cs typeface="맑은 고딕"/>
-              </a:rPr>
-              <a:t>DS  |  인사팀 대상 설명자료</a:t>
-            </a:r>
-          </a:p>
-        </p:txBody>
-      </p:sp>
-      <p:sp>
-        <p:nvSpPr>
-          <p:cNvPr id="8" name="Rounded Rectangle 7"/>
+                  <a:srgbClr val="70747C"/>
+                </a:solidFill>
+                <a:latin typeface="맑은 고딕"/>
+                <a:ea typeface="맑은 고딕"/>
+                <a:cs typeface="맑은 고딕"/>
+              </a:rPr>
+              <a:t>인사팀 대상 설명자료</a:t>
+            </a:r>
+          </a:p>
+        </p:txBody>
+      </p:sp>
+      <p:sp>
+        <p:nvSpPr>
+          <p:cNvPr id="10" name="Rounded Rectangle 9"/>
           <p:cNvSpPr/>
           <p:nvPr/>
         </p:nvSpPr>
         <p:spPr>
           <a:xfrm>
-            <a:off x="548640" y="1554480"/>
+            <a:off x="548640" y="1600200"/>
             <a:ext cx="2651760" cy="2468880"/>
           </a:xfrm>
           <a:prstGeom prst="roundRect">
@@ -8093,7 +8820,7 @@
           </a:solidFill>
           <a:ln w="12700">
             <a:solidFill>
-              <a:srgbClr val="E2E6F0"/>
+              <a:srgbClr val="DDDFE4"/>
             </a:solidFill>
           </a:ln>
           <a:effectLst/>
@@ -8122,20 +8849,786 @@
       </p:sp>
       <p:sp>
         <p:nvSpPr>
-          <p:cNvPr id="9" name="Oval 8"/>
+          <p:cNvPr id="11" name="Oval 10"/>
           <p:cNvSpPr/>
           <p:nvPr/>
         </p:nvSpPr>
         <p:spPr>
           <a:xfrm>
-            <a:off x="1508760" y="1783080"/>
+            <a:off x="1508760" y="1828800"/>
             <a:ext cx="731520" cy="731520"/>
           </a:xfrm>
           <a:prstGeom prst="ellipse">
             <a:avLst/>
           </a:prstGeom>
           <a:solidFill>
-            <a:srgbClr val="E8EDFB"/>
+            <a:srgbClr val="F4F5F7"/>
+          </a:solidFill>
+          <a:ln w="12700">
+            <a:solidFill>
+              <a:srgbClr val="DDDFE4"/>
+            </a:solidFill>
+          </a:ln>
+          <a:effectLst/>
+        </p:spPr>
+        <p:style>
+          <a:lnRef idx="1">
+            <a:schemeClr val="accent1"/>
+          </a:lnRef>
+          <a:fillRef idx="3">
+            <a:schemeClr val="accent1"/>
+          </a:fillRef>
+          <a:effectRef idx="2">
+            <a:schemeClr val="accent1"/>
+          </a:effectRef>
+          <a:fontRef idx="minor">
+            <a:schemeClr val="lt1"/>
+          </a:fontRef>
+        </p:style>
+        <p:txBody>
+          <a:bodyPr rtlCol="0" anchor="ctr" wrap="square" lIns="76200" rIns="76200" tIns="50800" bIns="50800"/>
+          <a:lstStyle/>
+          <a:p>
+            <a:pPr algn="ctr"/>
+            <a:r>
+              <a:rPr sz="2400" b="0">
+                <a:solidFill>
+                  <a:srgbClr val="1A1A1A"/>
+                </a:solidFill>
+                <a:latin typeface="맑은 고딕"/>
+                <a:ea typeface="맑은 고딕"/>
+                <a:cs typeface="맑은 고딕"/>
+              </a:rPr>
+              <a:t>🛡</a:t>
+            </a:r>
+          </a:p>
+        </p:txBody>
+      </p:sp>
+      <p:sp>
+        <p:nvSpPr>
+          <p:cNvPr id="12" name="TextBox 11"/>
+          <p:cNvSpPr txBox="1"/>
+          <p:nvPr/>
+        </p:nvSpPr>
+        <p:spPr>
+          <a:xfrm>
+            <a:off x="548640" y="2651760"/>
+            <a:ext cx="2651760" cy="365760"/>
+          </a:xfrm>
+          <a:prstGeom prst="rect">
+            <a:avLst/>
+          </a:prstGeom>
+          <a:noFill/>
+        </p:spPr>
+        <p:txBody>
+          <a:bodyPr wrap="square" anchor="t" lIns="25400" rIns="25400" tIns="25400" bIns="25400">
+            <a:spAutoFit/>
+          </a:bodyPr>
+          <a:lstStyle/>
+          <a:p>
+            <a:pPr algn="ctr">
+              <a:lnSpc>
+                <a:spcPct val="100000"/>
+              </a:lnSpc>
+            </a:pPr>
+            <a:r>
+              <a:rPr sz="1800" b="1">
+                <a:solidFill>
+                  <a:srgbClr val="1A1A1A"/>
+                </a:solidFill>
+                <a:latin typeface="맑은 고딕"/>
+                <a:ea typeface="맑은 고딕"/>
+                <a:cs typeface="맑은 고딕"/>
+              </a:rPr>
+              <a:t>안전</a:t>
+            </a:r>
+          </a:p>
+        </p:txBody>
+      </p:sp>
+      <p:sp>
+        <p:nvSpPr>
+          <p:cNvPr id="13" name="TextBox 12"/>
+          <p:cNvSpPr txBox="1"/>
+          <p:nvPr/>
+        </p:nvSpPr>
+        <p:spPr>
+          <a:xfrm>
+            <a:off x="731520" y="3063240"/>
+            <a:ext cx="2286000" cy="914400"/>
+          </a:xfrm>
+          <a:prstGeom prst="rect">
+            <a:avLst/>
+          </a:prstGeom>
+          <a:noFill/>
+        </p:spPr>
+        <p:txBody>
+          <a:bodyPr wrap="square" anchor="t" lIns="25400" rIns="25400" tIns="25400" bIns="25400">
+            <a:spAutoFit/>
+          </a:bodyPr>
+          <a:lstStyle/>
+          <a:p>
+            <a:pPr algn="ctr">
+              <a:lnSpc>
+                <a:spcPct val="110000"/>
+              </a:lnSpc>
+            </a:pPr>
+            <a:r>
+              <a:rPr sz="1250" b="0">
+                <a:solidFill>
+                  <a:srgbClr val="1A1A1A"/>
+                </a:solidFill>
+                <a:latin typeface="맑은 고딕"/>
+                <a:ea typeface="맑은 고딕"/>
+                <a:cs typeface="맑은 고딕"/>
+              </a:rPr>
+              <a:t>민감정보가 AI에 0건 노출.</a:t>
+            </a:r>
+          </a:p>
+          <a:p>
+            <a:pPr algn="ctr">
+              <a:lnSpc>
+                <a:spcPct val="110000"/>
+              </a:lnSpc>
+            </a:pPr>
+            <a:r>
+              <a:rPr sz="1250" b="0">
+                <a:solidFill>
+                  <a:srgbClr val="1A1A1A"/>
+                </a:solidFill>
+                <a:latin typeface="맑은 고딕"/>
+                <a:ea typeface="맑은 고딕"/>
+                <a:cs typeface="맑은 고딕"/>
+              </a:rPr>
+              <a:t>유출 리스크를 원천 차단</a:t>
+            </a:r>
+          </a:p>
+        </p:txBody>
+      </p:sp>
+      <p:sp>
+        <p:nvSpPr>
+          <p:cNvPr id="14" name="Rounded Rectangle 13"/>
+          <p:cNvSpPr/>
+          <p:nvPr/>
+        </p:nvSpPr>
+        <p:spPr>
+          <a:xfrm>
+            <a:off x="3346704" y="1600200"/>
+            <a:ext cx="2651760" cy="2468880"/>
+          </a:xfrm>
+          <a:prstGeom prst="roundRect">
+            <a:avLst/>
+          </a:prstGeom>
+          <a:solidFill>
+            <a:srgbClr val="FFFFFF"/>
+          </a:solidFill>
+          <a:ln w="12700">
+            <a:solidFill>
+              <a:srgbClr val="DDDFE4"/>
+            </a:solidFill>
+          </a:ln>
+          <a:effectLst/>
+        </p:spPr>
+        <p:style>
+          <a:lnRef idx="1">
+            <a:schemeClr val="accent1"/>
+          </a:lnRef>
+          <a:fillRef idx="3">
+            <a:schemeClr val="accent1"/>
+          </a:fillRef>
+          <a:effectRef idx="2">
+            <a:schemeClr val="accent1"/>
+          </a:effectRef>
+          <a:fontRef idx="minor">
+            <a:schemeClr val="lt1"/>
+          </a:fontRef>
+        </p:style>
+        <p:txBody>
+          <a:bodyPr rtlCol="0" anchor="ctr"/>
+          <a:lstStyle/>
+          <a:p>
+            <a:pPr algn="ctr"/>
+          </a:p>
+        </p:txBody>
+      </p:sp>
+      <p:sp>
+        <p:nvSpPr>
+          <p:cNvPr id="15" name="Oval 14"/>
+          <p:cNvSpPr/>
+          <p:nvPr/>
+        </p:nvSpPr>
+        <p:spPr>
+          <a:xfrm>
+            <a:off x="4306824" y="1828800"/>
+            <a:ext cx="731520" cy="731520"/>
+          </a:xfrm>
+          <a:prstGeom prst="ellipse">
+            <a:avLst/>
+          </a:prstGeom>
+          <a:solidFill>
+            <a:srgbClr val="F4F5F7"/>
+          </a:solidFill>
+          <a:ln w="12700">
+            <a:solidFill>
+              <a:srgbClr val="DDDFE4"/>
+            </a:solidFill>
+          </a:ln>
+          <a:effectLst/>
+        </p:spPr>
+        <p:style>
+          <a:lnRef idx="1">
+            <a:schemeClr val="accent1"/>
+          </a:lnRef>
+          <a:fillRef idx="3">
+            <a:schemeClr val="accent1"/>
+          </a:fillRef>
+          <a:effectRef idx="2">
+            <a:schemeClr val="accent1"/>
+          </a:effectRef>
+          <a:fontRef idx="minor">
+            <a:schemeClr val="lt1"/>
+          </a:fontRef>
+        </p:style>
+        <p:txBody>
+          <a:bodyPr rtlCol="0" anchor="ctr" wrap="square" lIns="76200" rIns="76200" tIns="50800" bIns="50800"/>
+          <a:lstStyle/>
+          <a:p>
+            <a:pPr algn="ctr"/>
+            <a:r>
+              <a:rPr sz="2400" b="0">
+                <a:solidFill>
+                  <a:srgbClr val="1A1A1A"/>
+                </a:solidFill>
+                <a:latin typeface="맑은 고딕"/>
+                <a:ea typeface="맑은 고딕"/>
+                <a:cs typeface="맑은 고딕"/>
+              </a:rPr>
+              <a:t>⚡</a:t>
+            </a:r>
+          </a:p>
+        </p:txBody>
+      </p:sp>
+      <p:sp>
+        <p:nvSpPr>
+          <p:cNvPr id="16" name="TextBox 15"/>
+          <p:cNvSpPr txBox="1"/>
+          <p:nvPr/>
+        </p:nvSpPr>
+        <p:spPr>
+          <a:xfrm>
+            <a:off x="3346704" y="2651760"/>
+            <a:ext cx="2651760" cy="365760"/>
+          </a:xfrm>
+          <a:prstGeom prst="rect">
+            <a:avLst/>
+          </a:prstGeom>
+          <a:noFill/>
+        </p:spPr>
+        <p:txBody>
+          <a:bodyPr wrap="square" anchor="t" lIns="25400" rIns="25400" tIns="25400" bIns="25400">
+            <a:spAutoFit/>
+          </a:bodyPr>
+          <a:lstStyle/>
+          <a:p>
+            <a:pPr algn="ctr">
+              <a:lnSpc>
+                <a:spcPct val="100000"/>
+              </a:lnSpc>
+            </a:pPr>
+            <a:r>
+              <a:rPr sz="1800" b="1">
+                <a:solidFill>
+                  <a:srgbClr val="1A1A1A"/>
+                </a:solidFill>
+                <a:latin typeface="맑은 고딕"/>
+                <a:ea typeface="맑은 고딕"/>
+                <a:cs typeface="맑은 고딕"/>
+              </a:rPr>
+              <a:t>간편</a:t>
+            </a:r>
+          </a:p>
+        </p:txBody>
+      </p:sp>
+      <p:sp>
+        <p:nvSpPr>
+          <p:cNvPr id="17" name="TextBox 16"/>
+          <p:cNvSpPr txBox="1"/>
+          <p:nvPr/>
+        </p:nvSpPr>
+        <p:spPr>
+          <a:xfrm>
+            <a:off x="3529584" y="3063240"/>
+            <a:ext cx="2286000" cy="914400"/>
+          </a:xfrm>
+          <a:prstGeom prst="rect">
+            <a:avLst/>
+          </a:prstGeom>
+          <a:noFill/>
+        </p:spPr>
+        <p:txBody>
+          <a:bodyPr wrap="square" anchor="t" lIns="25400" rIns="25400" tIns="25400" bIns="25400">
+            <a:spAutoFit/>
+          </a:bodyPr>
+          <a:lstStyle/>
+          <a:p>
+            <a:pPr algn="ctr">
+              <a:lnSpc>
+                <a:spcPct val="110000"/>
+              </a:lnSpc>
+            </a:pPr>
+            <a:r>
+              <a:rPr sz="1250" b="0">
+                <a:solidFill>
+                  <a:srgbClr val="1A1A1A"/>
+                </a:solidFill>
+                <a:latin typeface="맑은 고딕"/>
+                <a:ea typeface="맑은 고딕"/>
+                <a:cs typeface="맑은 고딕"/>
+              </a:rPr>
+              <a:t>평소처럼 안내문·통지문 작성.</a:t>
+            </a:r>
+          </a:p>
+          <a:p>
+            <a:pPr algn="ctr">
+              <a:lnSpc>
+                <a:spcPct val="110000"/>
+              </a:lnSpc>
+            </a:pPr>
+            <a:r>
+              <a:rPr sz="1250" b="0">
+                <a:solidFill>
+                  <a:srgbClr val="1A1A1A"/>
+                </a:solidFill>
+                <a:latin typeface="맑은 고딕"/>
+                <a:ea typeface="맑은 고딕"/>
+                <a:cs typeface="맑은 고딕"/>
+              </a:rPr>
+              <a:t>보호는 도구가 알아서 처리</a:t>
+            </a:r>
+          </a:p>
+        </p:txBody>
+      </p:sp>
+      <p:sp>
+        <p:nvSpPr>
+          <p:cNvPr id="18" name="Rounded Rectangle 17"/>
+          <p:cNvSpPr/>
+          <p:nvPr/>
+        </p:nvSpPr>
+        <p:spPr>
+          <a:xfrm>
+            <a:off x="6144768" y="1600200"/>
+            <a:ext cx="2651760" cy="2468880"/>
+          </a:xfrm>
+          <a:prstGeom prst="roundRect">
+            <a:avLst/>
+          </a:prstGeom>
+          <a:solidFill>
+            <a:srgbClr val="FFFFFF"/>
+          </a:solidFill>
+          <a:ln w="12700">
+            <a:solidFill>
+              <a:srgbClr val="DDDFE4"/>
+            </a:solidFill>
+          </a:ln>
+          <a:effectLst/>
+        </p:spPr>
+        <p:style>
+          <a:lnRef idx="1">
+            <a:schemeClr val="accent1"/>
+          </a:lnRef>
+          <a:fillRef idx="3">
+            <a:schemeClr val="accent1"/>
+          </a:fillRef>
+          <a:effectRef idx="2">
+            <a:schemeClr val="accent1"/>
+          </a:effectRef>
+          <a:fontRef idx="minor">
+            <a:schemeClr val="lt1"/>
+          </a:fontRef>
+        </p:style>
+        <p:txBody>
+          <a:bodyPr rtlCol="0" anchor="ctr"/>
+          <a:lstStyle/>
+          <a:p>
+            <a:pPr algn="ctr"/>
+          </a:p>
+        </p:txBody>
+      </p:sp>
+      <p:sp>
+        <p:nvSpPr>
+          <p:cNvPr id="19" name="Oval 18"/>
+          <p:cNvSpPr/>
+          <p:nvPr/>
+        </p:nvSpPr>
+        <p:spPr>
+          <a:xfrm>
+            <a:off x="7104888" y="1828800"/>
+            <a:ext cx="731520" cy="731520"/>
+          </a:xfrm>
+          <a:prstGeom prst="ellipse">
+            <a:avLst/>
+          </a:prstGeom>
+          <a:solidFill>
+            <a:srgbClr val="F4F5F7"/>
+          </a:solidFill>
+          <a:ln w="12700">
+            <a:solidFill>
+              <a:srgbClr val="DDDFE4"/>
+            </a:solidFill>
+          </a:ln>
+          <a:effectLst/>
+        </p:spPr>
+        <p:style>
+          <a:lnRef idx="1">
+            <a:schemeClr val="accent1"/>
+          </a:lnRef>
+          <a:fillRef idx="3">
+            <a:schemeClr val="accent1"/>
+          </a:fillRef>
+          <a:effectRef idx="2">
+            <a:schemeClr val="accent1"/>
+          </a:effectRef>
+          <a:fontRef idx="minor">
+            <a:schemeClr val="lt1"/>
+          </a:fontRef>
+        </p:style>
+        <p:txBody>
+          <a:bodyPr rtlCol="0" anchor="ctr" wrap="square" lIns="76200" rIns="76200" tIns="50800" bIns="50800"/>
+          <a:lstStyle/>
+          <a:p>
+            <a:pPr algn="ctr"/>
+            <a:r>
+              <a:rPr sz="2400" b="0">
+                <a:solidFill>
+                  <a:srgbClr val="1A1A1A"/>
+                </a:solidFill>
+                <a:latin typeface="맑은 고딕"/>
+                <a:ea typeface="맑은 고딕"/>
+                <a:cs typeface="맑은 고딕"/>
+              </a:rPr>
+              <a:t>🔑</a:t>
+            </a:r>
+          </a:p>
+        </p:txBody>
+      </p:sp>
+      <p:sp>
+        <p:nvSpPr>
+          <p:cNvPr id="20" name="TextBox 19"/>
+          <p:cNvSpPr txBox="1"/>
+          <p:nvPr/>
+        </p:nvSpPr>
+        <p:spPr>
+          <a:xfrm>
+            <a:off x="6144768" y="2651760"/>
+            <a:ext cx="2651760" cy="365760"/>
+          </a:xfrm>
+          <a:prstGeom prst="rect">
+            <a:avLst/>
+          </a:prstGeom>
+          <a:noFill/>
+        </p:spPr>
+        <p:txBody>
+          <a:bodyPr wrap="square" anchor="t" lIns="25400" rIns="25400" tIns="25400" bIns="25400">
+            <a:spAutoFit/>
+          </a:bodyPr>
+          <a:lstStyle/>
+          <a:p>
+            <a:pPr algn="ctr">
+              <a:lnSpc>
+                <a:spcPct val="100000"/>
+              </a:lnSpc>
+            </a:pPr>
+            <a:r>
+              <a:rPr sz="1800" b="1">
+                <a:solidFill>
+                  <a:srgbClr val="1A1A1A"/>
+                </a:solidFill>
+                <a:latin typeface="맑은 고딕"/>
+                <a:ea typeface="맑은 고딕"/>
+                <a:cs typeface="맑은 고딕"/>
+              </a:rPr>
+              <a:t>되돌림</a:t>
+            </a:r>
+          </a:p>
+        </p:txBody>
+      </p:sp>
+      <p:sp>
+        <p:nvSpPr>
+          <p:cNvPr id="21" name="TextBox 20"/>
+          <p:cNvSpPr txBox="1"/>
+          <p:nvPr/>
+        </p:nvSpPr>
+        <p:spPr>
+          <a:xfrm>
+            <a:off x="6327648" y="3063240"/>
+            <a:ext cx="2286000" cy="914400"/>
+          </a:xfrm>
+          <a:prstGeom prst="rect">
+            <a:avLst/>
+          </a:prstGeom>
+          <a:noFill/>
+        </p:spPr>
+        <p:txBody>
+          <a:bodyPr wrap="square" anchor="t" lIns="25400" rIns="25400" tIns="25400" bIns="25400">
+            <a:spAutoFit/>
+          </a:bodyPr>
+          <a:lstStyle/>
+          <a:p>
+            <a:pPr algn="ctr">
+              <a:lnSpc>
+                <a:spcPct val="110000"/>
+              </a:lnSpc>
+            </a:pPr>
+            <a:r>
+              <a:rPr sz="1250" b="0">
+                <a:solidFill>
+                  <a:srgbClr val="1A1A1A"/>
+                </a:solidFill>
+                <a:latin typeface="맑은 고딕"/>
+                <a:ea typeface="맑은 고딕"/>
+                <a:cs typeface="맑은 고딕"/>
+              </a:rPr>
+              <a:t>담당자 키로만 원복.</a:t>
+            </a:r>
+          </a:p>
+          <a:p>
+            <a:pPr algn="ctr">
+              <a:lnSpc>
+                <a:spcPct val="110000"/>
+              </a:lnSpc>
+            </a:pPr>
+            <a:r>
+              <a:rPr sz="1250" b="0">
+                <a:solidFill>
+                  <a:srgbClr val="1A1A1A"/>
+                </a:solidFill>
+                <a:latin typeface="맑은 고딕"/>
+                <a:ea typeface="맑은 고딕"/>
+                <a:cs typeface="맑은 고딕"/>
+              </a:rPr>
+              <a:t>키 없으면 복원 불가 = 접근통제</a:t>
+            </a:r>
+          </a:p>
+        </p:txBody>
+      </p:sp>
+      <p:sp>
+        <p:nvSpPr>
+          <p:cNvPr id="22" name="Rounded Rectangle 21"/>
+          <p:cNvSpPr/>
+          <p:nvPr/>
+        </p:nvSpPr>
+        <p:spPr>
+          <a:xfrm>
+            <a:off x="8942832" y="1600200"/>
+            <a:ext cx="2651760" cy="2468880"/>
+          </a:xfrm>
+          <a:prstGeom prst="roundRect">
+            <a:avLst/>
+          </a:prstGeom>
+          <a:solidFill>
+            <a:srgbClr val="FFFFFF"/>
+          </a:solidFill>
+          <a:ln w="12700">
+            <a:solidFill>
+              <a:srgbClr val="DDDFE4"/>
+            </a:solidFill>
+          </a:ln>
+          <a:effectLst/>
+        </p:spPr>
+        <p:style>
+          <a:lnRef idx="1">
+            <a:schemeClr val="accent1"/>
+          </a:lnRef>
+          <a:fillRef idx="3">
+            <a:schemeClr val="accent1"/>
+          </a:fillRef>
+          <a:effectRef idx="2">
+            <a:schemeClr val="accent1"/>
+          </a:effectRef>
+          <a:fontRef idx="minor">
+            <a:schemeClr val="lt1"/>
+          </a:fontRef>
+        </p:style>
+        <p:txBody>
+          <a:bodyPr rtlCol="0" anchor="ctr"/>
+          <a:lstStyle/>
+          <a:p>
+            <a:pPr algn="ctr"/>
+          </a:p>
+        </p:txBody>
+      </p:sp>
+      <p:sp>
+        <p:nvSpPr>
+          <p:cNvPr id="23" name="Oval 22"/>
+          <p:cNvSpPr/>
+          <p:nvPr/>
+        </p:nvSpPr>
+        <p:spPr>
+          <a:xfrm>
+            <a:off x="9902952" y="1828800"/>
+            <a:ext cx="731520" cy="731520"/>
+          </a:xfrm>
+          <a:prstGeom prst="ellipse">
+            <a:avLst/>
+          </a:prstGeom>
+          <a:solidFill>
+            <a:srgbClr val="F4F5F7"/>
+          </a:solidFill>
+          <a:ln w="12700">
+            <a:solidFill>
+              <a:srgbClr val="DDDFE4"/>
+            </a:solidFill>
+          </a:ln>
+          <a:effectLst/>
+        </p:spPr>
+        <p:style>
+          <a:lnRef idx="1">
+            <a:schemeClr val="accent1"/>
+          </a:lnRef>
+          <a:fillRef idx="3">
+            <a:schemeClr val="accent1"/>
+          </a:fillRef>
+          <a:effectRef idx="2">
+            <a:schemeClr val="accent1"/>
+          </a:effectRef>
+          <a:fontRef idx="minor">
+            <a:schemeClr val="lt1"/>
+          </a:fontRef>
+        </p:style>
+        <p:txBody>
+          <a:bodyPr rtlCol="0" anchor="ctr" wrap="square" lIns="76200" rIns="76200" tIns="50800" bIns="50800"/>
+          <a:lstStyle/>
+          <a:p>
+            <a:pPr algn="ctr"/>
+            <a:r>
+              <a:rPr sz="2400" b="0">
+                <a:solidFill>
+                  <a:srgbClr val="1A1A1A"/>
+                </a:solidFill>
+                <a:latin typeface="맑은 고딕"/>
+                <a:ea typeface="맑은 고딕"/>
+                <a:cs typeface="맑은 고딕"/>
+              </a:rPr>
+              <a:t>💸</a:t>
+            </a:r>
+          </a:p>
+        </p:txBody>
+      </p:sp>
+      <p:sp>
+        <p:nvSpPr>
+          <p:cNvPr id="24" name="TextBox 23"/>
+          <p:cNvSpPr txBox="1"/>
+          <p:nvPr/>
+        </p:nvSpPr>
+        <p:spPr>
+          <a:xfrm>
+            <a:off x="8942832" y="2651760"/>
+            <a:ext cx="2651760" cy="365760"/>
+          </a:xfrm>
+          <a:prstGeom prst="rect">
+            <a:avLst/>
+          </a:prstGeom>
+          <a:noFill/>
+        </p:spPr>
+        <p:txBody>
+          <a:bodyPr wrap="square" anchor="t" lIns="25400" rIns="25400" tIns="25400" bIns="25400">
+            <a:spAutoFit/>
+          </a:bodyPr>
+          <a:lstStyle/>
+          <a:p>
+            <a:pPr algn="ctr">
+              <a:lnSpc>
+                <a:spcPct val="100000"/>
+              </a:lnSpc>
+            </a:pPr>
+            <a:r>
+              <a:rPr sz="1800" b="1">
+                <a:solidFill>
+                  <a:srgbClr val="1A1A1A"/>
+                </a:solidFill>
+                <a:latin typeface="맑은 고딕"/>
+                <a:ea typeface="맑은 고딕"/>
+                <a:cs typeface="맑은 고딕"/>
+              </a:rPr>
+              <a:t>효율</a:t>
+            </a:r>
+          </a:p>
+        </p:txBody>
+      </p:sp>
+      <p:sp>
+        <p:nvSpPr>
+          <p:cNvPr id="25" name="TextBox 24"/>
+          <p:cNvSpPr txBox="1"/>
+          <p:nvPr/>
+        </p:nvSpPr>
+        <p:spPr>
+          <a:xfrm>
+            <a:off x="9125711" y="3063240"/>
+            <a:ext cx="2286000" cy="914400"/>
+          </a:xfrm>
+          <a:prstGeom prst="rect">
+            <a:avLst/>
+          </a:prstGeom>
+          <a:noFill/>
+        </p:spPr>
+        <p:txBody>
+          <a:bodyPr wrap="square" anchor="t" lIns="25400" rIns="25400" tIns="25400" bIns="25400">
+            <a:spAutoFit/>
+          </a:bodyPr>
+          <a:lstStyle/>
+          <a:p>
+            <a:pPr algn="ctr">
+              <a:lnSpc>
+                <a:spcPct val="110000"/>
+              </a:lnSpc>
+            </a:pPr>
+            <a:r>
+              <a:rPr sz="1250" b="0">
+                <a:solidFill>
+                  <a:srgbClr val="1A1A1A"/>
+                </a:solidFill>
+                <a:latin typeface="맑은 고딕"/>
+                <a:ea typeface="맑은 고딕"/>
+                <a:cs typeface="맑은 고딕"/>
+              </a:rPr>
+              <a:t>대규모에선 토큰도 더 적게 사용</a:t>
+            </a:r>
+          </a:p>
+          <a:p>
+            <a:pPr algn="ctr">
+              <a:lnSpc>
+                <a:spcPct val="110000"/>
+              </a:lnSpc>
+            </a:pPr>
+            <a:r>
+              <a:rPr sz="1250" b="0">
+                <a:solidFill>
+                  <a:srgbClr val="1A1A1A"/>
+                </a:solidFill>
+                <a:latin typeface="맑은 고딕"/>
+                <a:ea typeface="맑은 고딕"/>
+                <a:cs typeface="맑은 고딕"/>
+              </a:rPr>
+              <a:t>(원본 전체를 읽지 않으므로)</a:t>
+            </a:r>
+          </a:p>
+        </p:txBody>
+      </p:sp>
+      <p:sp>
+        <p:nvSpPr>
+          <p:cNvPr id="26" name="Rounded Rectangle 25"/>
+          <p:cNvSpPr/>
+          <p:nvPr/>
+        </p:nvSpPr>
+        <p:spPr>
+          <a:xfrm>
+            <a:off x="548640" y="4480560"/>
+            <a:ext cx="11091672" cy="1508760"/>
+          </a:xfrm>
+          <a:prstGeom prst="roundRect">
+            <a:avLst/>
+          </a:prstGeom>
+          <a:solidFill>
+            <a:srgbClr val="111111"/>
           </a:solidFill>
           <a:ln>
             <a:noFill/>
@@ -8162,795 +9655,37 @@
           <a:p>
             <a:pPr algn="ctr"/>
             <a:r>
-              <a:rPr sz="2400" b="0">
-                <a:solidFill>
-                  <a:srgbClr val="1428A0"/>
-                </a:solidFill>
-                <a:latin typeface="맑은 고딕"/>
-                <a:ea typeface="맑은 고딕"/>
-                <a:cs typeface="맑은 고딕"/>
-              </a:rPr>
-              <a:t>🛡</a:t>
-            </a:r>
-          </a:p>
-        </p:txBody>
-      </p:sp>
-      <p:sp>
-        <p:nvSpPr>
-          <p:cNvPr id="10" name="TextBox 9"/>
-          <p:cNvSpPr txBox="1"/>
-          <p:nvPr/>
-        </p:nvSpPr>
-        <p:spPr>
-          <a:xfrm>
-            <a:off x="548640" y="2606040"/>
-            <a:ext cx="2651760" cy="365760"/>
-          </a:xfrm>
-          <a:prstGeom prst="rect">
-            <a:avLst/>
-          </a:prstGeom>
-          <a:noFill/>
-        </p:spPr>
-        <p:txBody>
-          <a:bodyPr wrap="square" anchor="t" lIns="25400" rIns="25400" tIns="25400" bIns="25400">
-            <a:spAutoFit/>
-          </a:bodyPr>
-          <a:lstStyle/>
-          <a:p>
-            <a:pPr algn="ctr">
-              <a:lnSpc>
-                <a:spcPct val="100000"/>
-              </a:lnSpc>
-            </a:pPr>
-            <a:r>
-              <a:rPr sz="1800" b="1">
-                <a:solidFill>
-                  <a:srgbClr val="0B145A"/>
-                </a:solidFill>
-                <a:latin typeface="맑은 고딕"/>
-                <a:ea typeface="맑은 고딕"/>
-                <a:cs typeface="맑은 고딕"/>
-              </a:rPr>
-              <a:t>안전</a:t>
-            </a:r>
-          </a:p>
-        </p:txBody>
-      </p:sp>
-      <p:sp>
-        <p:nvSpPr>
-          <p:cNvPr id="11" name="TextBox 10"/>
-          <p:cNvSpPr txBox="1"/>
-          <p:nvPr/>
-        </p:nvSpPr>
-        <p:spPr>
-          <a:xfrm>
-            <a:off x="731520" y="3017520"/>
-            <a:ext cx="2286000" cy="914400"/>
-          </a:xfrm>
-          <a:prstGeom prst="rect">
-            <a:avLst/>
-          </a:prstGeom>
-          <a:noFill/>
-        </p:spPr>
-        <p:txBody>
-          <a:bodyPr wrap="square" anchor="t" lIns="25400" rIns="25400" tIns="25400" bIns="25400">
-            <a:spAutoFit/>
-          </a:bodyPr>
-          <a:lstStyle/>
-          <a:p>
-            <a:pPr algn="ctr">
-              <a:lnSpc>
-                <a:spcPct val="110000"/>
-              </a:lnSpc>
-            </a:pPr>
-            <a:r>
-              <a:rPr sz="1250" b="0">
-                <a:solidFill>
-                  <a:srgbClr val="222222"/>
-                </a:solidFill>
-                <a:latin typeface="맑은 고딕"/>
-                <a:ea typeface="맑은 고딕"/>
-                <a:cs typeface="맑은 고딕"/>
-              </a:rPr>
-              <a:t>민감정보가 AI에 0건 노출.</a:t>
-            </a:r>
-          </a:p>
-          <a:p>
-            <a:pPr algn="ctr">
-              <a:lnSpc>
-                <a:spcPct val="110000"/>
-              </a:lnSpc>
-            </a:pPr>
-            <a:r>
-              <a:rPr sz="1250" b="0">
-                <a:solidFill>
-                  <a:srgbClr val="222222"/>
-                </a:solidFill>
-                <a:latin typeface="맑은 고딕"/>
-                <a:ea typeface="맑은 고딕"/>
-                <a:cs typeface="맑은 고딕"/>
-              </a:rPr>
-              <a:t>유출 리스크를 원천 차단</a:t>
-            </a:r>
-          </a:p>
-        </p:txBody>
-      </p:sp>
-      <p:sp>
-        <p:nvSpPr>
-          <p:cNvPr id="12" name="Rounded Rectangle 11"/>
-          <p:cNvSpPr/>
-          <p:nvPr/>
-        </p:nvSpPr>
-        <p:spPr>
-          <a:xfrm>
-            <a:off x="3346704" y="1554480"/>
-            <a:ext cx="2651760" cy="2468880"/>
-          </a:xfrm>
-          <a:prstGeom prst="roundRect">
-            <a:avLst/>
-          </a:prstGeom>
-          <a:solidFill>
-            <a:srgbClr val="FFFFFF"/>
-          </a:solidFill>
-          <a:ln w="12700">
-            <a:solidFill>
-              <a:srgbClr val="E2E6F0"/>
-            </a:solidFill>
-          </a:ln>
-          <a:effectLst/>
-        </p:spPr>
-        <p:style>
-          <a:lnRef idx="1">
-            <a:schemeClr val="accent1"/>
-          </a:lnRef>
-          <a:fillRef idx="3">
-            <a:schemeClr val="accent1"/>
-          </a:fillRef>
-          <a:effectRef idx="2">
-            <a:schemeClr val="accent1"/>
-          </a:effectRef>
-          <a:fontRef idx="minor">
-            <a:schemeClr val="lt1"/>
-          </a:fontRef>
-        </p:style>
-        <p:txBody>
-          <a:bodyPr rtlCol="0" anchor="ctr"/>
-          <a:lstStyle/>
+              <a:rPr sz="1400" b="1">
+                <a:solidFill>
+                  <a:srgbClr val="B9C4EA"/>
+                </a:solidFill>
+                <a:latin typeface="맑은 고딕"/>
+                <a:ea typeface="맑은 고딕"/>
+                <a:cs typeface="맑은 고딕"/>
+              </a:rPr>
+              <a:t>검증 결과 (동일 과제 비교)</a:t>
+            </a:r>
+          </a:p>
           <a:p>
             <a:pPr algn="ctr"/>
-          </a:p>
-        </p:txBody>
-      </p:sp>
-      <p:sp>
-        <p:nvSpPr>
-          <p:cNvPr id="13" name="Oval 12"/>
-          <p:cNvSpPr/>
-          <p:nvPr/>
-        </p:nvSpPr>
-        <p:spPr>
-          <a:xfrm>
-            <a:off x="4306824" y="1783080"/>
-            <a:ext cx="731520" cy="731520"/>
-          </a:xfrm>
-          <a:prstGeom prst="ellipse">
-            <a:avLst/>
-          </a:prstGeom>
-          <a:solidFill>
-            <a:srgbClr val="E8EDFB"/>
-          </a:solidFill>
-          <a:ln>
-            <a:noFill/>
-          </a:ln>
-          <a:effectLst/>
-        </p:spPr>
-        <p:style>
-          <a:lnRef idx="1">
-            <a:schemeClr val="accent1"/>
-          </a:lnRef>
-          <a:fillRef idx="3">
-            <a:schemeClr val="accent1"/>
-          </a:fillRef>
-          <a:effectRef idx="2">
-            <a:schemeClr val="accent1"/>
-          </a:effectRef>
-          <a:fontRef idx="minor">
-            <a:schemeClr val="lt1"/>
-          </a:fontRef>
-        </p:style>
-        <p:txBody>
-          <a:bodyPr rtlCol="0" anchor="ctr" wrap="square" lIns="76200" rIns="76200" tIns="50800" bIns="50800"/>
-          <a:lstStyle/>
+            <a:r>
+              <a:rPr sz="2200" b="1">
+                <a:solidFill>
+                  <a:srgbClr val="FFFFFF"/>
+                </a:solidFill>
+                <a:latin typeface="맑은 고딕"/>
+                <a:ea typeface="맑은 고딕"/>
+                <a:cs typeface="맑은 고딕"/>
+              </a:rPr>
+              <a:t>게이트웨이 사용 100%  vs  미사용 62.5%</a:t>
+            </a:r>
+          </a:p>
           <a:p>
             <a:pPr algn="ctr"/>
             <a:r>
-              <a:rPr sz="2400" b="0">
-                <a:solidFill>
-                  <a:srgbClr val="1428A0"/>
-                </a:solidFill>
-                <a:latin typeface="맑은 고딕"/>
-                <a:ea typeface="맑은 고딕"/>
-                <a:cs typeface="맑은 고딕"/>
-              </a:rPr>
-              <a:t>⚡</a:t>
-            </a:r>
-          </a:p>
-        </p:txBody>
-      </p:sp>
-      <p:sp>
-        <p:nvSpPr>
-          <p:cNvPr id="14" name="TextBox 13"/>
-          <p:cNvSpPr txBox="1"/>
-          <p:nvPr/>
-        </p:nvSpPr>
-        <p:spPr>
-          <a:xfrm>
-            <a:off x="3346704" y="2606040"/>
-            <a:ext cx="2651760" cy="365760"/>
-          </a:xfrm>
-          <a:prstGeom prst="rect">
-            <a:avLst/>
-          </a:prstGeom>
-          <a:noFill/>
-        </p:spPr>
-        <p:txBody>
-          <a:bodyPr wrap="square" anchor="t" lIns="25400" rIns="25400" tIns="25400" bIns="25400">
-            <a:spAutoFit/>
-          </a:bodyPr>
-          <a:lstStyle/>
-          <a:p>
-            <a:pPr algn="ctr">
-              <a:lnSpc>
-                <a:spcPct val="100000"/>
-              </a:lnSpc>
-            </a:pPr>
-            <a:r>
-              <a:rPr sz="1800" b="1">
-                <a:solidFill>
-                  <a:srgbClr val="0B145A"/>
-                </a:solidFill>
-                <a:latin typeface="맑은 고딕"/>
-                <a:ea typeface="맑은 고딕"/>
-                <a:cs typeface="맑은 고딕"/>
-              </a:rPr>
-              <a:t>간편</a:t>
-            </a:r>
-          </a:p>
-        </p:txBody>
-      </p:sp>
-      <p:sp>
-        <p:nvSpPr>
-          <p:cNvPr id="15" name="TextBox 14"/>
-          <p:cNvSpPr txBox="1"/>
-          <p:nvPr/>
-        </p:nvSpPr>
-        <p:spPr>
-          <a:xfrm>
-            <a:off x="3529584" y="3017520"/>
-            <a:ext cx="2286000" cy="914400"/>
-          </a:xfrm>
-          <a:prstGeom prst="rect">
-            <a:avLst/>
-          </a:prstGeom>
-          <a:noFill/>
-        </p:spPr>
-        <p:txBody>
-          <a:bodyPr wrap="square" anchor="t" lIns="25400" rIns="25400" tIns="25400" bIns="25400">
-            <a:spAutoFit/>
-          </a:bodyPr>
-          <a:lstStyle/>
-          <a:p>
-            <a:pPr algn="ctr">
-              <a:lnSpc>
-                <a:spcPct val="110000"/>
-              </a:lnSpc>
-            </a:pPr>
-            <a:r>
-              <a:rPr sz="1250" b="0">
-                <a:solidFill>
-                  <a:srgbClr val="222222"/>
-                </a:solidFill>
-                <a:latin typeface="맑은 고딕"/>
-                <a:ea typeface="맑은 고딕"/>
-                <a:cs typeface="맑은 고딕"/>
-              </a:rPr>
-              <a:t>평소처럼 안내문·통지문 작성.</a:t>
-            </a:r>
-          </a:p>
-          <a:p>
-            <a:pPr algn="ctr">
-              <a:lnSpc>
-                <a:spcPct val="110000"/>
-              </a:lnSpc>
-            </a:pPr>
-            <a:r>
-              <a:rPr sz="1250" b="0">
-                <a:solidFill>
-                  <a:srgbClr val="222222"/>
-                </a:solidFill>
-                <a:latin typeface="맑은 고딕"/>
-                <a:ea typeface="맑은 고딕"/>
-                <a:cs typeface="맑은 고딕"/>
-              </a:rPr>
-              <a:t>보호는 도구가 알아서 처리</a:t>
-            </a:r>
-          </a:p>
-        </p:txBody>
-      </p:sp>
-      <p:sp>
-        <p:nvSpPr>
-          <p:cNvPr id="16" name="Rounded Rectangle 15"/>
-          <p:cNvSpPr/>
-          <p:nvPr/>
-        </p:nvSpPr>
-        <p:spPr>
-          <a:xfrm>
-            <a:off x="6144768" y="1554480"/>
-            <a:ext cx="2651760" cy="2468880"/>
-          </a:xfrm>
-          <a:prstGeom prst="roundRect">
-            <a:avLst/>
-          </a:prstGeom>
-          <a:solidFill>
-            <a:srgbClr val="FFFFFF"/>
-          </a:solidFill>
-          <a:ln w="12700">
-            <a:solidFill>
-              <a:srgbClr val="E2E6F0"/>
-            </a:solidFill>
-          </a:ln>
-          <a:effectLst/>
-        </p:spPr>
-        <p:style>
-          <a:lnRef idx="1">
-            <a:schemeClr val="accent1"/>
-          </a:lnRef>
-          <a:fillRef idx="3">
-            <a:schemeClr val="accent1"/>
-          </a:fillRef>
-          <a:effectRef idx="2">
-            <a:schemeClr val="accent1"/>
-          </a:effectRef>
-          <a:fontRef idx="minor">
-            <a:schemeClr val="lt1"/>
-          </a:fontRef>
-        </p:style>
-        <p:txBody>
-          <a:bodyPr rtlCol="0" anchor="ctr"/>
-          <a:lstStyle/>
-          <a:p>
-            <a:pPr algn="ctr"/>
-          </a:p>
-        </p:txBody>
-      </p:sp>
-      <p:sp>
-        <p:nvSpPr>
-          <p:cNvPr id="17" name="Oval 16"/>
-          <p:cNvSpPr/>
-          <p:nvPr/>
-        </p:nvSpPr>
-        <p:spPr>
-          <a:xfrm>
-            <a:off x="7104888" y="1783080"/>
-            <a:ext cx="731520" cy="731520"/>
-          </a:xfrm>
-          <a:prstGeom prst="ellipse">
-            <a:avLst/>
-          </a:prstGeom>
-          <a:solidFill>
-            <a:srgbClr val="E8EDFB"/>
-          </a:solidFill>
-          <a:ln>
-            <a:noFill/>
-          </a:ln>
-          <a:effectLst/>
-        </p:spPr>
-        <p:style>
-          <a:lnRef idx="1">
-            <a:schemeClr val="accent1"/>
-          </a:lnRef>
-          <a:fillRef idx="3">
-            <a:schemeClr val="accent1"/>
-          </a:fillRef>
-          <a:effectRef idx="2">
-            <a:schemeClr val="accent1"/>
-          </a:effectRef>
-          <a:fontRef idx="minor">
-            <a:schemeClr val="lt1"/>
-          </a:fontRef>
-        </p:style>
-        <p:txBody>
-          <a:bodyPr rtlCol="0" anchor="ctr" wrap="square" lIns="76200" rIns="76200" tIns="50800" bIns="50800"/>
-          <a:lstStyle/>
-          <a:p>
-            <a:pPr algn="ctr"/>
-            <a:r>
-              <a:rPr sz="2400" b="0">
-                <a:solidFill>
-                  <a:srgbClr val="1428A0"/>
-                </a:solidFill>
-                <a:latin typeface="맑은 고딕"/>
-                <a:ea typeface="맑은 고딕"/>
-                <a:cs typeface="맑은 고딕"/>
-              </a:rPr>
-              <a:t>🔑</a:t>
-            </a:r>
-          </a:p>
-        </p:txBody>
-      </p:sp>
-      <p:sp>
-        <p:nvSpPr>
-          <p:cNvPr id="18" name="TextBox 17"/>
-          <p:cNvSpPr txBox="1"/>
-          <p:nvPr/>
-        </p:nvSpPr>
-        <p:spPr>
-          <a:xfrm>
-            <a:off x="6144768" y="2606040"/>
-            <a:ext cx="2651760" cy="365760"/>
-          </a:xfrm>
-          <a:prstGeom prst="rect">
-            <a:avLst/>
-          </a:prstGeom>
-          <a:noFill/>
-        </p:spPr>
-        <p:txBody>
-          <a:bodyPr wrap="square" anchor="t" lIns="25400" rIns="25400" tIns="25400" bIns="25400">
-            <a:spAutoFit/>
-          </a:bodyPr>
-          <a:lstStyle/>
-          <a:p>
-            <a:pPr algn="ctr">
-              <a:lnSpc>
-                <a:spcPct val="100000"/>
-              </a:lnSpc>
-            </a:pPr>
-            <a:r>
-              <a:rPr sz="1800" b="1">
-                <a:solidFill>
-                  <a:srgbClr val="0B145A"/>
-                </a:solidFill>
-                <a:latin typeface="맑은 고딕"/>
-                <a:ea typeface="맑은 고딕"/>
-                <a:cs typeface="맑은 고딕"/>
-              </a:rPr>
-              <a:t>되돌림</a:t>
-            </a:r>
-          </a:p>
-        </p:txBody>
-      </p:sp>
-      <p:sp>
-        <p:nvSpPr>
-          <p:cNvPr id="19" name="TextBox 18"/>
-          <p:cNvSpPr txBox="1"/>
-          <p:nvPr/>
-        </p:nvSpPr>
-        <p:spPr>
-          <a:xfrm>
-            <a:off x="6327648" y="3017520"/>
-            <a:ext cx="2286000" cy="914400"/>
-          </a:xfrm>
-          <a:prstGeom prst="rect">
-            <a:avLst/>
-          </a:prstGeom>
-          <a:noFill/>
-        </p:spPr>
-        <p:txBody>
-          <a:bodyPr wrap="square" anchor="t" lIns="25400" rIns="25400" tIns="25400" bIns="25400">
-            <a:spAutoFit/>
-          </a:bodyPr>
-          <a:lstStyle/>
-          <a:p>
-            <a:pPr algn="ctr">
-              <a:lnSpc>
-                <a:spcPct val="110000"/>
-              </a:lnSpc>
-            </a:pPr>
-            <a:r>
-              <a:rPr sz="1250" b="0">
-                <a:solidFill>
-                  <a:srgbClr val="222222"/>
-                </a:solidFill>
-                <a:latin typeface="맑은 고딕"/>
-                <a:ea typeface="맑은 고딕"/>
-                <a:cs typeface="맑은 고딕"/>
-              </a:rPr>
-              <a:t>담당자 키로만 원복.</a:t>
-            </a:r>
-          </a:p>
-          <a:p>
-            <a:pPr algn="ctr">
-              <a:lnSpc>
-                <a:spcPct val="110000"/>
-              </a:lnSpc>
-            </a:pPr>
-            <a:r>
-              <a:rPr sz="1250" b="0">
-                <a:solidFill>
-                  <a:srgbClr val="222222"/>
-                </a:solidFill>
-                <a:latin typeface="맑은 고딕"/>
-                <a:ea typeface="맑은 고딕"/>
-                <a:cs typeface="맑은 고딕"/>
-              </a:rPr>
-              <a:t>키 없으면 복원 불가 = 접근통제</a:t>
-            </a:r>
-          </a:p>
-        </p:txBody>
-      </p:sp>
-      <p:sp>
-        <p:nvSpPr>
-          <p:cNvPr id="20" name="Rounded Rectangle 19"/>
-          <p:cNvSpPr/>
-          <p:nvPr/>
-        </p:nvSpPr>
-        <p:spPr>
-          <a:xfrm>
-            <a:off x="8942832" y="1554480"/>
-            <a:ext cx="2651760" cy="2468880"/>
-          </a:xfrm>
-          <a:prstGeom prst="roundRect">
-            <a:avLst/>
-          </a:prstGeom>
-          <a:solidFill>
-            <a:srgbClr val="FFFFFF"/>
-          </a:solidFill>
-          <a:ln w="12700">
-            <a:solidFill>
-              <a:srgbClr val="E2E6F0"/>
-            </a:solidFill>
-          </a:ln>
-          <a:effectLst/>
-        </p:spPr>
-        <p:style>
-          <a:lnRef idx="1">
-            <a:schemeClr val="accent1"/>
-          </a:lnRef>
-          <a:fillRef idx="3">
-            <a:schemeClr val="accent1"/>
-          </a:fillRef>
-          <a:effectRef idx="2">
-            <a:schemeClr val="accent1"/>
-          </a:effectRef>
-          <a:fontRef idx="minor">
-            <a:schemeClr val="lt1"/>
-          </a:fontRef>
-        </p:style>
-        <p:txBody>
-          <a:bodyPr rtlCol="0" anchor="ctr"/>
-          <a:lstStyle/>
-          <a:p>
-            <a:pPr algn="ctr"/>
-          </a:p>
-        </p:txBody>
-      </p:sp>
-      <p:sp>
-        <p:nvSpPr>
-          <p:cNvPr id="21" name="Oval 20"/>
-          <p:cNvSpPr/>
-          <p:nvPr/>
-        </p:nvSpPr>
-        <p:spPr>
-          <a:xfrm>
-            <a:off x="9902952" y="1783080"/>
-            <a:ext cx="731520" cy="731520"/>
-          </a:xfrm>
-          <a:prstGeom prst="ellipse">
-            <a:avLst/>
-          </a:prstGeom>
-          <a:solidFill>
-            <a:srgbClr val="E8EDFB"/>
-          </a:solidFill>
-          <a:ln>
-            <a:noFill/>
-          </a:ln>
-          <a:effectLst/>
-        </p:spPr>
-        <p:style>
-          <a:lnRef idx="1">
-            <a:schemeClr val="accent1"/>
-          </a:lnRef>
-          <a:fillRef idx="3">
-            <a:schemeClr val="accent1"/>
-          </a:fillRef>
-          <a:effectRef idx="2">
-            <a:schemeClr val="accent1"/>
-          </a:effectRef>
-          <a:fontRef idx="minor">
-            <a:schemeClr val="lt1"/>
-          </a:fontRef>
-        </p:style>
-        <p:txBody>
-          <a:bodyPr rtlCol="0" anchor="ctr" wrap="square" lIns="76200" rIns="76200" tIns="50800" bIns="50800"/>
-          <a:lstStyle/>
-          <a:p>
-            <a:pPr algn="ctr"/>
-            <a:r>
-              <a:rPr sz="2400" b="0">
-                <a:solidFill>
-                  <a:srgbClr val="1428A0"/>
-                </a:solidFill>
-                <a:latin typeface="맑은 고딕"/>
-                <a:ea typeface="맑은 고딕"/>
-                <a:cs typeface="맑은 고딕"/>
-              </a:rPr>
-              <a:t>💸</a:t>
-            </a:r>
-          </a:p>
-        </p:txBody>
-      </p:sp>
-      <p:sp>
-        <p:nvSpPr>
-          <p:cNvPr id="22" name="TextBox 21"/>
-          <p:cNvSpPr txBox="1"/>
-          <p:nvPr/>
-        </p:nvSpPr>
-        <p:spPr>
-          <a:xfrm>
-            <a:off x="8942832" y="2606040"/>
-            <a:ext cx="2651760" cy="365760"/>
-          </a:xfrm>
-          <a:prstGeom prst="rect">
-            <a:avLst/>
-          </a:prstGeom>
-          <a:noFill/>
-        </p:spPr>
-        <p:txBody>
-          <a:bodyPr wrap="square" anchor="t" lIns="25400" rIns="25400" tIns="25400" bIns="25400">
-            <a:spAutoFit/>
-          </a:bodyPr>
-          <a:lstStyle/>
-          <a:p>
-            <a:pPr algn="ctr">
-              <a:lnSpc>
-                <a:spcPct val="100000"/>
-              </a:lnSpc>
-            </a:pPr>
-            <a:r>
-              <a:rPr sz="1800" b="1">
-                <a:solidFill>
-                  <a:srgbClr val="0B145A"/>
-                </a:solidFill>
-                <a:latin typeface="맑은 고딕"/>
-                <a:ea typeface="맑은 고딕"/>
-                <a:cs typeface="맑은 고딕"/>
-              </a:rPr>
-              <a:t>효율</a:t>
-            </a:r>
-          </a:p>
-        </p:txBody>
-      </p:sp>
-      <p:sp>
-        <p:nvSpPr>
-          <p:cNvPr id="23" name="TextBox 22"/>
-          <p:cNvSpPr txBox="1"/>
-          <p:nvPr/>
-        </p:nvSpPr>
-        <p:spPr>
-          <a:xfrm>
-            <a:off x="9125711" y="3017520"/>
-            <a:ext cx="2286000" cy="914400"/>
-          </a:xfrm>
-          <a:prstGeom prst="rect">
-            <a:avLst/>
-          </a:prstGeom>
-          <a:noFill/>
-        </p:spPr>
-        <p:txBody>
-          <a:bodyPr wrap="square" anchor="t" lIns="25400" rIns="25400" tIns="25400" bIns="25400">
-            <a:spAutoFit/>
-          </a:bodyPr>
-          <a:lstStyle/>
-          <a:p>
-            <a:pPr algn="ctr">
-              <a:lnSpc>
-                <a:spcPct val="110000"/>
-              </a:lnSpc>
-            </a:pPr>
-            <a:r>
-              <a:rPr sz="1250" b="0">
-                <a:solidFill>
-                  <a:srgbClr val="222222"/>
-                </a:solidFill>
-                <a:latin typeface="맑은 고딕"/>
-                <a:ea typeface="맑은 고딕"/>
-                <a:cs typeface="맑은 고딕"/>
-              </a:rPr>
-              <a:t>대규모에선 토큰도 더 적게 사용</a:t>
-            </a:r>
-          </a:p>
-          <a:p>
-            <a:pPr algn="ctr">
-              <a:lnSpc>
-                <a:spcPct val="110000"/>
-              </a:lnSpc>
-            </a:pPr>
-            <a:r>
-              <a:rPr sz="1250" b="0">
-                <a:solidFill>
-                  <a:srgbClr val="222222"/>
-                </a:solidFill>
-                <a:latin typeface="맑은 고딕"/>
-                <a:ea typeface="맑은 고딕"/>
-                <a:cs typeface="맑은 고딕"/>
-              </a:rPr>
-              <a:t>(원본 전체를 읽지 않으므로)</a:t>
-            </a:r>
-          </a:p>
-        </p:txBody>
-      </p:sp>
-      <p:sp>
-        <p:nvSpPr>
-          <p:cNvPr id="24" name="Rounded Rectangle 23"/>
-          <p:cNvSpPr/>
-          <p:nvPr/>
-        </p:nvSpPr>
-        <p:spPr>
-          <a:xfrm>
-            <a:off x="548640" y="4434840"/>
-            <a:ext cx="11091672" cy="1508760"/>
-          </a:xfrm>
-          <a:prstGeom prst="roundRect">
-            <a:avLst/>
-          </a:prstGeom>
-          <a:solidFill>
-            <a:srgbClr val="1428A0"/>
-          </a:solidFill>
-          <a:ln>
-            <a:noFill/>
-          </a:ln>
-          <a:effectLst/>
-        </p:spPr>
-        <p:style>
-          <a:lnRef idx="1">
-            <a:schemeClr val="accent1"/>
-          </a:lnRef>
-          <a:fillRef idx="3">
-            <a:schemeClr val="accent1"/>
-          </a:fillRef>
-          <a:effectRef idx="2">
-            <a:schemeClr val="accent1"/>
-          </a:effectRef>
-          <a:fontRef idx="minor">
-            <a:schemeClr val="lt1"/>
-          </a:fontRef>
-        </p:style>
-        <p:txBody>
-          <a:bodyPr rtlCol="0" anchor="ctr" wrap="square" lIns="76200" rIns="76200" tIns="50800" bIns="50800"/>
-          <a:lstStyle/>
-          <a:p>
-            <a:pPr algn="ctr"/>
-            <a:r>
-              <a:rPr sz="1400" b="1">
-                <a:solidFill>
-                  <a:srgbClr val="C8D3F5"/>
-                </a:solidFill>
-                <a:latin typeface="맑은 고딕"/>
-                <a:ea typeface="맑은 고딕"/>
-                <a:cs typeface="맑은 고딕"/>
-              </a:rPr>
-              <a:t>검증 결과 (동일 과제 비교)</a:t>
-            </a:r>
-          </a:p>
-          <a:p>
-            <a:pPr algn="ctr"/>
-            <a:r>
-              <a:rPr sz="2200" b="1">
-                <a:solidFill>
-                  <a:srgbClr val="FFFFFF"/>
-                </a:solidFill>
-                <a:latin typeface="맑은 고딕"/>
-                <a:ea typeface="맑은 고딕"/>
-                <a:cs typeface="맑은 고딕"/>
-              </a:rPr>
-              <a:t>게이트웨이 사용 100%  vs  미사용 62.5%</a:t>
-            </a:r>
-          </a:p>
-          <a:p>
-            <a:pPr algn="ctr"/>
-            <a:r>
               <a:rPr sz="1300" b="0">
                 <a:solidFill>
-                  <a:srgbClr val="D7DEF7"/>
+                  <a:srgbClr val="D3D6DD"/>
                 </a:solidFill>
                 <a:latin typeface="맑은 고딕"/>
                 <a:ea typeface="맑은 고딕"/>
@@ -8988,7 +9723,7 @@
         <p:spPr>
           <a:xfrm>
             <a:off x="0" y="0"/>
-            <a:ext cx="12191695" cy="1051560"/>
+            <a:ext cx="12191695" cy="6858000"/>
           </a:xfrm>
           <a:prstGeom prst="rect">
             <a:avLst/>
@@ -9031,8 +9766,52 @@
         </p:nvSpPr>
         <p:spPr>
           <a:xfrm>
-            <a:off x="0" y="1051560"/>
-            <a:ext cx="12191695" cy="41148"/>
+            <a:off x="0" y="0"/>
+            <a:ext cx="12191695" cy="1097280"/>
+          </a:xfrm>
+          <a:prstGeom prst="rect">
+            <a:avLst/>
+          </a:prstGeom>
+          <a:solidFill>
+            <a:srgbClr val="111111"/>
+          </a:solidFill>
+          <a:ln>
+            <a:noFill/>
+          </a:ln>
+          <a:effectLst/>
+        </p:spPr>
+        <p:style>
+          <a:lnRef idx="1">
+            <a:schemeClr val="accent1"/>
+          </a:lnRef>
+          <a:fillRef idx="3">
+            <a:schemeClr val="accent1"/>
+          </a:fillRef>
+          <a:effectRef idx="2">
+            <a:schemeClr val="accent1"/>
+          </a:effectRef>
+          <a:fontRef idx="minor">
+            <a:schemeClr val="lt1"/>
+          </a:fontRef>
+        </p:style>
+        <p:txBody>
+          <a:bodyPr rtlCol="0" anchor="ctr"/>
+          <a:lstStyle/>
+          <a:p>
+            <a:pPr algn="ctr"/>
+          </a:p>
+        </p:txBody>
+      </p:sp>
+      <p:sp>
+        <p:nvSpPr>
+          <p:cNvPr id="4" name="Rectangle 3"/>
+          <p:cNvSpPr/>
+          <p:nvPr/>
+        </p:nvSpPr>
+        <p:spPr>
+          <a:xfrm>
+            <a:off x="0" y="1097280"/>
+            <a:ext cx="12191695" cy="45720"/>
           </a:xfrm>
           <a:prstGeom prst="rect">
             <a:avLst/>
@@ -9069,13 +9848,13 @@
       </p:sp>
       <p:sp>
         <p:nvSpPr>
-          <p:cNvPr id="4" name="TextBox 3"/>
+          <p:cNvPr id="5" name="TextBox 4"/>
           <p:cNvSpPr txBox="1"/>
           <p:nvPr/>
         </p:nvSpPr>
         <p:spPr>
           <a:xfrm>
-            <a:off x="548640" y="164592"/>
+            <a:off x="548640" y="182880"/>
             <a:ext cx="10058400" cy="274320"/>
           </a:xfrm>
           <a:prstGeom prst="rect">
@@ -9097,7 +9876,7 @@
             <a:r>
               <a:rPr sz="1200" b="1">
                 <a:solidFill>
-                  <a:srgbClr val="3E5CD0"/>
+                  <a:srgbClr val="B9C4EA"/>
                 </a:solidFill>
                 <a:latin typeface="맑은 고딕"/>
                 <a:ea typeface="맑은 고딕"/>
@@ -9110,14 +9889,14 @@
       </p:sp>
       <p:sp>
         <p:nvSpPr>
-          <p:cNvPr id="5" name="TextBox 4"/>
+          <p:cNvPr id="6" name="TextBox 5"/>
           <p:cNvSpPr txBox="1"/>
           <p:nvPr/>
         </p:nvSpPr>
         <p:spPr>
           <a:xfrm>
-            <a:off x="548640" y="384048"/>
-            <a:ext cx="10972800" cy="640080"/>
+            <a:off x="548640" y="420624"/>
+            <a:ext cx="10972800" cy="603504"/>
           </a:xfrm>
           <a:prstGeom prst="rect">
             <a:avLst/>
@@ -9138,7 +9917,7 @@
             <a:r>
               <a:rPr sz="2600" b="1">
                 <a:solidFill>
-                  <a:srgbClr val="0B145A"/>
+                  <a:srgbClr val="FFFFFF"/>
                 </a:solidFill>
                 <a:latin typeface="맑은 고딕"/>
                 <a:ea typeface="맑은 고딕"/>
@@ -9151,13 +9930,65 @@
       </p:sp>
       <p:sp>
         <p:nvSpPr>
-          <p:cNvPr id="6" name="TextBox 5"/>
+          <p:cNvPr id="7" name="TextBox 6"/>
           <p:cNvSpPr txBox="1"/>
           <p:nvPr/>
         </p:nvSpPr>
         <p:spPr>
           <a:xfrm>
-            <a:off x="548640" y="6455664"/>
+            <a:off x="8229600" y="182880"/>
+            <a:ext cx="3410712" cy="274320"/>
+          </a:xfrm>
+          <a:prstGeom prst="rect">
+            <a:avLst/>
+          </a:prstGeom>
+          <a:noFill/>
+        </p:spPr>
+        <p:txBody>
+          <a:bodyPr wrap="square" anchor="t" lIns="25400" rIns="25400" tIns="25400" bIns="25400">
+            <a:spAutoFit/>
+          </a:bodyPr>
+          <a:lstStyle/>
+          <a:p>
+            <a:pPr algn="r">
+              <a:lnSpc>
+                <a:spcPct val="100000"/>
+              </a:lnSpc>
+            </a:pPr>
+            <a:r>
+              <a:rPr sz="1100" b="1">
+                <a:solidFill>
+                  <a:srgbClr val="FFFFFF"/>
+                </a:solidFill>
+                <a:latin typeface="맑은 고딕"/>
+                <a:ea typeface="맑은 고딕"/>
+                <a:cs typeface="맑은 고딕"/>
+              </a:rPr>
+              <a:t>SAMSUNG </a:t>
+            </a:r>
+            <a:r>
+              <a:rPr sz="1100" b="1">
+                <a:solidFill>
+                  <a:srgbClr val="B9C4EA"/>
+                </a:solidFill>
+                <a:latin typeface="맑은 고딕"/>
+                <a:ea typeface="맑은 고딕"/>
+                <a:cs typeface="맑은 고딕"/>
+              </a:rPr>
+              <a:t>DS</a:t>
+            </a:r>
+          </a:p>
+        </p:txBody>
+      </p:sp>
+      <p:sp>
+        <p:nvSpPr>
+          <p:cNvPr id="8" name="TextBox 7"/>
+          <p:cNvSpPr txBox="1"/>
+          <p:nvPr/>
+        </p:nvSpPr>
+        <p:spPr>
+          <a:xfrm>
+            <a:off x="548640" y="6473952"/>
             <a:ext cx="6400800" cy="274320"/>
           </a:xfrm>
           <a:prstGeom prst="rect">
@@ -9179,7 +10010,7 @@
             <a:r>
               <a:rPr sz="900" b="0">
                 <a:solidFill>
-                  <a:srgbClr val="6B7280"/>
+                  <a:srgbClr val="70747C"/>
                 </a:solidFill>
                 <a:latin typeface="맑은 고딕"/>
                 <a:ea typeface="맑은 고딕"/>
@@ -9192,14 +10023,14 @@
       </p:sp>
       <p:sp>
         <p:nvSpPr>
-          <p:cNvPr id="7" name="TextBox 6"/>
+          <p:cNvPr id="9" name="TextBox 8"/>
           <p:cNvSpPr txBox="1"/>
           <p:nvPr/>
         </p:nvSpPr>
         <p:spPr>
           <a:xfrm>
-            <a:off x="5486400" y="6455664"/>
-            <a:ext cx="6126480" cy="274320"/>
+            <a:off x="5486400" y="6473952"/>
+            <a:ext cx="6153912" cy="274320"/>
           </a:xfrm>
           <a:prstGeom prst="rect">
             <a:avLst/>
@@ -9218,39 +10049,28 @@
               </a:lnSpc>
             </a:pPr>
             <a:r>
-              <a:rPr sz="900" b="1">
-                <a:solidFill>
-                  <a:srgbClr val="1428A0"/>
-                </a:solidFill>
-                <a:latin typeface="맑은 고딕"/>
-                <a:ea typeface="맑은 고딕"/>
-                <a:cs typeface="맑은 고딕"/>
-              </a:rPr>
-              <a:t>SAMSUNG </a:t>
-            </a:r>
-            <a:r>
               <a:rPr sz="900" b="0">
                 <a:solidFill>
-                  <a:srgbClr val="6B7280"/>
-                </a:solidFill>
-                <a:latin typeface="맑은 고딕"/>
-                <a:ea typeface="맑은 고딕"/>
-                <a:cs typeface="맑은 고딕"/>
-              </a:rPr>
-              <a:t>DS  |  인사팀 대상 설명자료</a:t>
-            </a:r>
-          </a:p>
-        </p:txBody>
-      </p:sp>
-      <p:sp>
-        <p:nvSpPr>
-          <p:cNvPr id="8" name="TextBox 7"/>
+                  <a:srgbClr val="70747C"/>
+                </a:solidFill>
+                <a:latin typeface="맑은 고딕"/>
+                <a:ea typeface="맑은 고딕"/>
+                <a:cs typeface="맑은 고딕"/>
+              </a:rPr>
+              <a:t>인사팀 대상 설명자료</a:t>
+            </a:r>
+          </a:p>
+        </p:txBody>
+      </p:sp>
+      <p:sp>
+        <p:nvSpPr>
+          <p:cNvPr id="10" name="TextBox 9"/>
           <p:cNvSpPr txBox="1"/>
           <p:nvPr/>
         </p:nvSpPr>
         <p:spPr>
           <a:xfrm>
-            <a:off x="548640" y="1325880"/>
+            <a:off x="548640" y="1371600"/>
             <a:ext cx="10972800" cy="457200"/>
           </a:xfrm>
           <a:prstGeom prst="rect">
@@ -9272,7 +10092,7 @@
             <a:r>
               <a:rPr sz="1600" b="0">
                 <a:solidFill>
-                  <a:srgbClr val="222222"/>
+                  <a:srgbClr val="1A1A1A"/>
                 </a:solidFill>
                 <a:latin typeface="맑은 고딕"/>
                 <a:ea typeface="맑은 고딕"/>
@@ -9294,7 +10114,7 @@
             <a:r>
               <a:rPr sz="1600" b="0">
                 <a:solidFill>
-                  <a:srgbClr val="222222"/>
+                  <a:srgbClr val="1A1A1A"/>
                 </a:solidFill>
                 <a:latin typeface="맑은 고딕"/>
                 <a:ea typeface="맑은 고딕"/>
@@ -9307,24 +10127,24 @@
       </p:sp>
       <p:sp>
         <p:nvSpPr>
-          <p:cNvPr id="9" name="Rounded Rectangle 8"/>
+          <p:cNvPr id="11" name="Rounded Rectangle 10"/>
           <p:cNvSpPr/>
           <p:nvPr/>
         </p:nvSpPr>
         <p:spPr>
           <a:xfrm>
-            <a:off x="548640" y="1874519"/>
+            <a:off x="548640" y="1920240"/>
             <a:ext cx="5440680" cy="3291840"/>
           </a:xfrm>
           <a:prstGeom prst="roundRect">
             <a:avLst/>
           </a:prstGeom>
           <a:solidFill>
-            <a:srgbClr val="F4F6FB"/>
+            <a:srgbClr val="F4F5F7"/>
           </a:solidFill>
           <a:ln w="12700">
             <a:solidFill>
-              <a:srgbClr val="E2E6F0"/>
+              <a:srgbClr val="DDDFE4"/>
             </a:solidFill>
           </a:ln>
           <a:effectLst/>
@@ -9353,20 +10173,20 @@
       </p:sp>
       <p:sp>
         <p:nvSpPr>
-          <p:cNvPr id="10" name="Rounded Rectangle 9"/>
+          <p:cNvPr id="12" name="Rounded Rectangle 11"/>
           <p:cNvSpPr/>
           <p:nvPr/>
         </p:nvSpPr>
         <p:spPr>
           <a:xfrm>
-            <a:off x="548640" y="1874519"/>
+            <a:off x="548640" y="1920240"/>
             <a:ext cx="5440680" cy="548640"/>
           </a:xfrm>
           <a:prstGeom prst="roundRect">
             <a:avLst/>
           </a:prstGeom>
           <a:solidFill>
-            <a:srgbClr val="6B7280"/>
+            <a:srgbClr val="70747C"/>
           </a:solidFill>
           <a:ln>
             <a:noFill/>
@@ -9397,13 +10217,13 @@
       </p:sp>
       <p:sp>
         <p:nvSpPr>
-          <p:cNvPr id="11" name="TextBox 10"/>
+          <p:cNvPr id="13" name="TextBox 12"/>
           <p:cNvSpPr txBox="1"/>
           <p:nvPr/>
         </p:nvSpPr>
         <p:spPr>
           <a:xfrm>
-            <a:off x="548640" y="1938528"/>
+            <a:off x="548640" y="1984248"/>
             <a:ext cx="5440680" cy="411480"/>
           </a:xfrm>
           <a:prstGeom prst="rect">
@@ -9438,13 +10258,13 @@
       </p:sp>
       <p:sp>
         <p:nvSpPr>
-          <p:cNvPr id="12" name="TextBox 11"/>
+          <p:cNvPr id="14" name="TextBox 13"/>
           <p:cNvSpPr txBox="1"/>
           <p:nvPr/>
         </p:nvSpPr>
         <p:spPr>
           <a:xfrm>
-            <a:off x="822960" y="2606040"/>
+            <a:off x="822960" y="2651760"/>
             <a:ext cx="4937760" cy="2468880"/>
           </a:xfrm>
           <a:prstGeom prst="rect">
@@ -9466,7 +10286,7 @@
             <a:r>
               <a:rPr sz="1250" b="0">
                 <a:solidFill>
-                  <a:srgbClr val="222222"/>
+                  <a:srgbClr val="1A1A1A"/>
                 </a:solidFill>
                 <a:latin typeface="Consolas"/>
                 <a:ea typeface="Consolas"/>
@@ -9484,7 +10304,7 @@
             <a:r>
               <a:rPr sz="600" b="0">
                 <a:solidFill>
-                  <a:srgbClr val="222222"/>
+                  <a:srgbClr val="1A1A1A"/>
                 </a:solidFill>
                 <a:latin typeface="Consolas"/>
                 <a:ea typeface="Consolas"/>
@@ -9502,7 +10322,7 @@
             <a:r>
               <a:rPr sz="1250" b="0">
                 <a:solidFill>
-                  <a:srgbClr val="222222"/>
+                  <a:srgbClr val="1A1A1A"/>
                 </a:solidFill>
                 <a:latin typeface="Consolas"/>
                 <a:ea typeface="Consolas"/>
@@ -9520,7 +10340,7 @@
             <a:r>
               <a:rPr sz="1250" b="0">
                 <a:solidFill>
-                  <a:srgbClr val="222222"/>
+                  <a:srgbClr val="1A1A1A"/>
                 </a:solidFill>
                 <a:latin typeface="Consolas"/>
                 <a:ea typeface="Consolas"/>
@@ -9538,7 +10358,7 @@
             <a:r>
               <a:rPr sz="1250" b="0">
                 <a:solidFill>
-                  <a:srgbClr val="222222"/>
+                  <a:srgbClr val="1A1A1A"/>
                 </a:solidFill>
                 <a:latin typeface="Consolas"/>
                 <a:ea typeface="Consolas"/>
@@ -9556,7 +10376,7 @@
             <a:r>
               <a:rPr sz="600" b="0">
                 <a:solidFill>
-                  <a:srgbClr val="222222"/>
+                  <a:srgbClr val="1A1A1A"/>
                 </a:solidFill>
                 <a:latin typeface="Consolas"/>
                 <a:ea typeface="Consolas"/>
@@ -9587,20 +10407,20 @@
       </p:sp>
       <p:sp>
         <p:nvSpPr>
-          <p:cNvPr id="13" name="Chevron 12"/>
+          <p:cNvPr id="15" name="Chevron 14"/>
           <p:cNvSpPr/>
           <p:nvPr/>
         </p:nvSpPr>
         <p:spPr>
           <a:xfrm>
-            <a:off x="6053328" y="3246120"/>
+            <a:off x="6053328" y="3291840"/>
             <a:ext cx="502920" cy="548640"/>
           </a:xfrm>
           <a:prstGeom prst="chevron">
             <a:avLst/>
           </a:prstGeom>
           <a:solidFill>
-            <a:srgbClr val="3E5CD0"/>
+            <a:srgbClr val="111111"/>
           </a:solidFill>
           <a:ln>
             <a:noFill/>
@@ -9642,13 +10462,13 @@
       </p:sp>
       <p:sp>
         <p:nvSpPr>
-          <p:cNvPr id="14" name="Rounded Rectangle 13"/>
+          <p:cNvPr id="16" name="Rounded Rectangle 15"/>
           <p:cNvSpPr/>
           <p:nvPr/>
         </p:nvSpPr>
         <p:spPr>
           <a:xfrm>
-            <a:off x="6675120" y="1874519"/>
+            <a:off x="6675120" y="1920240"/>
             <a:ext cx="4965192" cy="3291840"/>
           </a:xfrm>
           <a:prstGeom prst="roundRect">
@@ -9659,7 +10479,7 @@
           </a:solidFill>
           <a:ln w="19050">
             <a:solidFill>
-              <a:srgbClr val="1428A0"/>
+              <a:srgbClr val="111111"/>
             </a:solidFill>
           </a:ln>
           <a:effectLst/>
@@ -9688,20 +10508,20 @@
       </p:sp>
       <p:sp>
         <p:nvSpPr>
-          <p:cNvPr id="15" name="Rounded Rectangle 14"/>
+          <p:cNvPr id="17" name="Rounded Rectangle 16"/>
           <p:cNvSpPr/>
           <p:nvPr/>
         </p:nvSpPr>
         <p:spPr>
           <a:xfrm>
-            <a:off x="6675120" y="1874519"/>
+            <a:off x="6675120" y="1920240"/>
             <a:ext cx="4965192" cy="548640"/>
           </a:xfrm>
           <a:prstGeom prst="roundRect">
             <a:avLst/>
           </a:prstGeom>
           <a:solidFill>
-            <a:srgbClr val="1428A0"/>
+            <a:srgbClr val="111111"/>
           </a:solidFill>
           <a:ln>
             <a:noFill/>
@@ -9732,13 +10552,13 @@
       </p:sp>
       <p:sp>
         <p:nvSpPr>
-          <p:cNvPr id="16" name="TextBox 15"/>
+          <p:cNvPr id="18" name="TextBox 17"/>
           <p:cNvSpPr txBox="1"/>
           <p:nvPr/>
         </p:nvSpPr>
         <p:spPr>
           <a:xfrm>
-            <a:off x="6675120" y="1938528"/>
+            <a:off x="6675120" y="1984248"/>
             <a:ext cx="4965192" cy="411480"/>
           </a:xfrm>
           <a:prstGeom prst="rect">
@@ -9773,13 +10593,13 @@
       </p:sp>
       <p:sp>
         <p:nvSpPr>
-          <p:cNvPr id="17" name="TextBox 16"/>
+          <p:cNvPr id="19" name="TextBox 18"/>
           <p:cNvSpPr txBox="1"/>
           <p:nvPr/>
         </p:nvSpPr>
         <p:spPr>
           <a:xfrm>
-            <a:off x="6949440" y="2606040"/>
+            <a:off x="6949440" y="2651760"/>
             <a:ext cx="4480560" cy="2468880"/>
           </a:xfrm>
           <a:prstGeom prst="rect">
@@ -9801,7 +10621,7 @@
             <a:r>
               <a:rPr sz="1250" b="0">
                 <a:solidFill>
-                  <a:srgbClr val="222222"/>
+                  <a:srgbClr val="1A1A1A"/>
                 </a:solidFill>
                 <a:latin typeface="맑은 고딕"/>
                 <a:ea typeface="맑은 고딕"/>
@@ -9819,7 +10639,7 @@
             <a:r>
               <a:rPr sz="600" b="0">
                 <a:solidFill>
-                  <a:srgbClr val="222222"/>
+                  <a:srgbClr val="1A1A1A"/>
                 </a:solidFill>
                 <a:latin typeface="맑은 고딕"/>
                 <a:ea typeface="맑은 고딕"/>
@@ -9837,7 +10657,7 @@
             <a:r>
               <a:rPr sz="1250" b="0">
                 <a:solidFill>
-                  <a:srgbClr val="222222"/>
+                  <a:srgbClr val="1A1A1A"/>
                 </a:solidFill>
                 <a:latin typeface="맑은 고딕"/>
                 <a:ea typeface="맑은 고딕"/>
@@ -9855,7 +10675,7 @@
             <a:r>
               <a:rPr sz="1250" b="0">
                 <a:solidFill>
-                  <a:srgbClr val="222222"/>
+                  <a:srgbClr val="1A1A1A"/>
                 </a:solidFill>
                 <a:latin typeface="맑은 고딕"/>
                 <a:ea typeface="맑은 고딕"/>
@@ -9873,7 +10693,7 @@
             <a:r>
               <a:rPr sz="1250" b="1">
                 <a:solidFill>
-                  <a:srgbClr val="222222"/>
+                  <a:srgbClr val="1A1A1A"/>
                 </a:solidFill>
                 <a:latin typeface="맑은 고딕"/>
                 <a:ea typeface="맑은 고딕"/>
@@ -9891,7 +10711,7 @@
             <a:r>
               <a:rPr sz="600" b="0">
                 <a:solidFill>
-                  <a:srgbClr val="222222"/>
+                  <a:srgbClr val="1A1A1A"/>
                 </a:solidFill>
                 <a:latin typeface="맑은 고딕"/>
                 <a:ea typeface="맑은 고딕"/>
@@ -9922,13 +10742,13 @@
       </p:sp>
       <p:sp>
         <p:nvSpPr>
-          <p:cNvPr id="18" name="TextBox 17"/>
+          <p:cNvPr id="20" name="TextBox 19"/>
           <p:cNvSpPr txBox="1"/>
           <p:nvPr/>
         </p:nvSpPr>
         <p:spPr>
           <a:xfrm>
-            <a:off x="548640" y="5349240"/>
+            <a:off x="548640" y="5394960"/>
             <a:ext cx="10972800" cy="457200"/>
           </a:xfrm>
           <a:prstGeom prst="rect">
@@ -9950,7 +10770,7 @@
             <a:r>
               <a:rPr sz="1400" b="0">
                 <a:solidFill>
-                  <a:srgbClr val="222222"/>
+                  <a:srgbClr val="1A1A1A"/>
                 </a:solidFill>
                 <a:latin typeface="맑은 고딕"/>
                 <a:ea typeface="맑은 고딕"/>
@@ -9972,7 +10792,7 @@
             <a:r>
               <a:rPr sz="1400" b="0">
                 <a:solidFill>
-                  <a:srgbClr val="222222"/>
+                  <a:srgbClr val="1A1A1A"/>
                 </a:solidFill>
                 <a:latin typeface="맑은 고딕"/>
                 <a:ea typeface="맑은 고딕"/>
@@ -10010,7 +10830,7 @@
         <p:spPr>
           <a:xfrm>
             <a:off x="0" y="0"/>
-            <a:ext cx="12191695" cy="1051560"/>
+            <a:ext cx="12191695" cy="6858000"/>
           </a:xfrm>
           <a:prstGeom prst="rect">
             <a:avLst/>
@@ -10053,8 +10873,52 @@
         </p:nvSpPr>
         <p:spPr>
           <a:xfrm>
-            <a:off x="0" y="1051560"/>
-            <a:ext cx="12191695" cy="41148"/>
+            <a:off x="0" y="0"/>
+            <a:ext cx="12191695" cy="1097280"/>
+          </a:xfrm>
+          <a:prstGeom prst="rect">
+            <a:avLst/>
+          </a:prstGeom>
+          <a:solidFill>
+            <a:srgbClr val="111111"/>
+          </a:solidFill>
+          <a:ln>
+            <a:noFill/>
+          </a:ln>
+          <a:effectLst/>
+        </p:spPr>
+        <p:style>
+          <a:lnRef idx="1">
+            <a:schemeClr val="accent1"/>
+          </a:lnRef>
+          <a:fillRef idx="3">
+            <a:schemeClr val="accent1"/>
+          </a:fillRef>
+          <a:effectRef idx="2">
+            <a:schemeClr val="accent1"/>
+          </a:effectRef>
+          <a:fontRef idx="minor">
+            <a:schemeClr val="lt1"/>
+          </a:fontRef>
+        </p:style>
+        <p:txBody>
+          <a:bodyPr rtlCol="0" anchor="ctr"/>
+          <a:lstStyle/>
+          <a:p>
+            <a:pPr algn="ctr"/>
+          </a:p>
+        </p:txBody>
+      </p:sp>
+      <p:sp>
+        <p:nvSpPr>
+          <p:cNvPr id="4" name="Rectangle 3"/>
+          <p:cNvSpPr/>
+          <p:nvPr/>
+        </p:nvSpPr>
+        <p:spPr>
+          <a:xfrm>
+            <a:off x="0" y="1097280"/>
+            <a:ext cx="12191695" cy="45720"/>
           </a:xfrm>
           <a:prstGeom prst="rect">
             <a:avLst/>
@@ -10091,13 +10955,13 @@
       </p:sp>
       <p:sp>
         <p:nvSpPr>
-          <p:cNvPr id="4" name="TextBox 3"/>
+          <p:cNvPr id="5" name="TextBox 4"/>
           <p:cNvSpPr txBox="1"/>
           <p:nvPr/>
         </p:nvSpPr>
         <p:spPr>
           <a:xfrm>
-            <a:off x="548640" y="164592"/>
+            <a:off x="548640" y="182880"/>
             <a:ext cx="10058400" cy="274320"/>
           </a:xfrm>
           <a:prstGeom prst="rect">
@@ -10119,7 +10983,7 @@
             <a:r>
               <a:rPr sz="1200" b="1">
                 <a:solidFill>
-                  <a:srgbClr val="3E5CD0"/>
+                  <a:srgbClr val="B9C4EA"/>
                 </a:solidFill>
                 <a:latin typeface="맑은 고딕"/>
                 <a:ea typeface="맑은 고딕"/>
@@ -10132,14 +10996,14 @@
       </p:sp>
       <p:sp>
         <p:nvSpPr>
-          <p:cNvPr id="5" name="TextBox 4"/>
+          <p:cNvPr id="6" name="TextBox 5"/>
           <p:cNvSpPr txBox="1"/>
           <p:nvPr/>
         </p:nvSpPr>
         <p:spPr>
           <a:xfrm>
-            <a:off x="548640" y="384048"/>
-            <a:ext cx="10972800" cy="640080"/>
+            <a:off x="548640" y="420624"/>
+            <a:ext cx="10972800" cy="603504"/>
           </a:xfrm>
           <a:prstGeom prst="rect">
             <a:avLst/>
@@ -10160,7 +11024,7 @@
             <a:r>
               <a:rPr sz="2600" b="1">
                 <a:solidFill>
-                  <a:srgbClr val="0B145A"/>
+                  <a:srgbClr val="FFFFFF"/>
                 </a:solidFill>
                 <a:latin typeface="맑은 고딕"/>
                 <a:ea typeface="맑은 고딕"/>
@@ -10173,13 +11037,65 @@
       </p:sp>
       <p:sp>
         <p:nvSpPr>
-          <p:cNvPr id="6" name="TextBox 5"/>
+          <p:cNvPr id="7" name="TextBox 6"/>
           <p:cNvSpPr txBox="1"/>
           <p:nvPr/>
         </p:nvSpPr>
         <p:spPr>
           <a:xfrm>
-            <a:off x="548640" y="6455664"/>
+            <a:off x="8229600" y="182880"/>
+            <a:ext cx="3410712" cy="274320"/>
+          </a:xfrm>
+          <a:prstGeom prst="rect">
+            <a:avLst/>
+          </a:prstGeom>
+          <a:noFill/>
+        </p:spPr>
+        <p:txBody>
+          <a:bodyPr wrap="square" anchor="t" lIns="25400" rIns="25400" tIns="25400" bIns="25400">
+            <a:spAutoFit/>
+          </a:bodyPr>
+          <a:lstStyle/>
+          <a:p>
+            <a:pPr algn="r">
+              <a:lnSpc>
+                <a:spcPct val="100000"/>
+              </a:lnSpc>
+            </a:pPr>
+            <a:r>
+              <a:rPr sz="1100" b="1">
+                <a:solidFill>
+                  <a:srgbClr val="FFFFFF"/>
+                </a:solidFill>
+                <a:latin typeface="맑은 고딕"/>
+                <a:ea typeface="맑은 고딕"/>
+                <a:cs typeface="맑은 고딕"/>
+              </a:rPr>
+              <a:t>SAMSUNG </a:t>
+            </a:r>
+            <a:r>
+              <a:rPr sz="1100" b="1">
+                <a:solidFill>
+                  <a:srgbClr val="B9C4EA"/>
+                </a:solidFill>
+                <a:latin typeface="맑은 고딕"/>
+                <a:ea typeface="맑은 고딕"/>
+                <a:cs typeface="맑은 고딕"/>
+              </a:rPr>
+              <a:t>DS</a:t>
+            </a:r>
+          </a:p>
+        </p:txBody>
+      </p:sp>
+      <p:sp>
+        <p:nvSpPr>
+          <p:cNvPr id="8" name="TextBox 7"/>
+          <p:cNvSpPr txBox="1"/>
+          <p:nvPr/>
+        </p:nvSpPr>
+        <p:spPr>
+          <a:xfrm>
+            <a:off x="548640" y="6473952"/>
             <a:ext cx="6400800" cy="274320"/>
           </a:xfrm>
           <a:prstGeom prst="rect">
@@ -10201,7 +11117,7 @@
             <a:r>
               <a:rPr sz="900" b="0">
                 <a:solidFill>
-                  <a:srgbClr val="6B7280"/>
+                  <a:srgbClr val="70747C"/>
                 </a:solidFill>
                 <a:latin typeface="맑은 고딕"/>
                 <a:ea typeface="맑은 고딕"/>
@@ -10214,14 +11130,14 @@
       </p:sp>
       <p:sp>
         <p:nvSpPr>
-          <p:cNvPr id="7" name="TextBox 6"/>
+          <p:cNvPr id="9" name="TextBox 8"/>
           <p:cNvSpPr txBox="1"/>
           <p:nvPr/>
         </p:nvSpPr>
         <p:spPr>
           <a:xfrm>
-            <a:off x="5486400" y="6455664"/>
-            <a:ext cx="6126480" cy="274320"/>
+            <a:off x="5486400" y="6473952"/>
+            <a:ext cx="6153912" cy="274320"/>
           </a:xfrm>
           <a:prstGeom prst="rect">
             <a:avLst/>
@@ -10240,50 +11156,39 @@
               </a:lnSpc>
             </a:pPr>
             <a:r>
-              <a:rPr sz="900" b="1">
-                <a:solidFill>
-                  <a:srgbClr val="1428A0"/>
-                </a:solidFill>
-                <a:latin typeface="맑은 고딕"/>
-                <a:ea typeface="맑은 고딕"/>
-                <a:cs typeface="맑은 고딕"/>
-              </a:rPr>
-              <a:t>SAMSUNG </a:t>
-            </a:r>
-            <a:r>
               <a:rPr sz="900" b="0">
                 <a:solidFill>
-                  <a:srgbClr val="6B7280"/>
-                </a:solidFill>
-                <a:latin typeface="맑은 고딕"/>
-                <a:ea typeface="맑은 고딕"/>
-                <a:cs typeface="맑은 고딕"/>
-              </a:rPr>
-              <a:t>DS  |  인사팀 대상 설명자료</a:t>
-            </a:r>
-          </a:p>
-        </p:txBody>
-      </p:sp>
-      <p:sp>
-        <p:nvSpPr>
-          <p:cNvPr id="8" name="Rounded Rectangle 7"/>
+                  <a:srgbClr val="70747C"/>
+                </a:solidFill>
+                <a:latin typeface="맑은 고딕"/>
+                <a:ea typeface="맑은 고딕"/>
+                <a:cs typeface="맑은 고딕"/>
+              </a:rPr>
+              <a:t>인사팀 대상 설명자료</a:t>
+            </a:r>
+          </a:p>
+        </p:txBody>
+      </p:sp>
+      <p:sp>
+        <p:nvSpPr>
+          <p:cNvPr id="10" name="Rounded Rectangle 9"/>
           <p:cNvSpPr/>
           <p:nvPr/>
         </p:nvSpPr>
         <p:spPr>
           <a:xfrm>
-            <a:off x="548640" y="1463040"/>
+            <a:off x="548640" y="1508760"/>
             <a:ext cx="11091672" cy="1051560"/>
           </a:xfrm>
           <a:prstGeom prst="roundRect">
             <a:avLst/>
           </a:prstGeom>
           <a:solidFill>
-            <a:srgbClr val="F4F6FB"/>
+            <a:srgbClr val="F4F5F7"/>
           </a:solidFill>
           <a:ln w="12700">
             <a:solidFill>
-              <a:srgbClr val="E2E6F0"/>
+              <a:srgbClr val="DDDFE4"/>
             </a:solidFill>
           </a:ln>
           <a:effectLst/>
@@ -10312,13 +11217,13 @@
       </p:sp>
       <p:sp>
         <p:nvSpPr>
-          <p:cNvPr id="9" name="Rectangle 8"/>
+          <p:cNvPr id="11" name="Rectangle 10"/>
           <p:cNvSpPr/>
           <p:nvPr/>
         </p:nvSpPr>
         <p:spPr>
           <a:xfrm>
-            <a:off x="548640" y="1463040"/>
+            <a:off x="548640" y="1508760"/>
             <a:ext cx="109728" cy="1051560"/>
           </a:xfrm>
           <a:prstGeom prst="rect">
@@ -10356,13 +11261,13 @@
       </p:sp>
       <p:sp>
         <p:nvSpPr>
-          <p:cNvPr id="10" name="TextBox 9"/>
+          <p:cNvPr id="12" name="TextBox 11"/>
           <p:cNvSpPr txBox="1"/>
           <p:nvPr/>
         </p:nvSpPr>
         <p:spPr>
           <a:xfrm>
-            <a:off x="868680" y="1572768"/>
+            <a:off x="868680" y="1618488"/>
             <a:ext cx="3657600" cy="868680"/>
           </a:xfrm>
           <a:prstGeom prst="rect">
@@ -10384,7 +11289,7 @@
             <a:r>
               <a:rPr sz="1500" b="1">
                 <a:solidFill>
-                  <a:srgbClr val="0B145A"/>
+                  <a:srgbClr val="1A1A1A"/>
                 </a:solidFill>
                 <a:latin typeface="맑은 고딕"/>
                 <a:ea typeface="맑은 고딕"/>
@@ -10397,13 +11302,13 @@
       </p:sp>
       <p:sp>
         <p:nvSpPr>
-          <p:cNvPr id="11" name="TextBox 10"/>
+          <p:cNvPr id="13" name="TextBox 12"/>
           <p:cNvSpPr txBox="1"/>
           <p:nvPr/>
         </p:nvSpPr>
         <p:spPr>
           <a:xfrm>
-            <a:off x="4572000" y="1572768"/>
+            <a:off x="4572000" y="1618488"/>
             <a:ext cx="6858000" cy="868680"/>
           </a:xfrm>
           <a:prstGeom prst="rect">
@@ -10425,7 +11330,7 @@
             <a:r>
               <a:rPr sz="1250" b="0">
                 <a:solidFill>
-                  <a:srgbClr val="222222"/>
+                  <a:srgbClr val="1A1A1A"/>
                 </a:solidFill>
                 <a:latin typeface="맑은 고딕"/>
                 <a:ea typeface="맑은 고딕"/>
@@ -10438,24 +11343,24 @@
       </p:sp>
       <p:sp>
         <p:nvSpPr>
-          <p:cNvPr id="12" name="Rounded Rectangle 11"/>
+          <p:cNvPr id="14" name="Rounded Rectangle 13"/>
           <p:cNvSpPr/>
           <p:nvPr/>
         </p:nvSpPr>
         <p:spPr>
           <a:xfrm>
-            <a:off x="548640" y="2670048"/>
+            <a:off x="548640" y="2715768"/>
             <a:ext cx="11091672" cy="1051560"/>
           </a:xfrm>
           <a:prstGeom prst="roundRect">
             <a:avLst/>
           </a:prstGeom>
           <a:solidFill>
-            <a:srgbClr val="F4F6FB"/>
+            <a:srgbClr val="F4F5F7"/>
           </a:solidFill>
           <a:ln w="12700">
             <a:solidFill>
-              <a:srgbClr val="E2E6F0"/>
+              <a:srgbClr val="DDDFE4"/>
             </a:solidFill>
           </a:ln>
           <a:effectLst/>
@@ -10484,13 +11389,13 @@
       </p:sp>
       <p:sp>
         <p:nvSpPr>
-          <p:cNvPr id="13" name="Rectangle 12"/>
+          <p:cNvPr id="15" name="Rectangle 14"/>
           <p:cNvSpPr/>
           <p:nvPr/>
         </p:nvSpPr>
         <p:spPr>
           <a:xfrm>
-            <a:off x="548640" y="2670048"/>
+            <a:off x="548640" y="2715768"/>
             <a:ext cx="109728" cy="1051560"/>
           </a:xfrm>
           <a:prstGeom prst="rect">
@@ -10528,13 +11433,13 @@
       </p:sp>
       <p:sp>
         <p:nvSpPr>
-          <p:cNvPr id="14" name="TextBox 13"/>
+          <p:cNvPr id="16" name="TextBox 15"/>
           <p:cNvSpPr txBox="1"/>
           <p:nvPr/>
         </p:nvSpPr>
         <p:spPr>
           <a:xfrm>
-            <a:off x="868680" y="2779776"/>
+            <a:off x="868680" y="2825496"/>
             <a:ext cx="3657600" cy="868680"/>
           </a:xfrm>
           <a:prstGeom prst="rect">
@@ -10556,7 +11461,7 @@
             <a:r>
               <a:rPr sz="1500" b="1">
                 <a:solidFill>
-                  <a:srgbClr val="0B145A"/>
+                  <a:srgbClr val="1A1A1A"/>
                 </a:solidFill>
                 <a:latin typeface="맑은 고딕"/>
                 <a:ea typeface="맑은 고딕"/>
@@ -10569,13 +11474,13 @@
       </p:sp>
       <p:sp>
         <p:nvSpPr>
-          <p:cNvPr id="15" name="TextBox 14"/>
+          <p:cNvPr id="17" name="TextBox 16"/>
           <p:cNvSpPr txBox="1"/>
           <p:nvPr/>
         </p:nvSpPr>
         <p:spPr>
           <a:xfrm>
-            <a:off x="4572000" y="2779776"/>
+            <a:off x="4572000" y="2825496"/>
             <a:ext cx="6858000" cy="868680"/>
           </a:xfrm>
           <a:prstGeom prst="rect">
@@ -10597,7 +11502,7 @@
             <a:r>
               <a:rPr sz="1250" b="0">
                 <a:solidFill>
-                  <a:srgbClr val="222222"/>
+                  <a:srgbClr val="1A1A1A"/>
                 </a:solidFill>
                 <a:latin typeface="맑은 고딕"/>
                 <a:ea typeface="맑은 고딕"/>
@@ -10610,24 +11515,24 @@
       </p:sp>
       <p:sp>
         <p:nvSpPr>
-          <p:cNvPr id="16" name="Rounded Rectangle 15"/>
+          <p:cNvPr id="18" name="Rounded Rectangle 17"/>
           <p:cNvSpPr/>
           <p:nvPr/>
         </p:nvSpPr>
         <p:spPr>
           <a:xfrm>
-            <a:off x="548640" y="3877056"/>
+            <a:off x="548640" y="3922776"/>
             <a:ext cx="11091672" cy="1051560"/>
           </a:xfrm>
           <a:prstGeom prst="roundRect">
             <a:avLst/>
           </a:prstGeom>
           <a:solidFill>
-            <a:srgbClr val="F4F6FB"/>
+            <a:srgbClr val="F4F5F7"/>
           </a:solidFill>
           <a:ln w="12700">
             <a:solidFill>
-              <a:srgbClr val="E2E6F0"/>
+              <a:srgbClr val="DDDFE4"/>
             </a:solidFill>
           </a:ln>
           <a:effectLst/>
@@ -10656,13 +11561,13 @@
       </p:sp>
       <p:sp>
         <p:nvSpPr>
-          <p:cNvPr id="17" name="Rectangle 16"/>
+          <p:cNvPr id="19" name="Rectangle 18"/>
           <p:cNvSpPr/>
           <p:nvPr/>
         </p:nvSpPr>
         <p:spPr>
           <a:xfrm>
-            <a:off x="548640" y="3877056"/>
+            <a:off x="548640" y="3922776"/>
             <a:ext cx="109728" cy="1051560"/>
           </a:xfrm>
           <a:prstGeom prst="rect">
@@ -10700,13 +11605,13 @@
       </p:sp>
       <p:sp>
         <p:nvSpPr>
-          <p:cNvPr id="18" name="TextBox 17"/>
+          <p:cNvPr id="20" name="TextBox 19"/>
           <p:cNvSpPr txBox="1"/>
           <p:nvPr/>
         </p:nvSpPr>
         <p:spPr>
           <a:xfrm>
-            <a:off x="868680" y="3986784"/>
+            <a:off x="868680" y="4032504"/>
             <a:ext cx="3657600" cy="868680"/>
           </a:xfrm>
           <a:prstGeom prst="rect">
@@ -10728,7 +11633,7 @@
             <a:r>
               <a:rPr sz="1500" b="1">
                 <a:solidFill>
-                  <a:srgbClr val="0B145A"/>
+                  <a:srgbClr val="1A1A1A"/>
                 </a:solidFill>
                 <a:latin typeface="맑은 고딕"/>
                 <a:ea typeface="맑은 고딕"/>
@@ -10741,13 +11646,13 @@
       </p:sp>
       <p:sp>
         <p:nvSpPr>
-          <p:cNvPr id="19" name="TextBox 18"/>
+          <p:cNvPr id="21" name="TextBox 20"/>
           <p:cNvSpPr txBox="1"/>
           <p:nvPr/>
         </p:nvSpPr>
         <p:spPr>
           <a:xfrm>
-            <a:off x="4572000" y="3986784"/>
+            <a:off x="4572000" y="4032504"/>
             <a:ext cx="6858000" cy="868680"/>
           </a:xfrm>
           <a:prstGeom prst="rect">
@@ -10769,7 +11674,7 @@
             <a:r>
               <a:rPr sz="1250" b="0">
                 <a:solidFill>
-                  <a:srgbClr val="222222"/>
+                  <a:srgbClr val="1A1A1A"/>
                 </a:solidFill>
                 <a:latin typeface="맑은 고딕"/>
                 <a:ea typeface="맑은 고딕"/>
@@ -10782,24 +11687,24 @@
       </p:sp>
       <p:sp>
         <p:nvSpPr>
-          <p:cNvPr id="20" name="Rounded Rectangle 19"/>
+          <p:cNvPr id="22" name="Rounded Rectangle 21"/>
           <p:cNvSpPr/>
           <p:nvPr/>
         </p:nvSpPr>
         <p:spPr>
           <a:xfrm>
-            <a:off x="548640" y="5084064"/>
+            <a:off x="548640" y="5129783"/>
             <a:ext cx="11091672" cy="1051560"/>
           </a:xfrm>
           <a:prstGeom prst="roundRect">
             <a:avLst/>
           </a:prstGeom>
           <a:solidFill>
-            <a:srgbClr val="F4F6FB"/>
+            <a:srgbClr val="F4F5F7"/>
           </a:solidFill>
           <a:ln w="12700">
             <a:solidFill>
-              <a:srgbClr val="E2E6F0"/>
+              <a:srgbClr val="DDDFE4"/>
             </a:solidFill>
           </a:ln>
           <a:effectLst/>
@@ -10828,13 +11733,13 @@
       </p:sp>
       <p:sp>
         <p:nvSpPr>
-          <p:cNvPr id="21" name="Rectangle 20"/>
+          <p:cNvPr id="23" name="Rectangle 22"/>
           <p:cNvSpPr/>
           <p:nvPr/>
         </p:nvSpPr>
         <p:spPr>
           <a:xfrm>
-            <a:off x="548640" y="5084064"/>
+            <a:off x="548640" y="5129783"/>
             <a:ext cx="109728" cy="1051560"/>
           </a:xfrm>
           <a:prstGeom prst="rect">
@@ -10872,13 +11777,13 @@
       </p:sp>
       <p:sp>
         <p:nvSpPr>
-          <p:cNvPr id="22" name="TextBox 21"/>
+          <p:cNvPr id="24" name="TextBox 23"/>
           <p:cNvSpPr txBox="1"/>
           <p:nvPr/>
         </p:nvSpPr>
         <p:spPr>
           <a:xfrm>
-            <a:off x="868680" y="5193792"/>
+            <a:off x="868680" y="5239512"/>
             <a:ext cx="3657600" cy="868680"/>
           </a:xfrm>
           <a:prstGeom prst="rect">
@@ -10900,7 +11805,7 @@
             <a:r>
               <a:rPr sz="1500" b="1">
                 <a:solidFill>
-                  <a:srgbClr val="0B145A"/>
+                  <a:srgbClr val="1A1A1A"/>
                 </a:solidFill>
                 <a:latin typeface="맑은 고딕"/>
                 <a:ea typeface="맑은 고딕"/>
@@ -10913,13 +11818,13 @@
       </p:sp>
       <p:sp>
         <p:nvSpPr>
-          <p:cNvPr id="23" name="TextBox 22"/>
+          <p:cNvPr id="25" name="TextBox 24"/>
           <p:cNvSpPr txBox="1"/>
           <p:nvPr/>
         </p:nvSpPr>
         <p:spPr>
           <a:xfrm>
-            <a:off x="4572000" y="5193792"/>
+            <a:off x="4572000" y="5239512"/>
             <a:ext cx="6858000" cy="868680"/>
           </a:xfrm>
           <a:prstGeom prst="rect">
@@ -10941,7 +11846,7 @@
             <a:r>
               <a:rPr sz="1250" b="0">
                 <a:solidFill>
-                  <a:srgbClr val="222222"/>
+                  <a:srgbClr val="1A1A1A"/>
                 </a:solidFill>
                 <a:latin typeface="맑은 고딕"/>
                 <a:ea typeface="맑은 고딕"/>
@@ -10985,7 +11890,7 @@
             <a:avLst/>
           </a:prstGeom>
           <a:solidFill>
-            <a:srgbClr val="0B145A"/>
+            <a:srgbClr val="FFFFFF"/>
           </a:solidFill>
           <a:ln>
             <a:noFill/>
@@ -11023,13 +11928,13 @@
         <p:spPr>
           <a:xfrm>
             <a:off x="0" y="0"/>
-            <a:ext cx="256032" cy="6858000"/>
+            <a:ext cx="12191695" cy="1097280"/>
           </a:xfrm>
           <a:prstGeom prst="rect">
             <a:avLst/>
           </a:prstGeom>
           <a:solidFill>
-            <a:srgbClr val="3E5CD0"/>
+            <a:srgbClr val="111111"/>
           </a:solidFill>
           <a:ln>
             <a:noFill/>
@@ -11060,14 +11965,58 @@
       </p:sp>
       <p:sp>
         <p:nvSpPr>
-          <p:cNvPr id="4" name="TextBox 3"/>
+          <p:cNvPr id="4" name="Rectangle 3"/>
+          <p:cNvSpPr/>
+          <p:nvPr/>
+        </p:nvSpPr>
+        <p:spPr>
+          <a:xfrm>
+            <a:off x="0" y="1097280"/>
+            <a:ext cx="12191695" cy="45720"/>
+          </a:xfrm>
+          <a:prstGeom prst="rect">
+            <a:avLst/>
+          </a:prstGeom>
+          <a:solidFill>
+            <a:srgbClr val="1428A0"/>
+          </a:solidFill>
+          <a:ln>
+            <a:noFill/>
+          </a:ln>
+          <a:effectLst/>
+        </p:spPr>
+        <p:style>
+          <a:lnRef idx="1">
+            <a:schemeClr val="accent1"/>
+          </a:lnRef>
+          <a:fillRef idx="3">
+            <a:schemeClr val="accent1"/>
+          </a:fillRef>
+          <a:effectRef idx="2">
+            <a:schemeClr val="accent1"/>
+          </a:effectRef>
+          <a:fontRef idx="minor">
+            <a:schemeClr val="lt1"/>
+          </a:fontRef>
+        </p:style>
+        <p:txBody>
+          <a:bodyPr rtlCol="0" anchor="ctr"/>
+          <a:lstStyle/>
+          <a:p>
+            <a:pPr algn="ctr"/>
+          </a:p>
+        </p:txBody>
+      </p:sp>
+      <p:sp>
+        <p:nvSpPr>
+          <p:cNvPr id="5" name="TextBox 4"/>
           <p:cNvSpPr txBox="1"/>
           <p:nvPr/>
         </p:nvSpPr>
         <p:spPr>
           <a:xfrm>
-            <a:off x="822960" y="731520"/>
-            <a:ext cx="10058400" cy="457200"/>
+            <a:off x="548640" y="182880"/>
+            <a:ext cx="10058400" cy="274320"/>
           </a:xfrm>
           <a:prstGeom prst="rect">
             <a:avLst/>
@@ -11086,29 +12035,29 @@
               </a:lnSpc>
             </a:pPr>
             <a:r>
-              <a:rPr sz="3000" b="1">
-                <a:solidFill>
-                  <a:srgbClr val="FFFFFF"/>
-                </a:solidFill>
-                <a:latin typeface="맑은 고딕"/>
-                <a:ea typeface="맑은 고딕"/>
-                <a:cs typeface="맑은 고딕"/>
-              </a:rPr>
-              <a:t>시작하기</a:t>
-            </a:r>
-          </a:p>
-        </p:txBody>
-      </p:sp>
-      <p:sp>
-        <p:nvSpPr>
-          <p:cNvPr id="5" name="TextBox 4"/>
+              <a:rPr sz="1200" b="1">
+                <a:solidFill>
+                  <a:srgbClr val="B9C4EA"/>
+                </a:solidFill>
+                <a:latin typeface="맑은 고딕"/>
+                <a:ea typeface="맑은 고딕"/>
+                <a:cs typeface="맑은 고딕"/>
+              </a:rPr>
+              <a:t>도입</a:t>
+            </a:r>
+          </a:p>
+        </p:txBody>
+      </p:sp>
+      <p:sp>
+        <p:nvSpPr>
+          <p:cNvPr id="6" name="TextBox 5"/>
           <p:cNvSpPr txBox="1"/>
           <p:nvPr/>
         </p:nvSpPr>
         <p:spPr>
           <a:xfrm>
-            <a:off x="914400" y="1737360"/>
-            <a:ext cx="2011680" cy="548640"/>
+            <a:off x="548640" y="420624"/>
+            <a:ext cx="10972800" cy="603504"/>
           </a:xfrm>
           <a:prstGeom prst="rect">
             <a:avLst/>
@@ -11116,7 +12065,7 @@
           <a:noFill/>
         </p:spPr>
         <p:txBody>
-          <a:bodyPr wrap="square" anchor="t" lIns="25400" rIns="25400" tIns="25400" bIns="25400">
+          <a:bodyPr wrap="square" anchor="ctr" lIns="25400" rIns="25400" tIns="25400" bIns="25400">
             <a:spAutoFit/>
           </a:bodyPr>
           <a:lstStyle/>
@@ -11127,29 +12076,81 @@
               </a:lnSpc>
             </a:pPr>
             <a:r>
-              <a:rPr sz="1800" b="1">
-                <a:solidFill>
-                  <a:srgbClr val="9FB3F2"/>
-                </a:solidFill>
-                <a:latin typeface="맑은 고딕"/>
-                <a:ea typeface="맑은 고딕"/>
-                <a:cs typeface="맑은 고딕"/>
-              </a:rPr>
-              <a:t>1  보호</a:t>
-            </a:r>
-          </a:p>
-        </p:txBody>
-      </p:sp>
-      <p:sp>
-        <p:nvSpPr>
-          <p:cNvPr id="6" name="TextBox 5"/>
+              <a:rPr sz="2600" b="1">
+                <a:solidFill>
+                  <a:srgbClr val="FFFFFF"/>
+                </a:solidFill>
+                <a:latin typeface="맑은 고딕"/>
+                <a:ea typeface="맑은 고딕"/>
+                <a:cs typeface="맑은 고딕"/>
+              </a:rPr>
+              <a:t>시작하기</a:t>
+            </a:r>
+          </a:p>
+        </p:txBody>
+      </p:sp>
+      <p:sp>
+        <p:nvSpPr>
+          <p:cNvPr id="7" name="TextBox 6"/>
           <p:cNvSpPr txBox="1"/>
           <p:nvPr/>
         </p:nvSpPr>
         <p:spPr>
           <a:xfrm>
-            <a:off x="2834640" y="1764792"/>
-            <a:ext cx="8229600" cy="548640"/>
+            <a:off x="8229600" y="182880"/>
+            <a:ext cx="3410712" cy="274320"/>
+          </a:xfrm>
+          <a:prstGeom prst="rect">
+            <a:avLst/>
+          </a:prstGeom>
+          <a:noFill/>
+        </p:spPr>
+        <p:txBody>
+          <a:bodyPr wrap="square" anchor="t" lIns="25400" rIns="25400" tIns="25400" bIns="25400">
+            <a:spAutoFit/>
+          </a:bodyPr>
+          <a:lstStyle/>
+          <a:p>
+            <a:pPr algn="r">
+              <a:lnSpc>
+                <a:spcPct val="100000"/>
+              </a:lnSpc>
+            </a:pPr>
+            <a:r>
+              <a:rPr sz="1100" b="1">
+                <a:solidFill>
+                  <a:srgbClr val="FFFFFF"/>
+                </a:solidFill>
+                <a:latin typeface="맑은 고딕"/>
+                <a:ea typeface="맑은 고딕"/>
+                <a:cs typeface="맑은 고딕"/>
+              </a:rPr>
+              <a:t>SAMSUNG </a:t>
+            </a:r>
+            <a:r>
+              <a:rPr sz="1100" b="1">
+                <a:solidFill>
+                  <a:srgbClr val="B9C4EA"/>
+                </a:solidFill>
+                <a:latin typeface="맑은 고딕"/>
+                <a:ea typeface="맑은 고딕"/>
+                <a:cs typeface="맑은 고딕"/>
+              </a:rPr>
+              <a:t>DS</a:t>
+            </a:r>
+          </a:p>
+        </p:txBody>
+      </p:sp>
+      <p:sp>
+        <p:nvSpPr>
+          <p:cNvPr id="8" name="TextBox 7"/>
+          <p:cNvSpPr txBox="1"/>
+          <p:nvPr/>
+        </p:nvSpPr>
+        <p:spPr>
+          <a:xfrm>
+            <a:off x="548640" y="6473952"/>
+            <a:ext cx="6400800" cy="274320"/>
           </a:xfrm>
           <a:prstGeom prst="rect">
             <a:avLst/>
@@ -11168,7 +12169,149 @@
               </a:lnSpc>
             </a:pPr>
             <a:r>
-              <a:rPr sz="1500" b="0">
+              <a:rPr sz="900" b="0">
+                <a:solidFill>
+                  <a:srgbClr val="70747C"/>
+                </a:solidFill>
+                <a:latin typeface="맑은 고딕"/>
+                <a:ea typeface="맑은 고딕"/>
+                <a:cs typeface="맑은 고딕"/>
+              </a:rPr>
+              <a:t>대외비 · Confidential</a:t>
+            </a:r>
+          </a:p>
+        </p:txBody>
+      </p:sp>
+      <p:sp>
+        <p:nvSpPr>
+          <p:cNvPr id="9" name="TextBox 8"/>
+          <p:cNvSpPr txBox="1"/>
+          <p:nvPr/>
+        </p:nvSpPr>
+        <p:spPr>
+          <a:xfrm>
+            <a:off x="5486400" y="6473952"/>
+            <a:ext cx="6153912" cy="274320"/>
+          </a:xfrm>
+          <a:prstGeom prst="rect">
+            <a:avLst/>
+          </a:prstGeom>
+          <a:noFill/>
+        </p:spPr>
+        <p:txBody>
+          <a:bodyPr wrap="square" anchor="t" lIns="25400" rIns="25400" tIns="25400" bIns="25400">
+            <a:spAutoFit/>
+          </a:bodyPr>
+          <a:lstStyle/>
+          <a:p>
+            <a:pPr algn="r">
+              <a:lnSpc>
+                <a:spcPct val="100000"/>
+              </a:lnSpc>
+            </a:pPr>
+            <a:r>
+              <a:rPr sz="900" b="0">
+                <a:solidFill>
+                  <a:srgbClr val="70747C"/>
+                </a:solidFill>
+                <a:latin typeface="맑은 고딕"/>
+                <a:ea typeface="맑은 고딕"/>
+                <a:cs typeface="맑은 고딕"/>
+              </a:rPr>
+              <a:t>인사팀 대상 설명자료</a:t>
+            </a:r>
+          </a:p>
+        </p:txBody>
+      </p:sp>
+      <p:sp>
+        <p:nvSpPr>
+          <p:cNvPr id="10" name="Rounded Rectangle 9"/>
+          <p:cNvSpPr/>
+          <p:nvPr/>
+        </p:nvSpPr>
+        <p:spPr>
+          <a:xfrm>
+            <a:off x="548640" y="1600200"/>
+            <a:ext cx="11091672" cy="822960"/>
+          </a:xfrm>
+          <a:prstGeom prst="roundRect">
+            <a:avLst/>
+          </a:prstGeom>
+          <a:solidFill>
+            <a:srgbClr val="F4F5F7"/>
+          </a:solidFill>
+          <a:ln w="12700">
+            <a:solidFill>
+              <a:srgbClr val="DDDFE4"/>
+            </a:solidFill>
+          </a:ln>
+          <a:effectLst/>
+        </p:spPr>
+        <p:style>
+          <a:lnRef idx="1">
+            <a:schemeClr val="accent1"/>
+          </a:lnRef>
+          <a:fillRef idx="3">
+            <a:schemeClr val="accent1"/>
+          </a:fillRef>
+          <a:effectRef idx="2">
+            <a:schemeClr val="accent1"/>
+          </a:effectRef>
+          <a:fontRef idx="minor">
+            <a:schemeClr val="lt1"/>
+          </a:fontRef>
+        </p:style>
+        <p:txBody>
+          <a:bodyPr rtlCol="0" anchor="ctr"/>
+          <a:lstStyle/>
+          <a:p>
+            <a:pPr algn="ctr"/>
+          </a:p>
+        </p:txBody>
+      </p:sp>
+      <p:sp>
+        <p:nvSpPr>
+          <p:cNvPr id="11" name="Rounded Rectangle 10"/>
+          <p:cNvSpPr/>
+          <p:nvPr/>
+        </p:nvSpPr>
+        <p:spPr>
+          <a:xfrm>
+            <a:off x="777240" y="1737360"/>
+            <a:ext cx="1280160" cy="548640"/>
+          </a:xfrm>
+          <a:prstGeom prst="roundRect">
+            <a:avLst/>
+          </a:prstGeom>
+          <a:solidFill>
+            <a:srgbClr val="111111"/>
+          </a:solidFill>
+          <a:ln>
+            <a:noFill/>
+          </a:ln>
+          <a:effectLst/>
+        </p:spPr>
+        <p:style>
+          <a:lnRef idx="1">
+            <a:schemeClr val="accent1"/>
+          </a:lnRef>
+          <a:fillRef idx="3">
+            <a:schemeClr val="accent1"/>
+          </a:fillRef>
+          <a:effectRef idx="2">
+            <a:schemeClr val="accent1"/>
+          </a:effectRef>
+          <a:fontRef idx="minor">
+            <a:schemeClr val="lt1"/>
+          </a:fontRef>
+        </p:style>
+        <p:txBody>
+          <a:bodyPr rtlCol="0" anchor="ctr" wrap="square" lIns="76200" rIns="76200" tIns="50800" bIns="50800"/>
+          <a:lstStyle/>
+          <a:p>
+            <a:pPr algn="ctr"/>
+            <a:r>
+              <a:rPr sz="1500" b="1">
                 <a:solidFill>
                   <a:srgbClr val="FFFFFF"/>
                 </a:solidFill>
@@ -11176,21 +12319,21 @@
                 <a:ea typeface="맑은 고딕"/>
                 <a:cs typeface="맑은 고딕"/>
               </a:rPr>
-              <a:t>민감 파일을 게이트웨이에 통과 → 토큰본 + 암호화 금고 생성</a:t>
-            </a:r>
-          </a:p>
-        </p:txBody>
-      </p:sp>
-      <p:sp>
-        <p:nvSpPr>
-          <p:cNvPr id="7" name="TextBox 6"/>
+              <a:t>1  보호</a:t>
+            </a:r>
+          </a:p>
+        </p:txBody>
+      </p:sp>
+      <p:sp>
+        <p:nvSpPr>
+          <p:cNvPr id="12" name="TextBox 11"/>
           <p:cNvSpPr txBox="1"/>
           <p:nvPr/>
         </p:nvSpPr>
         <p:spPr>
           <a:xfrm>
-            <a:off x="914400" y="2651760"/>
-            <a:ext cx="2011680" cy="548640"/>
+            <a:off x="2286000" y="1691640"/>
+            <a:ext cx="8961120" cy="640080"/>
           </a:xfrm>
           <a:prstGeom prst="rect">
             <a:avLst/>
@@ -11198,7 +12341,7 @@
           <a:noFill/>
         </p:spPr>
         <p:txBody>
-          <a:bodyPr wrap="square" anchor="t" lIns="25400" rIns="25400" tIns="25400" bIns="25400">
+          <a:bodyPr wrap="square" anchor="ctr" lIns="25400" rIns="25400" tIns="25400" bIns="25400">
             <a:spAutoFit/>
           </a:bodyPr>
           <a:lstStyle/>
@@ -11209,9 +12352,110 @@
               </a:lnSpc>
             </a:pPr>
             <a:r>
-              <a:rPr sz="1800" b="1">
-                <a:solidFill>
-                  <a:srgbClr val="9FB3F2"/>
+              <a:rPr sz="1500" b="0">
+                <a:solidFill>
+                  <a:srgbClr val="1A1A1A"/>
+                </a:solidFill>
+                <a:latin typeface="맑은 고딕"/>
+                <a:ea typeface="맑은 고딕"/>
+                <a:cs typeface="맑은 고딕"/>
+              </a:rPr>
+              <a:t>민감 파일을 게이트웨이에 통과 → 토큰본 + 암호화 금고 생성</a:t>
+            </a:r>
+          </a:p>
+        </p:txBody>
+      </p:sp>
+      <p:sp>
+        <p:nvSpPr>
+          <p:cNvPr id="13" name="Rounded Rectangle 12"/>
+          <p:cNvSpPr/>
+          <p:nvPr/>
+        </p:nvSpPr>
+        <p:spPr>
+          <a:xfrm>
+            <a:off x="548640" y="2560320"/>
+            <a:ext cx="11091672" cy="822960"/>
+          </a:xfrm>
+          <a:prstGeom prst="roundRect">
+            <a:avLst/>
+          </a:prstGeom>
+          <a:solidFill>
+            <a:srgbClr val="F4F5F7"/>
+          </a:solidFill>
+          <a:ln w="12700">
+            <a:solidFill>
+              <a:srgbClr val="DDDFE4"/>
+            </a:solidFill>
+          </a:ln>
+          <a:effectLst/>
+        </p:spPr>
+        <p:style>
+          <a:lnRef idx="1">
+            <a:schemeClr val="accent1"/>
+          </a:lnRef>
+          <a:fillRef idx="3">
+            <a:schemeClr val="accent1"/>
+          </a:fillRef>
+          <a:effectRef idx="2">
+            <a:schemeClr val="accent1"/>
+          </a:effectRef>
+          <a:fontRef idx="minor">
+            <a:schemeClr val="lt1"/>
+          </a:fontRef>
+        </p:style>
+        <p:txBody>
+          <a:bodyPr rtlCol="0" anchor="ctr"/>
+          <a:lstStyle/>
+          <a:p>
+            <a:pPr algn="ctr"/>
+          </a:p>
+        </p:txBody>
+      </p:sp>
+      <p:sp>
+        <p:nvSpPr>
+          <p:cNvPr id="14" name="Rounded Rectangle 13"/>
+          <p:cNvSpPr/>
+          <p:nvPr/>
+        </p:nvSpPr>
+        <p:spPr>
+          <a:xfrm>
+            <a:off x="777240" y="2697479"/>
+            <a:ext cx="1280160" cy="548640"/>
+          </a:xfrm>
+          <a:prstGeom prst="roundRect">
+            <a:avLst/>
+          </a:prstGeom>
+          <a:solidFill>
+            <a:srgbClr val="111111"/>
+          </a:solidFill>
+          <a:ln>
+            <a:noFill/>
+          </a:ln>
+          <a:effectLst/>
+        </p:spPr>
+        <p:style>
+          <a:lnRef idx="1">
+            <a:schemeClr val="accent1"/>
+          </a:lnRef>
+          <a:fillRef idx="3">
+            <a:schemeClr val="accent1"/>
+          </a:fillRef>
+          <a:effectRef idx="2">
+            <a:schemeClr val="accent1"/>
+          </a:effectRef>
+          <a:fontRef idx="minor">
+            <a:schemeClr val="lt1"/>
+          </a:fontRef>
+        </p:style>
+        <p:txBody>
+          <a:bodyPr rtlCol="0" anchor="ctr" wrap="square" lIns="76200" rIns="76200" tIns="50800" bIns="50800"/>
+          <a:lstStyle/>
+          <a:p>
+            <a:pPr algn="ctr"/>
+            <a:r>
+              <a:rPr sz="1500" b="1">
+                <a:solidFill>
+                  <a:srgbClr val="FFFFFF"/>
                 </a:solidFill>
                 <a:latin typeface="맑은 고딕"/>
                 <a:ea typeface="맑은 고딕"/>
@@ -11224,14 +12468,14 @@
       </p:sp>
       <p:sp>
         <p:nvSpPr>
-          <p:cNvPr id="8" name="TextBox 7"/>
+          <p:cNvPr id="15" name="TextBox 14"/>
           <p:cNvSpPr txBox="1"/>
           <p:nvPr/>
         </p:nvSpPr>
         <p:spPr>
           <a:xfrm>
-            <a:off x="2834640" y="2679191"/>
-            <a:ext cx="8229600" cy="548640"/>
+            <a:off x="2286000" y="2651760"/>
+            <a:ext cx="8961120" cy="640080"/>
           </a:xfrm>
           <a:prstGeom prst="rect">
             <a:avLst/>
@@ -11239,7 +12483,7 @@
           <a:noFill/>
         </p:spPr>
         <p:txBody>
-          <a:bodyPr wrap="square" anchor="t" lIns="25400" rIns="25400" tIns="25400" bIns="25400">
+          <a:bodyPr wrap="square" anchor="ctr" lIns="25400" rIns="25400" tIns="25400" bIns="25400">
             <a:spAutoFit/>
           </a:bodyPr>
           <a:lstStyle/>
@@ -11252,27 +12496,128 @@
             <a:r>
               <a:rPr sz="1500" b="0">
                 <a:solidFill>
+                  <a:srgbClr val="1A1A1A"/>
+                </a:solidFill>
+                <a:latin typeface="맑은 고딕"/>
+                <a:ea typeface="맑은 고딕"/>
+                <a:cs typeface="맑은 고딕"/>
+              </a:rPr>
+              <a:t>토큰본으로 평소처럼 안내문·통지·리포트 작성</a:t>
+            </a:r>
+          </a:p>
+        </p:txBody>
+      </p:sp>
+      <p:sp>
+        <p:nvSpPr>
+          <p:cNvPr id="16" name="Rounded Rectangle 15"/>
+          <p:cNvSpPr/>
+          <p:nvPr/>
+        </p:nvSpPr>
+        <p:spPr>
+          <a:xfrm>
+            <a:off x="548640" y="3520440"/>
+            <a:ext cx="11091672" cy="822960"/>
+          </a:xfrm>
+          <a:prstGeom prst="roundRect">
+            <a:avLst/>
+          </a:prstGeom>
+          <a:solidFill>
+            <a:srgbClr val="F4F5F7"/>
+          </a:solidFill>
+          <a:ln w="12700">
+            <a:solidFill>
+              <a:srgbClr val="DDDFE4"/>
+            </a:solidFill>
+          </a:ln>
+          <a:effectLst/>
+        </p:spPr>
+        <p:style>
+          <a:lnRef idx="1">
+            <a:schemeClr val="accent1"/>
+          </a:lnRef>
+          <a:fillRef idx="3">
+            <a:schemeClr val="accent1"/>
+          </a:fillRef>
+          <a:effectRef idx="2">
+            <a:schemeClr val="accent1"/>
+          </a:effectRef>
+          <a:fontRef idx="minor">
+            <a:schemeClr val="lt1"/>
+          </a:fontRef>
+        </p:style>
+        <p:txBody>
+          <a:bodyPr rtlCol="0" anchor="ctr"/>
+          <a:lstStyle/>
+          <a:p>
+            <a:pPr algn="ctr"/>
+          </a:p>
+        </p:txBody>
+      </p:sp>
+      <p:sp>
+        <p:nvSpPr>
+          <p:cNvPr id="17" name="Rounded Rectangle 16"/>
+          <p:cNvSpPr/>
+          <p:nvPr/>
+        </p:nvSpPr>
+        <p:spPr>
+          <a:xfrm>
+            <a:off x="777240" y="3657600"/>
+            <a:ext cx="1280160" cy="548640"/>
+          </a:xfrm>
+          <a:prstGeom prst="roundRect">
+            <a:avLst/>
+          </a:prstGeom>
+          <a:solidFill>
+            <a:srgbClr val="111111"/>
+          </a:solidFill>
+          <a:ln>
+            <a:noFill/>
+          </a:ln>
+          <a:effectLst/>
+        </p:spPr>
+        <p:style>
+          <a:lnRef idx="1">
+            <a:schemeClr val="accent1"/>
+          </a:lnRef>
+          <a:fillRef idx="3">
+            <a:schemeClr val="accent1"/>
+          </a:fillRef>
+          <a:effectRef idx="2">
+            <a:schemeClr val="accent1"/>
+          </a:effectRef>
+          <a:fontRef idx="minor">
+            <a:schemeClr val="lt1"/>
+          </a:fontRef>
+        </p:style>
+        <p:txBody>
+          <a:bodyPr rtlCol="0" anchor="ctr" wrap="square" lIns="76200" rIns="76200" tIns="50800" bIns="50800"/>
+          <a:lstStyle/>
+          <a:p>
+            <a:pPr algn="ctr"/>
+            <a:r>
+              <a:rPr sz="1500" b="1">
+                <a:solidFill>
                   <a:srgbClr val="FFFFFF"/>
                 </a:solidFill>
                 <a:latin typeface="맑은 고딕"/>
                 <a:ea typeface="맑은 고딕"/>
                 <a:cs typeface="맑은 고딕"/>
               </a:rPr>
-              <a:t>토큰본으로 평소처럼 안내문·통지·리포트 작성</a:t>
-            </a:r>
-          </a:p>
-        </p:txBody>
-      </p:sp>
-      <p:sp>
-        <p:nvSpPr>
-          <p:cNvPr id="9" name="TextBox 8"/>
+              <a:t>3  복원</a:t>
+            </a:r>
+          </a:p>
+        </p:txBody>
+      </p:sp>
+      <p:sp>
+        <p:nvSpPr>
+          <p:cNvPr id="18" name="TextBox 17"/>
           <p:cNvSpPr txBox="1"/>
           <p:nvPr/>
         </p:nvSpPr>
         <p:spPr>
           <a:xfrm>
-            <a:off x="914400" y="3566160"/>
-            <a:ext cx="2011680" cy="548640"/>
+            <a:off x="2286000" y="3611880"/>
+            <a:ext cx="8961120" cy="640080"/>
           </a:xfrm>
           <a:prstGeom prst="rect">
             <a:avLst/>
@@ -11280,7 +12625,7 @@
           <a:noFill/>
         </p:spPr>
         <p:txBody>
-          <a:bodyPr wrap="square" anchor="t" lIns="25400" rIns="25400" tIns="25400" bIns="25400">
+          <a:bodyPr wrap="square" anchor="ctr" lIns="25400" rIns="25400" tIns="25400" bIns="25400">
             <a:spAutoFit/>
           </a:bodyPr>
           <a:lstStyle/>
@@ -11291,29 +12636,98 @@
               </a:lnSpc>
             </a:pPr>
             <a:r>
-              <a:rPr sz="1800" b="1">
-                <a:solidFill>
-                  <a:srgbClr val="9FB3F2"/>
-                </a:solidFill>
-                <a:latin typeface="맑은 고딕"/>
-                <a:ea typeface="맑은 고딕"/>
-                <a:cs typeface="맑은 고딕"/>
-              </a:rPr>
-              <a:t>3  복원</a:t>
-            </a:r>
-          </a:p>
-        </p:txBody>
-      </p:sp>
-      <p:sp>
-        <p:nvSpPr>
-          <p:cNvPr id="10" name="TextBox 9"/>
+              <a:rPr sz="1500" b="0">
+                <a:solidFill>
+                  <a:srgbClr val="1A1A1A"/>
+                </a:solidFill>
+                <a:latin typeface="맑은 고딕"/>
+                <a:ea typeface="맑은 고딕"/>
+                <a:cs typeface="맑은 고딕"/>
+              </a:rPr>
+              <a:t>담당자 키로 최종본만 원복하여 발송</a:t>
+            </a:r>
+          </a:p>
+        </p:txBody>
+      </p:sp>
+      <p:sp>
+        <p:nvSpPr>
+          <p:cNvPr id="19" name="Rounded Rectangle 18"/>
+          <p:cNvSpPr/>
+          <p:nvPr/>
+        </p:nvSpPr>
+        <p:spPr>
+          <a:xfrm>
+            <a:off x="548640" y="4663440"/>
+            <a:ext cx="11091672" cy="1097280"/>
+          </a:xfrm>
+          <a:prstGeom prst="roundRect">
+            <a:avLst/>
+          </a:prstGeom>
+          <a:solidFill>
+            <a:srgbClr val="111111"/>
+          </a:solidFill>
+          <a:ln>
+            <a:noFill/>
+          </a:ln>
+          <a:effectLst/>
+        </p:spPr>
+        <p:style>
+          <a:lnRef idx="1">
+            <a:schemeClr val="accent1"/>
+          </a:lnRef>
+          <a:fillRef idx="3">
+            <a:schemeClr val="accent1"/>
+          </a:fillRef>
+          <a:effectRef idx="2">
+            <a:schemeClr val="accent1"/>
+          </a:effectRef>
+          <a:fontRef idx="minor">
+            <a:schemeClr val="lt1"/>
+          </a:fontRef>
+        </p:style>
+        <p:txBody>
+          <a:bodyPr rtlCol="0" anchor="ctr" wrap="square" lIns="76200" rIns="76200" tIns="50800" bIns="50800"/>
+          <a:lstStyle/>
+          <a:p>
+            <a:pPr algn="l"/>
+            <a:r>
+              <a:rPr sz="1300" b="1">
+                <a:solidFill>
+                  <a:srgbClr val="B9C4EA"/>
+                </a:solidFill>
+                <a:latin typeface="맑은 고딕"/>
+                <a:ea typeface="맑은 고딕"/>
+                <a:cs typeface="맑은 고딕"/>
+              </a:rPr>
+              <a:t>문의 · 도입 지원</a:t>
+            </a:r>
+          </a:p>
+          <a:p>
+            <a:pPr algn="l"/>
+            <a:r>
+              <a:rPr sz="1500" b="0">
+                <a:solidFill>
+                  <a:srgbClr val="FFFFFF"/>
+                </a:solidFill>
+                <a:latin typeface="맑은 고딕"/>
+                <a:ea typeface="맑은 고딕"/>
+                <a:cs typeface="맑은 고딕"/>
+              </a:rPr>
+              <a:t>담당자 키 발급과 적용 방법은 데이터보호 담당 부서로 문의해 주세요.</a:t>
+            </a:r>
+          </a:p>
+        </p:txBody>
+      </p:sp>
+      <p:sp>
+        <p:nvSpPr>
+          <p:cNvPr id="20" name="TextBox 19"/>
           <p:cNvSpPr txBox="1"/>
           <p:nvPr/>
         </p:nvSpPr>
         <p:spPr>
           <a:xfrm>
-            <a:off x="2834640" y="3593591"/>
-            <a:ext cx="8229600" cy="548640"/>
+            <a:off x="548640" y="5897880"/>
+            <a:ext cx="11091672" cy="365760"/>
           </a:xfrm>
           <a:prstGeom prst="rect">
             <a:avLst/>
@@ -11332,127 +12746,15 @@
               </a:lnSpc>
             </a:pPr>
             <a:r>
-              <a:rPr sz="1500" b="0">
-                <a:solidFill>
-                  <a:srgbClr val="FFFFFF"/>
-                </a:solidFill>
-                <a:latin typeface="맑은 고딕"/>
-                <a:ea typeface="맑은 고딕"/>
-                <a:cs typeface="맑은 고딕"/>
-              </a:rPr>
-              <a:t>담당자 키로 최종본만 원복하여 발송</a:t>
-            </a:r>
-          </a:p>
-        </p:txBody>
-      </p:sp>
-      <p:sp>
-        <p:nvSpPr>
-          <p:cNvPr id="11" name="Rounded Rectangle 10"/>
-          <p:cNvSpPr/>
-          <p:nvPr/>
-        </p:nvSpPr>
-        <p:spPr>
-          <a:xfrm>
-            <a:off x="868680" y="4754880"/>
-            <a:ext cx="10424160" cy="1143000"/>
-          </a:xfrm>
-          <a:prstGeom prst="roundRect">
-            <a:avLst/>
-          </a:prstGeom>
-          <a:solidFill>
-            <a:srgbClr val="16226E"/>
-          </a:solidFill>
-          <a:ln w="12700">
-            <a:solidFill>
-              <a:srgbClr val="3E5CD0"/>
-            </a:solidFill>
-          </a:ln>
-          <a:effectLst/>
-        </p:spPr>
-        <p:style>
-          <a:lnRef idx="1">
-            <a:schemeClr val="accent1"/>
-          </a:lnRef>
-          <a:fillRef idx="3">
-            <a:schemeClr val="accent1"/>
-          </a:fillRef>
-          <a:effectRef idx="2">
-            <a:schemeClr val="accent1"/>
-          </a:effectRef>
-          <a:fontRef idx="minor">
-            <a:schemeClr val="lt1"/>
-          </a:fontRef>
-        </p:style>
-        <p:txBody>
-          <a:bodyPr rtlCol="0" anchor="ctr" wrap="square" lIns="76200" rIns="76200" tIns="50800" bIns="50800"/>
-          <a:lstStyle/>
-          <a:p>
-            <a:pPr algn="l"/>
-            <a:r>
-              <a:rPr sz="1300" b="1">
-                <a:solidFill>
-                  <a:srgbClr val="9FB3F2"/>
-                </a:solidFill>
-                <a:latin typeface="맑은 고딕"/>
-                <a:ea typeface="맑은 고딕"/>
-                <a:cs typeface="맑은 고딕"/>
-              </a:rPr>
-              <a:t>문의 · 도입 지원</a:t>
-            </a:r>
-          </a:p>
-          <a:p>
-            <a:pPr algn="l"/>
-            <a:r>
-              <a:rPr sz="1500" b="0">
-                <a:solidFill>
-                  <a:srgbClr val="FFFFFF"/>
-                </a:solidFill>
-                <a:latin typeface="맑은 고딕"/>
-                <a:ea typeface="맑은 고딕"/>
-                <a:cs typeface="맑은 고딕"/>
-              </a:rPr>
-              <a:t>담당자 키 발급과 적용 방법은 데이터보호 담당 부서로 문의해 주세요.</a:t>
-            </a:r>
-          </a:p>
-        </p:txBody>
-      </p:sp>
-      <p:sp>
-        <p:nvSpPr>
-          <p:cNvPr id="12" name="TextBox 11"/>
-          <p:cNvSpPr txBox="1"/>
-          <p:nvPr/>
-        </p:nvSpPr>
-        <p:spPr>
-          <a:xfrm>
-            <a:off x="868680" y="6263640"/>
-            <a:ext cx="10424160" cy="365760"/>
-          </a:xfrm>
-          <a:prstGeom prst="rect">
-            <a:avLst/>
-          </a:prstGeom>
-          <a:noFill/>
-        </p:spPr>
-        <p:txBody>
-          <a:bodyPr wrap="square" anchor="t" lIns="25400" rIns="25400" tIns="25400" bIns="25400">
-            <a:spAutoFit/>
-          </a:bodyPr>
-          <a:lstStyle/>
-          <a:p>
-            <a:pPr algn="l">
-              <a:lnSpc>
-                <a:spcPct val="100000"/>
-              </a:lnSpc>
-            </a:pPr>
-            <a:r>
               <a:rPr sz="1000" b="0">
                 <a:solidFill>
-                  <a:srgbClr val="8A97C9"/>
-                </a:solidFill>
-                <a:latin typeface="맑은 고딕"/>
-                <a:ea typeface="맑은 고딕"/>
-                <a:cs typeface="맑은 고딕"/>
-              </a:rPr>
-              <a:t>※ 본 자료의 디자인은 Samsung DS 브랜드를 근사한 것이며, 데이터는 모두 합성(가상) 예시입니다.</a:t>
+                  <a:srgbClr val="70747C"/>
+                </a:solidFill>
+                <a:latin typeface="맑은 고딕"/>
+                <a:ea typeface="맑은 고딕"/>
+                <a:cs typeface="맑은 고딕"/>
+              </a:rPr>
+              <a:t>※ 데이터는 모두 합성(가상) 예시입니다.</a:t>
             </a:r>
           </a:p>
         </p:txBody>
